--- a/2026.06.28 - MULTI - DataOps na Prática IA a Serviço da Alta Gestão vFINAL.pptx
+++ b/2026.06.28 - MULTI - DataOps na Prática IA a Serviço da Alta Gestão vFINAL.pptx
@@ -13995,7 +13995,7 @@
                 </a:solidFill>
                 <a:latin typeface="Calibri"/>
               </a:rPr>
-              <a:t>Cada unidade tem seu PlantPAx. Não há visão única nem comparação direta entre plantas.</a:t>
+              <a:t>Cada unidade tem seu PlantPAx adaptado às necessidades e padrões da Inpasa. Não há visão única, nem comparação direta entre as plantas.</a:t>
             </a:r>
           </a:p>
         </p:txBody>

--- a/2026.06.28 - MULTI - DataOps na Prática IA a Serviço da Alta Gestão vFINAL.pptx
+++ b/2026.06.28 - MULTI - DataOps na Prática IA a Serviço da Alta Gestão vFINAL.pptx
@@ -3639,8 +3639,8 @@
         </p:nvSpPr>
         <p:spPr>
           <a:xfrm>
-            <a:off x="868680" y="4754880"/>
-            <a:ext cx="10607040" cy="1371600"/>
+            <a:off x="868680" y="4892040"/>
+            <a:ext cx="10607040" cy="1097280"/>
           </a:xfrm>
           <a:prstGeom prst="rect">
             <a:avLst/>
@@ -3662,40 +3662,13 @@
               </a:spcAft>
             </a:pPr>
             <a:r>
-              <a:rPr sz="1400" b="0" i="0">
-                <a:solidFill>
-                  <a:srgbClr val="627D98"/>
-                </a:solidFill>
-                <a:latin typeface="Calibri"/>
-              </a:rPr>
-              <a:t>Apresentado a:  </a:t>
-            </a:r>
-            <a:r>
-              <a:rPr sz="1400" b="1" i="0">
-                <a:solidFill>
-                  <a:srgbClr val="FFFFFF"/>
-                </a:solidFill>
-                <a:latin typeface="Calibri"/>
-              </a:rPr>
-              <a:t>Sr. José  e  Éder</a:t>
-            </a:r>
-            <a:r>
-              <a:rPr sz="1400" b="0" i="0">
-                <a:solidFill>
-                  <a:srgbClr val="627D98"/>
-                </a:solidFill>
-                <a:latin typeface="Calibri"/>
-              </a:rPr>
-              <a:t>      por  </a:t>
-            </a:r>
-            <a:r>
-              <a:rPr sz="1400" b="1" i="0">
-                <a:solidFill>
-                  <a:srgbClr val="FFFFFF"/>
-                </a:solidFill>
-                <a:latin typeface="Calibri"/>
-              </a:rPr>
-              <a:t>Itiel Gonçalves · VP Automação &amp; Elétrica</a:t>
+              <a:rPr sz="1450" b="0" i="0">
+                <a:solidFill>
+                  <a:srgbClr val="CDDAE8"/>
+                </a:solidFill>
+                <a:latin typeface="Calibri"/>
+              </a:rPr>
+              <a:t>Automação inteligente  ·  Inteligência Artificial  ·  Manutenção prescritiva</a:t>
             </a:r>
           </a:p>
           <a:p>
@@ -3708,32 +3681,13 @@
               </a:spcAft>
             </a:pPr>
             <a:r>
-              <a:rPr sz="1300" b="0" i="0">
-                <a:solidFill>
-                  <a:srgbClr val="627D98"/>
-                </a:solidFill>
-                <a:latin typeface="Calibri"/>
-              </a:rPr>
-              <a:t>Centro de Operações Integradas (COI)  ·  Benchmarking entre plantas  ·  Manutenção prescritiva</a:t>
-            </a:r>
-          </a:p>
-          <a:p>
-            <a:pPr algn="l">
-              <a:spcBef>
-                <a:spcPts val="0"/>
-              </a:spcBef>
-              <a:spcAft>
-                <a:spcPts val="400"/>
-              </a:spcAft>
-            </a:pPr>
-            <a:r>
               <a:rPr sz="1250" b="0" i="0">
                 <a:solidFill>
                   <a:srgbClr val="8FA9C2"/>
                 </a:solidFill>
                 <a:latin typeface="Calibri"/>
               </a:rPr>
-              <a:t>Base: sessão estratégica Inpasa × Rockwell  ·  Mayfield Heights, OH  ·  26/06/2026</a:t>
+              <a:t>Base: sessão estratégica Inpasa × Rockwell  ·  Cleveland, OH  ·  26/06/2026</a:t>
             </a:r>
           </a:p>
         </p:txBody>

--- a/2026.06.28 - MULTI - DataOps na Prática IA a Serviço da Alta Gestão vFINAL.pptx
+++ b/2026.06.28 - MULTI - DataOps na Prática IA a Serviço da Alta Gestão vFINAL.pptx
@@ -27,7 +27,6 @@
     <p:sldId id="275" r:id="rId26"/>
     <p:sldId id="276" r:id="rId27"/>
     <p:sldId id="277" r:id="rId28"/>
-    <p:sldId id="278" r:id="rId29"/>
   </p:sldIdLst>
   <p:sldSz cx="12191695" cy="6858000" type="screen4x3"/>
   <p:notesSz cx="6858000" cy="9144000"/>
@@ -4922,7 +4921,7 @@
                 </a:solidFill>
                 <a:latin typeface="Calibri"/>
               </a:rPr>
-              <a:t>Detecta desgaste precoce e recomenda a ação antes da parada custosa.</a:t>
+              <a:t>Detecta desgaste precoce e age antes da parada — complementa a Tractian (rotativos), agora para os demais ativos.</a:t>
             </a:r>
           </a:p>
         </p:txBody>
@@ -8451,7 +8450,7 @@
             <a:avLst/>
           </a:prstGeom>
           <a:solidFill>
-            <a:srgbClr val="D93A3A"/>
+            <a:srgbClr val="169C52"/>
           </a:solidFill>
           <a:ln>
             <a:noFill/>
@@ -8495,7 +8494,7 @@
             <a:avLst/>
           </a:prstGeom>
           <a:solidFill>
-            <a:srgbClr val="D93A3A"/>
+            <a:srgbClr val="169C52"/>
           </a:solidFill>
           <a:ln>
             <a:noFill/>
@@ -8557,11 +8556,11 @@
             <a:r>
               <a:rPr sz="1150" b="1" i="0">
                 <a:solidFill>
-                  <a:srgbClr val="D93A3A"/>
-                </a:solidFill>
-                <a:latin typeface="Calibri"/>
-              </a:rPr>
-              <a:t>BENCHMARKING DE ALARMES · IA</a:t>
+                  <a:srgbClr val="169C52"/>
+                </a:solidFill>
+                <a:latin typeface="Calibri"/>
+              </a:rPr>
+              <a:t>INDICADORES</a:t>
             </a:r>
           </a:p>
         </p:txBody>
@@ -8603,21 +8602,1506 @@
                 </a:solidFill>
                 <a:latin typeface="Calibri"/>
               </a:rPr>
-              <a:t>Análise de alarmes assistida por IA</a:t>
-            </a:r>
-          </a:p>
-        </p:txBody>
-      </p:sp>
-      <p:sp>
-        <p:nvSpPr>
-          <p:cNvPr id="7" name="TextBox 6"/>
+              <a:t>KPIs de benchmarking que o ecossistema já mede</a:t>
+            </a:r>
+          </a:p>
+        </p:txBody>
+      </p:sp>
+      <p:sp>
+        <p:nvSpPr>
+          <p:cNvPr id="7" name="Rectangle 6"/>
+          <p:cNvSpPr/>
+          <p:nvPr/>
+        </p:nvSpPr>
+        <p:spPr>
+          <a:xfrm>
+            <a:off x="777240" y="1481328"/>
+            <a:ext cx="3931920" cy="457200"/>
+          </a:xfrm>
+          <a:prstGeom prst="rect">
+            <a:avLst/>
+          </a:prstGeom>
+          <a:solidFill>
+            <a:srgbClr val="102A43"/>
+          </a:solidFill>
+          <a:ln w="6350">
+            <a:solidFill>
+              <a:srgbClr val="D9E2EC"/>
+            </a:solidFill>
+          </a:ln>
+          <a:effectLst/>
+        </p:spPr>
+        <p:style>
+          <a:lnRef idx="1">
+            <a:schemeClr val="accent1"/>
+          </a:lnRef>
+          <a:fillRef idx="3">
+            <a:schemeClr val="accent1"/>
+          </a:fillRef>
+          <a:effectRef idx="2">
+            <a:schemeClr val="accent1"/>
+          </a:effectRef>
+          <a:fontRef idx="minor">
+            <a:schemeClr val="lt1"/>
+          </a:fontRef>
+        </p:style>
+        <p:txBody>
+          <a:bodyPr rtlCol="0" anchor="ctr" wrap="square" lIns="101600" rIns="76200"/>
+          <a:lstStyle/>
+          <a:p>
+            <a:pPr algn="ctr"/>
+            <a:r>
+              <a:rPr sz="1250" b="1">
+                <a:solidFill>
+                  <a:srgbClr val="FFFFFF"/>
+                </a:solidFill>
+                <a:latin typeface="Calibri"/>
+              </a:rPr>
+              <a:t>KPI</a:t>
+            </a:r>
+          </a:p>
+        </p:txBody>
+      </p:sp>
+      <p:sp>
+        <p:nvSpPr>
+          <p:cNvPr id="8" name="Rectangle 7"/>
+          <p:cNvSpPr/>
+          <p:nvPr/>
+        </p:nvSpPr>
+        <p:spPr>
+          <a:xfrm>
+            <a:off x="4709160" y="1481328"/>
+            <a:ext cx="3931920" cy="457200"/>
+          </a:xfrm>
+          <a:prstGeom prst="rect">
+            <a:avLst/>
+          </a:prstGeom>
+          <a:solidFill>
+            <a:srgbClr val="102A43"/>
+          </a:solidFill>
+          <a:ln w="6350">
+            <a:solidFill>
+              <a:srgbClr val="D9E2EC"/>
+            </a:solidFill>
+          </a:ln>
+          <a:effectLst/>
+        </p:spPr>
+        <p:style>
+          <a:lnRef idx="1">
+            <a:schemeClr val="accent1"/>
+          </a:lnRef>
+          <a:fillRef idx="3">
+            <a:schemeClr val="accent1"/>
+          </a:fillRef>
+          <a:effectRef idx="2">
+            <a:schemeClr val="accent1"/>
+          </a:effectRef>
+          <a:fontRef idx="minor">
+            <a:schemeClr val="lt1"/>
+          </a:fontRef>
+        </p:style>
+        <p:txBody>
+          <a:bodyPr rtlCol="0" anchor="ctr" wrap="square" lIns="101600" rIns="76200"/>
+          <a:lstStyle/>
+          <a:p>
+            <a:pPr algn="ctr"/>
+            <a:r>
+              <a:rPr sz="1250" b="1">
+                <a:solidFill>
+                  <a:srgbClr val="FFFFFF"/>
+                </a:solidFill>
+                <a:latin typeface="Calibri"/>
+              </a:rPr>
+              <a:t>Ferramenta</a:t>
+            </a:r>
+          </a:p>
+        </p:txBody>
+      </p:sp>
+      <p:sp>
+        <p:nvSpPr>
+          <p:cNvPr id="9" name="Rectangle 8"/>
+          <p:cNvSpPr/>
+          <p:nvPr/>
+        </p:nvSpPr>
+        <p:spPr>
+          <a:xfrm>
+            <a:off x="8641080" y="1481328"/>
+            <a:ext cx="2743200" cy="457200"/>
+          </a:xfrm>
+          <a:prstGeom prst="rect">
+            <a:avLst/>
+          </a:prstGeom>
+          <a:solidFill>
+            <a:srgbClr val="102A43"/>
+          </a:solidFill>
+          <a:ln w="6350">
+            <a:solidFill>
+              <a:srgbClr val="D9E2EC"/>
+            </a:solidFill>
+          </a:ln>
+          <a:effectLst/>
+        </p:spPr>
+        <p:style>
+          <a:lnRef idx="1">
+            <a:schemeClr val="accent1"/>
+          </a:lnRef>
+          <a:fillRef idx="3">
+            <a:schemeClr val="accent1"/>
+          </a:fillRef>
+          <a:effectRef idx="2">
+            <a:schemeClr val="accent1"/>
+          </a:effectRef>
+          <a:fontRef idx="minor">
+            <a:schemeClr val="lt1"/>
+          </a:fontRef>
+        </p:style>
+        <p:txBody>
+          <a:bodyPr rtlCol="0" anchor="ctr" wrap="square" lIns="101600" rIns="76200"/>
+          <a:lstStyle/>
+          <a:p>
+            <a:pPr algn="ctr"/>
+            <a:r>
+              <a:rPr sz="1250" b="1">
+                <a:solidFill>
+                  <a:srgbClr val="FFFFFF"/>
+                </a:solidFill>
+                <a:latin typeface="Calibri"/>
+              </a:rPr>
+              <a:t>Disponível hoje?</a:t>
+            </a:r>
+          </a:p>
+        </p:txBody>
+      </p:sp>
+      <p:sp>
+        <p:nvSpPr>
+          <p:cNvPr id="10" name="Rectangle 9"/>
+          <p:cNvSpPr/>
+          <p:nvPr/>
+        </p:nvSpPr>
+        <p:spPr>
+          <a:xfrm>
+            <a:off x="777240" y="1938528"/>
+            <a:ext cx="3931920" cy="457200"/>
+          </a:xfrm>
+          <a:prstGeom prst="rect">
+            <a:avLst/>
+          </a:prstGeom>
+          <a:solidFill>
+            <a:srgbClr val="FFFFFF"/>
+          </a:solidFill>
+          <a:ln w="6350">
+            <a:solidFill>
+              <a:srgbClr val="D9E2EC"/>
+            </a:solidFill>
+          </a:ln>
+          <a:effectLst/>
+        </p:spPr>
+        <p:style>
+          <a:lnRef idx="1">
+            <a:schemeClr val="accent1"/>
+          </a:lnRef>
+          <a:fillRef idx="3">
+            <a:schemeClr val="accent1"/>
+          </a:fillRef>
+          <a:effectRef idx="2">
+            <a:schemeClr val="accent1"/>
+          </a:effectRef>
+          <a:fontRef idx="minor">
+            <a:schemeClr val="lt1"/>
+          </a:fontRef>
+        </p:style>
+        <p:txBody>
+          <a:bodyPr rtlCol="0" anchor="ctr" wrap="square" lIns="101600" rIns="76200"/>
+          <a:lstStyle/>
+          <a:p>
+            <a:pPr algn="ctr"/>
+            <a:r>
+              <a:rPr sz="1250" b="1">
+                <a:solidFill>
+                  <a:srgbClr val="102A43"/>
+                </a:solidFill>
+                <a:latin typeface="Calibri"/>
+              </a:rPr>
+              <a:t>Alarmes por operador/hora</a:t>
+            </a:r>
+          </a:p>
+        </p:txBody>
+      </p:sp>
+      <p:sp>
+        <p:nvSpPr>
+          <p:cNvPr id="11" name="Rectangle 10"/>
+          <p:cNvSpPr/>
+          <p:nvPr/>
+        </p:nvSpPr>
+        <p:spPr>
+          <a:xfrm>
+            <a:off x="4709160" y="1938528"/>
+            <a:ext cx="3931920" cy="457200"/>
+          </a:xfrm>
+          <a:prstGeom prst="rect">
+            <a:avLst/>
+          </a:prstGeom>
+          <a:solidFill>
+            <a:srgbClr val="FFFFFF"/>
+          </a:solidFill>
+          <a:ln w="6350">
+            <a:solidFill>
+              <a:srgbClr val="D9E2EC"/>
+            </a:solidFill>
+          </a:ln>
+          <a:effectLst/>
+        </p:spPr>
+        <p:style>
+          <a:lnRef idx="1">
+            <a:schemeClr val="accent1"/>
+          </a:lnRef>
+          <a:fillRef idx="3">
+            <a:schemeClr val="accent1"/>
+          </a:fillRef>
+          <a:effectRef idx="2">
+            <a:schemeClr val="accent1"/>
+          </a:effectRef>
+          <a:fontRef idx="minor">
+            <a:schemeClr val="lt1"/>
+          </a:fontRef>
+        </p:style>
+        <p:txBody>
+          <a:bodyPr rtlCol="0" anchor="ctr" wrap="square" lIns="101600" rIns="76200"/>
+          <a:lstStyle/>
+          <a:p>
+            <a:pPr algn="ctr"/>
+            <a:r>
+              <a:rPr sz="1250" b="0">
+                <a:solidFill>
+                  <a:srgbClr val="334E68"/>
+                </a:solidFill>
+                <a:latin typeface="Calibri"/>
+              </a:rPr>
+              <a:t>Grafana (hoje) + DataMosaix</a:t>
+            </a:r>
+          </a:p>
+        </p:txBody>
+      </p:sp>
+      <p:sp>
+        <p:nvSpPr>
+          <p:cNvPr id="12" name="Rectangle 11"/>
+          <p:cNvSpPr/>
+          <p:nvPr/>
+        </p:nvSpPr>
+        <p:spPr>
+          <a:xfrm>
+            <a:off x="8641080" y="1938528"/>
+            <a:ext cx="2743200" cy="457200"/>
+          </a:xfrm>
+          <a:prstGeom prst="rect">
+            <a:avLst/>
+          </a:prstGeom>
+          <a:solidFill>
+            <a:srgbClr val="FFFFFF"/>
+          </a:solidFill>
+          <a:ln w="6350">
+            <a:solidFill>
+              <a:srgbClr val="D9E2EC"/>
+            </a:solidFill>
+          </a:ln>
+          <a:effectLst/>
+        </p:spPr>
+        <p:style>
+          <a:lnRef idx="1">
+            <a:schemeClr val="accent1"/>
+          </a:lnRef>
+          <a:fillRef idx="3">
+            <a:schemeClr val="accent1"/>
+          </a:fillRef>
+          <a:effectRef idx="2">
+            <a:schemeClr val="accent1"/>
+          </a:effectRef>
+          <a:fontRef idx="minor">
+            <a:schemeClr val="lt1"/>
+          </a:fontRef>
+        </p:style>
+        <p:txBody>
+          <a:bodyPr rtlCol="0" anchor="ctr" wrap="square" lIns="101600" rIns="76200"/>
+          <a:lstStyle/>
+          <a:p>
+            <a:pPr algn="ctr"/>
+            <a:r>
+              <a:rPr sz="1250" b="0">
+                <a:solidFill>
+                  <a:srgbClr val="334E68"/>
+                </a:solidFill>
+                <a:latin typeface="Calibri"/>
+              </a:rPr>
+              <a:t>Sim — sobre PlantPAx adaptado</a:t>
+            </a:r>
+          </a:p>
+        </p:txBody>
+      </p:sp>
+      <p:sp>
+        <p:nvSpPr>
+          <p:cNvPr id="13" name="Rectangle 12"/>
+          <p:cNvSpPr/>
+          <p:nvPr/>
+        </p:nvSpPr>
+        <p:spPr>
+          <a:xfrm>
+            <a:off x="777240" y="2395728"/>
+            <a:ext cx="3931920" cy="457200"/>
+          </a:xfrm>
+          <a:prstGeom prst="rect">
+            <a:avLst/>
+          </a:prstGeom>
+          <a:solidFill>
+            <a:srgbClr val="ECF2F7"/>
+          </a:solidFill>
+          <a:ln w="6350">
+            <a:solidFill>
+              <a:srgbClr val="D9E2EC"/>
+            </a:solidFill>
+          </a:ln>
+          <a:effectLst/>
+        </p:spPr>
+        <p:style>
+          <a:lnRef idx="1">
+            <a:schemeClr val="accent1"/>
+          </a:lnRef>
+          <a:fillRef idx="3">
+            <a:schemeClr val="accent1"/>
+          </a:fillRef>
+          <a:effectRef idx="2">
+            <a:schemeClr val="accent1"/>
+          </a:effectRef>
+          <a:fontRef idx="minor">
+            <a:schemeClr val="lt1"/>
+          </a:fontRef>
+        </p:style>
+        <p:txBody>
+          <a:bodyPr rtlCol="0" anchor="ctr" wrap="square" lIns="101600" rIns="76200"/>
+          <a:lstStyle/>
+          <a:p>
+            <a:pPr algn="ctr"/>
+            <a:r>
+              <a:rPr sz="1250" b="1">
+                <a:solidFill>
+                  <a:srgbClr val="102A43"/>
+                </a:solidFill>
+                <a:latin typeface="Calibri"/>
+              </a:rPr>
+              <a:t>Alarmes não reconhecidos</a:t>
+            </a:r>
+          </a:p>
+        </p:txBody>
+      </p:sp>
+      <p:sp>
+        <p:nvSpPr>
+          <p:cNvPr id="14" name="Rectangle 13"/>
+          <p:cNvSpPr/>
+          <p:nvPr/>
+        </p:nvSpPr>
+        <p:spPr>
+          <a:xfrm>
+            <a:off x="4709160" y="2395728"/>
+            <a:ext cx="3931920" cy="457200"/>
+          </a:xfrm>
+          <a:prstGeom prst="rect">
+            <a:avLst/>
+          </a:prstGeom>
+          <a:solidFill>
+            <a:srgbClr val="ECF2F7"/>
+          </a:solidFill>
+          <a:ln w="6350">
+            <a:solidFill>
+              <a:srgbClr val="D9E2EC"/>
+            </a:solidFill>
+          </a:ln>
+          <a:effectLst/>
+        </p:spPr>
+        <p:style>
+          <a:lnRef idx="1">
+            <a:schemeClr val="accent1"/>
+          </a:lnRef>
+          <a:fillRef idx="3">
+            <a:schemeClr val="accent1"/>
+          </a:fillRef>
+          <a:effectRef idx="2">
+            <a:schemeClr val="accent1"/>
+          </a:effectRef>
+          <a:fontRef idx="minor">
+            <a:schemeClr val="lt1"/>
+          </a:fontRef>
+        </p:style>
+        <p:txBody>
+          <a:bodyPr rtlCol="0" anchor="ctr" wrap="square" lIns="101600" rIns="76200"/>
+          <a:lstStyle/>
+          <a:p>
+            <a:pPr algn="ctr"/>
+            <a:r>
+              <a:rPr sz="1250" b="0">
+                <a:solidFill>
+                  <a:srgbClr val="334E68"/>
+                </a:solidFill>
+                <a:latin typeface="Calibri"/>
+              </a:rPr>
+              <a:t>FT Alarms &amp; Events</a:t>
+            </a:r>
+          </a:p>
+        </p:txBody>
+      </p:sp>
+      <p:sp>
+        <p:nvSpPr>
+          <p:cNvPr id="15" name="Rectangle 14"/>
+          <p:cNvSpPr/>
+          <p:nvPr/>
+        </p:nvSpPr>
+        <p:spPr>
+          <a:xfrm>
+            <a:off x="8641080" y="2395728"/>
+            <a:ext cx="2743200" cy="457200"/>
+          </a:xfrm>
+          <a:prstGeom prst="rect">
+            <a:avLst/>
+          </a:prstGeom>
+          <a:solidFill>
+            <a:srgbClr val="ECF2F7"/>
+          </a:solidFill>
+          <a:ln w="6350">
+            <a:solidFill>
+              <a:srgbClr val="D9E2EC"/>
+            </a:solidFill>
+          </a:ln>
+          <a:effectLst/>
+        </p:spPr>
+        <p:style>
+          <a:lnRef idx="1">
+            <a:schemeClr val="accent1"/>
+          </a:lnRef>
+          <a:fillRef idx="3">
+            <a:schemeClr val="accent1"/>
+          </a:fillRef>
+          <a:effectRef idx="2">
+            <a:schemeClr val="accent1"/>
+          </a:effectRef>
+          <a:fontRef idx="minor">
+            <a:schemeClr val="lt1"/>
+          </a:fontRef>
+        </p:style>
+        <p:txBody>
+          <a:bodyPr rtlCol="0" anchor="ctr" wrap="square" lIns="101600" rIns="76200"/>
+          <a:lstStyle/>
+          <a:p>
+            <a:pPr algn="ctr"/>
+            <a:r>
+              <a:rPr sz="1250" b="0">
+                <a:solidFill>
+                  <a:srgbClr val="334E68"/>
+                </a:solidFill>
+                <a:latin typeface="Calibri"/>
+              </a:rPr>
+              <a:t>Nativo</a:t>
+            </a:r>
+          </a:p>
+        </p:txBody>
+      </p:sp>
+      <p:sp>
+        <p:nvSpPr>
+          <p:cNvPr id="16" name="Rectangle 15"/>
+          <p:cNvSpPr/>
+          <p:nvPr/>
+        </p:nvSpPr>
+        <p:spPr>
+          <a:xfrm>
+            <a:off x="777240" y="2852928"/>
+            <a:ext cx="3931920" cy="457200"/>
+          </a:xfrm>
+          <a:prstGeom prst="rect">
+            <a:avLst/>
+          </a:prstGeom>
+          <a:solidFill>
+            <a:srgbClr val="FFFFFF"/>
+          </a:solidFill>
+          <a:ln w="6350">
+            <a:solidFill>
+              <a:srgbClr val="D9E2EC"/>
+            </a:solidFill>
+          </a:ln>
+          <a:effectLst/>
+        </p:spPr>
+        <p:style>
+          <a:lnRef idx="1">
+            <a:schemeClr val="accent1"/>
+          </a:lnRef>
+          <a:fillRef idx="3">
+            <a:schemeClr val="accent1"/>
+          </a:fillRef>
+          <a:effectRef idx="2">
+            <a:schemeClr val="accent1"/>
+          </a:effectRef>
+          <a:fontRef idx="minor">
+            <a:schemeClr val="lt1"/>
+          </a:fontRef>
+        </p:style>
+        <p:txBody>
+          <a:bodyPr rtlCol="0" anchor="ctr" wrap="square" lIns="101600" rIns="76200"/>
+          <a:lstStyle/>
+          <a:p>
+            <a:pPr algn="ctr"/>
+            <a:r>
+              <a:rPr sz="1250" b="1">
+                <a:solidFill>
+                  <a:srgbClr val="102A43"/>
+                </a:solidFill>
+                <a:latin typeface="Calibri"/>
+              </a:rPr>
+              <a:t>Controles em Auto / Manual</a:t>
+            </a:r>
+          </a:p>
+        </p:txBody>
+      </p:sp>
+      <p:sp>
+        <p:nvSpPr>
+          <p:cNvPr id="17" name="Rectangle 16"/>
+          <p:cNvSpPr/>
+          <p:nvPr/>
+        </p:nvSpPr>
+        <p:spPr>
+          <a:xfrm>
+            <a:off x="4709160" y="2852928"/>
+            <a:ext cx="3931920" cy="457200"/>
+          </a:xfrm>
+          <a:prstGeom prst="rect">
+            <a:avLst/>
+          </a:prstGeom>
+          <a:solidFill>
+            <a:srgbClr val="FFFFFF"/>
+          </a:solidFill>
+          <a:ln w="6350">
+            <a:solidFill>
+              <a:srgbClr val="D9E2EC"/>
+            </a:solidFill>
+          </a:ln>
+          <a:effectLst/>
+        </p:spPr>
+        <p:style>
+          <a:lnRef idx="1">
+            <a:schemeClr val="accent1"/>
+          </a:lnRef>
+          <a:fillRef idx="3">
+            <a:schemeClr val="accent1"/>
+          </a:fillRef>
+          <a:effectRef idx="2">
+            <a:schemeClr val="accent1"/>
+          </a:effectRef>
+          <a:fontRef idx="minor">
+            <a:schemeClr val="lt1"/>
+          </a:fontRef>
+        </p:style>
+        <p:txBody>
+          <a:bodyPr rtlCol="0" anchor="ctr" wrap="square" lIns="101600" rIns="76200"/>
+          <a:lstStyle/>
+          <a:p>
+            <a:pPr algn="ctr"/>
+            <a:r>
+              <a:rPr sz="1250" b="0">
+                <a:solidFill>
+                  <a:srgbClr val="334E68"/>
+                </a:solidFill>
+                <a:latin typeface="Calibri"/>
+              </a:rPr>
+              <a:t>PlantPAx P_PID, P_VALVE</a:t>
+            </a:r>
+          </a:p>
+        </p:txBody>
+      </p:sp>
+      <p:sp>
+        <p:nvSpPr>
+          <p:cNvPr id="18" name="Rectangle 17"/>
+          <p:cNvSpPr/>
+          <p:nvPr/>
+        </p:nvSpPr>
+        <p:spPr>
+          <a:xfrm>
+            <a:off x="8641080" y="2852928"/>
+            <a:ext cx="2743200" cy="457200"/>
+          </a:xfrm>
+          <a:prstGeom prst="rect">
+            <a:avLst/>
+          </a:prstGeom>
+          <a:solidFill>
+            <a:srgbClr val="FFFFFF"/>
+          </a:solidFill>
+          <a:ln w="6350">
+            <a:solidFill>
+              <a:srgbClr val="D9E2EC"/>
+            </a:solidFill>
+          </a:ln>
+          <a:effectLst/>
+        </p:spPr>
+        <p:style>
+          <a:lnRef idx="1">
+            <a:schemeClr val="accent1"/>
+          </a:lnRef>
+          <a:fillRef idx="3">
+            <a:schemeClr val="accent1"/>
+          </a:fillRef>
+          <a:effectRef idx="2">
+            <a:schemeClr val="accent1"/>
+          </a:effectRef>
+          <a:fontRef idx="minor">
+            <a:schemeClr val="lt1"/>
+          </a:fontRef>
+        </p:style>
+        <p:txBody>
+          <a:bodyPr rtlCol="0" anchor="ctr" wrap="square" lIns="101600" rIns="76200"/>
+          <a:lstStyle/>
+          <a:p>
+            <a:pPr algn="ctr"/>
+            <a:r>
+              <a:rPr sz="1250" b="0">
+                <a:solidFill>
+                  <a:srgbClr val="334E68"/>
+                </a:solidFill>
+                <a:latin typeface="Calibri"/>
+              </a:rPr>
+              <a:t>Dado já no controlador</a:t>
+            </a:r>
+          </a:p>
+        </p:txBody>
+      </p:sp>
+      <p:sp>
+        <p:nvSpPr>
+          <p:cNvPr id="19" name="Rectangle 18"/>
+          <p:cNvSpPr/>
+          <p:nvPr/>
+        </p:nvSpPr>
+        <p:spPr>
+          <a:xfrm>
+            <a:off x="777240" y="3310128"/>
+            <a:ext cx="3931920" cy="457200"/>
+          </a:xfrm>
+          <a:prstGeom prst="rect">
+            <a:avLst/>
+          </a:prstGeom>
+          <a:solidFill>
+            <a:srgbClr val="ECF2F7"/>
+          </a:solidFill>
+          <a:ln w="6350">
+            <a:solidFill>
+              <a:srgbClr val="D9E2EC"/>
+            </a:solidFill>
+          </a:ln>
+          <a:effectLst/>
+        </p:spPr>
+        <p:style>
+          <a:lnRef idx="1">
+            <a:schemeClr val="accent1"/>
+          </a:lnRef>
+          <a:fillRef idx="3">
+            <a:schemeClr val="accent1"/>
+          </a:fillRef>
+          <a:effectRef idx="2">
+            <a:schemeClr val="accent1"/>
+          </a:effectRef>
+          <a:fontRef idx="minor">
+            <a:schemeClr val="lt1"/>
+          </a:fontRef>
+        </p:style>
+        <p:txBody>
+          <a:bodyPr rtlCol="0" anchor="ctr" wrap="square" lIns="101600" rIns="76200"/>
+          <a:lstStyle/>
+          <a:p>
+            <a:pPr algn="ctr"/>
+            <a:r>
+              <a:rPr sz="1250" b="1">
+                <a:solidFill>
+                  <a:srgbClr val="102A43"/>
+                </a:solidFill>
+                <a:latin typeface="Calibri"/>
+              </a:rPr>
+              <a:t>Blocos Operador / Programa</a:t>
+            </a:r>
+          </a:p>
+        </p:txBody>
+      </p:sp>
+      <p:sp>
+        <p:nvSpPr>
+          <p:cNvPr id="20" name="Rectangle 19"/>
+          <p:cNvSpPr/>
+          <p:nvPr/>
+        </p:nvSpPr>
+        <p:spPr>
+          <a:xfrm>
+            <a:off x="4709160" y="3310128"/>
+            <a:ext cx="3931920" cy="457200"/>
+          </a:xfrm>
+          <a:prstGeom prst="rect">
+            <a:avLst/>
+          </a:prstGeom>
+          <a:solidFill>
+            <a:srgbClr val="ECF2F7"/>
+          </a:solidFill>
+          <a:ln w="6350">
+            <a:solidFill>
+              <a:srgbClr val="D9E2EC"/>
+            </a:solidFill>
+          </a:ln>
+          <a:effectLst/>
+        </p:spPr>
+        <p:style>
+          <a:lnRef idx="1">
+            <a:schemeClr val="accent1"/>
+          </a:lnRef>
+          <a:fillRef idx="3">
+            <a:schemeClr val="accent1"/>
+          </a:fillRef>
+          <a:effectRef idx="2">
+            <a:schemeClr val="accent1"/>
+          </a:effectRef>
+          <a:fontRef idx="minor">
+            <a:schemeClr val="lt1"/>
+          </a:fontRef>
+        </p:style>
+        <p:txBody>
+          <a:bodyPr rtlCol="0" anchor="ctr" wrap="square" lIns="101600" rIns="76200"/>
+          <a:lstStyle/>
+          <a:p>
+            <a:pPr algn="ctr"/>
+            <a:r>
+              <a:rPr sz="1250" b="0">
+                <a:solidFill>
+                  <a:srgbClr val="334E68"/>
+                </a:solidFill>
+                <a:latin typeface="Calibri"/>
+              </a:rPr>
+              <a:t>PlantPAx Command Source</a:t>
+            </a:r>
+          </a:p>
+        </p:txBody>
+      </p:sp>
+      <p:sp>
+        <p:nvSpPr>
+          <p:cNvPr id="21" name="Rectangle 20"/>
+          <p:cNvSpPr/>
+          <p:nvPr/>
+        </p:nvSpPr>
+        <p:spPr>
+          <a:xfrm>
+            <a:off x="8641080" y="3310128"/>
+            <a:ext cx="2743200" cy="457200"/>
+          </a:xfrm>
+          <a:prstGeom prst="rect">
+            <a:avLst/>
+          </a:prstGeom>
+          <a:solidFill>
+            <a:srgbClr val="ECF2F7"/>
+          </a:solidFill>
+          <a:ln w="6350">
+            <a:solidFill>
+              <a:srgbClr val="D9E2EC"/>
+            </a:solidFill>
+          </a:ln>
+          <a:effectLst/>
+        </p:spPr>
+        <p:style>
+          <a:lnRef idx="1">
+            <a:schemeClr val="accent1"/>
+          </a:lnRef>
+          <a:fillRef idx="3">
+            <a:schemeClr val="accent1"/>
+          </a:fillRef>
+          <a:effectRef idx="2">
+            <a:schemeClr val="accent1"/>
+          </a:effectRef>
+          <a:fontRef idx="minor">
+            <a:schemeClr val="lt1"/>
+          </a:fontRef>
+        </p:style>
+        <p:txBody>
+          <a:bodyPr rtlCol="0" anchor="ctr" wrap="square" lIns="101600" rIns="76200"/>
+          <a:lstStyle/>
+          <a:p>
+            <a:pPr algn="ctr"/>
+            <a:r>
+              <a:rPr sz="1250" b="0">
+                <a:solidFill>
+                  <a:srgbClr val="334E68"/>
+                </a:solidFill>
+                <a:latin typeface="Calibri"/>
+              </a:rPr>
+              <a:t>Campo nativo</a:t>
+            </a:r>
+          </a:p>
+        </p:txBody>
+      </p:sp>
+      <p:sp>
+        <p:nvSpPr>
+          <p:cNvPr id="22" name="Rectangle 21"/>
+          <p:cNvSpPr/>
+          <p:nvPr/>
+        </p:nvSpPr>
+        <p:spPr>
+          <a:xfrm>
+            <a:off x="777240" y="3767328"/>
+            <a:ext cx="3931920" cy="457200"/>
+          </a:xfrm>
+          <a:prstGeom prst="rect">
+            <a:avLst/>
+          </a:prstGeom>
+          <a:solidFill>
+            <a:srgbClr val="FFFFFF"/>
+          </a:solidFill>
+          <a:ln w="6350">
+            <a:solidFill>
+              <a:srgbClr val="D9E2EC"/>
+            </a:solidFill>
+          </a:ln>
+          <a:effectLst/>
+        </p:spPr>
+        <p:style>
+          <a:lnRef idx="1">
+            <a:schemeClr val="accent1"/>
+          </a:lnRef>
+          <a:fillRef idx="3">
+            <a:schemeClr val="accent1"/>
+          </a:fillRef>
+          <a:effectRef idx="2">
+            <a:schemeClr val="accent1"/>
+          </a:effectRef>
+          <a:fontRef idx="minor">
+            <a:schemeClr val="lt1"/>
+          </a:fontRef>
+        </p:style>
+        <p:txBody>
+          <a:bodyPr rtlCol="0" anchor="ctr" wrap="square" lIns="101600" rIns="76200"/>
+          <a:lstStyle/>
+          <a:p>
+            <a:pPr algn="ctr"/>
+            <a:r>
+              <a:rPr sz="1250" b="1">
+                <a:solidFill>
+                  <a:srgbClr val="102A43"/>
+                </a:solidFill>
+                <a:latin typeface="Calibri"/>
+              </a:rPr>
+              <a:t>Interlocks desabilitados</a:t>
+            </a:r>
+          </a:p>
+        </p:txBody>
+      </p:sp>
+      <p:sp>
+        <p:nvSpPr>
+          <p:cNvPr id="23" name="Rectangle 22"/>
+          <p:cNvSpPr/>
+          <p:nvPr/>
+        </p:nvSpPr>
+        <p:spPr>
+          <a:xfrm>
+            <a:off x="4709160" y="3767328"/>
+            <a:ext cx="3931920" cy="457200"/>
+          </a:xfrm>
+          <a:prstGeom prst="rect">
+            <a:avLst/>
+          </a:prstGeom>
+          <a:solidFill>
+            <a:srgbClr val="FFFFFF"/>
+          </a:solidFill>
+          <a:ln w="6350">
+            <a:solidFill>
+              <a:srgbClr val="D9E2EC"/>
+            </a:solidFill>
+          </a:ln>
+          <a:effectLst/>
+        </p:spPr>
+        <p:style>
+          <a:lnRef idx="1">
+            <a:schemeClr val="accent1"/>
+          </a:lnRef>
+          <a:fillRef idx="3">
+            <a:schemeClr val="accent1"/>
+          </a:fillRef>
+          <a:effectRef idx="2">
+            <a:schemeClr val="accent1"/>
+          </a:effectRef>
+          <a:fontRef idx="minor">
+            <a:schemeClr val="lt1"/>
+          </a:fontRef>
+        </p:style>
+        <p:txBody>
+          <a:bodyPr rtlCol="0" anchor="ctr" wrap="square" lIns="101600" rIns="76200"/>
+          <a:lstStyle/>
+          <a:p>
+            <a:pPr algn="ctr"/>
+            <a:r>
+              <a:rPr sz="1250" b="0">
+                <a:solidFill>
+                  <a:srgbClr val="334E68"/>
+                </a:solidFill>
+                <a:latin typeface="Calibri"/>
+              </a:rPr>
+              <a:t>PlantPAx P_Gate + P_INTLK</a:t>
+            </a:r>
+          </a:p>
+        </p:txBody>
+      </p:sp>
+      <p:sp>
+        <p:nvSpPr>
+          <p:cNvPr id="24" name="Rectangle 23"/>
+          <p:cNvSpPr/>
+          <p:nvPr/>
+        </p:nvSpPr>
+        <p:spPr>
+          <a:xfrm>
+            <a:off x="8641080" y="3767328"/>
+            <a:ext cx="2743200" cy="457200"/>
+          </a:xfrm>
+          <a:prstGeom prst="rect">
+            <a:avLst/>
+          </a:prstGeom>
+          <a:solidFill>
+            <a:srgbClr val="FFFFFF"/>
+          </a:solidFill>
+          <a:ln w="6350">
+            <a:solidFill>
+              <a:srgbClr val="D9E2EC"/>
+            </a:solidFill>
+          </a:ln>
+          <a:effectLst/>
+        </p:spPr>
+        <p:style>
+          <a:lnRef idx="1">
+            <a:schemeClr val="accent1"/>
+          </a:lnRef>
+          <a:fillRef idx="3">
+            <a:schemeClr val="accent1"/>
+          </a:fillRef>
+          <a:effectRef idx="2">
+            <a:schemeClr val="accent1"/>
+          </a:effectRef>
+          <a:fontRef idx="minor">
+            <a:schemeClr val="lt1"/>
+          </a:fontRef>
+        </p:style>
+        <p:txBody>
+          <a:bodyPr rtlCol="0" anchor="ctr" wrap="square" lIns="101600" rIns="76200"/>
+          <a:lstStyle/>
+          <a:p>
+            <a:pPr algn="ctr"/>
+            <a:r>
+              <a:rPr sz="1250" b="0">
+                <a:solidFill>
+                  <a:srgbClr val="334E68"/>
+                </a:solidFill>
+                <a:latin typeface="Calibri"/>
+              </a:rPr>
+              <a:t>Rastreável</a:t>
+            </a:r>
+          </a:p>
+        </p:txBody>
+      </p:sp>
+      <p:sp>
+        <p:nvSpPr>
+          <p:cNvPr id="25" name="Rectangle 24"/>
+          <p:cNvSpPr/>
+          <p:nvPr/>
+        </p:nvSpPr>
+        <p:spPr>
+          <a:xfrm>
+            <a:off x="777240" y="4224528"/>
+            <a:ext cx="3931920" cy="457200"/>
+          </a:xfrm>
+          <a:prstGeom prst="rect">
+            <a:avLst/>
+          </a:prstGeom>
+          <a:solidFill>
+            <a:srgbClr val="ECF2F7"/>
+          </a:solidFill>
+          <a:ln w="6350">
+            <a:solidFill>
+              <a:srgbClr val="D9E2EC"/>
+            </a:solidFill>
+          </a:ln>
+          <a:effectLst/>
+        </p:spPr>
+        <p:style>
+          <a:lnRef idx="1">
+            <a:schemeClr val="accent1"/>
+          </a:lnRef>
+          <a:fillRef idx="3">
+            <a:schemeClr val="accent1"/>
+          </a:fillRef>
+          <a:effectRef idx="2">
+            <a:schemeClr val="accent1"/>
+          </a:effectRef>
+          <a:fontRef idx="minor">
+            <a:schemeClr val="lt1"/>
+          </a:fontRef>
+        </p:style>
+        <p:txBody>
+          <a:bodyPr rtlCol="0" anchor="ctr" wrap="square" lIns="101600" rIns="76200"/>
+          <a:lstStyle/>
+          <a:p>
+            <a:pPr algn="ctr"/>
+            <a:r>
+              <a:rPr sz="1250" b="1">
+                <a:solidFill>
+                  <a:srgbClr val="102A43"/>
+                </a:solidFill>
+                <a:latin typeface="Calibri"/>
+              </a:rPr>
+              <a:t>Variáveis simuladas</a:t>
+            </a:r>
+          </a:p>
+        </p:txBody>
+      </p:sp>
+      <p:sp>
+        <p:nvSpPr>
+          <p:cNvPr id="26" name="Rectangle 25"/>
+          <p:cNvSpPr/>
+          <p:nvPr/>
+        </p:nvSpPr>
+        <p:spPr>
+          <a:xfrm>
+            <a:off x="4709160" y="4224528"/>
+            <a:ext cx="3931920" cy="457200"/>
+          </a:xfrm>
+          <a:prstGeom prst="rect">
+            <a:avLst/>
+          </a:prstGeom>
+          <a:solidFill>
+            <a:srgbClr val="ECF2F7"/>
+          </a:solidFill>
+          <a:ln w="6350">
+            <a:solidFill>
+              <a:srgbClr val="D9E2EC"/>
+            </a:solidFill>
+          </a:ln>
+          <a:effectLst/>
+        </p:spPr>
+        <p:style>
+          <a:lnRef idx="1">
+            <a:schemeClr val="accent1"/>
+          </a:lnRef>
+          <a:fillRef idx="3">
+            <a:schemeClr val="accent1"/>
+          </a:fillRef>
+          <a:effectRef idx="2">
+            <a:schemeClr val="accent1"/>
+          </a:effectRef>
+          <a:fontRef idx="minor">
+            <a:schemeClr val="lt1"/>
+          </a:fontRef>
+        </p:style>
+        <p:txBody>
+          <a:bodyPr rtlCol="0" anchor="ctr" wrap="square" lIns="101600" rIns="76200"/>
+          <a:lstStyle/>
+          <a:p>
+            <a:pPr algn="ctr"/>
+            <a:r>
+              <a:rPr sz="1250" b="0">
+                <a:solidFill>
+                  <a:srgbClr val="334E68"/>
+                </a:solidFill>
+                <a:latin typeface="Calibri"/>
+              </a:rPr>
+              <a:t>Tag audit via Studio 5000</a:t>
+            </a:r>
+          </a:p>
+        </p:txBody>
+      </p:sp>
+      <p:sp>
+        <p:nvSpPr>
+          <p:cNvPr id="27" name="Rectangle 26"/>
+          <p:cNvSpPr/>
+          <p:nvPr/>
+        </p:nvSpPr>
+        <p:spPr>
+          <a:xfrm>
+            <a:off x="8641080" y="4224528"/>
+            <a:ext cx="2743200" cy="457200"/>
+          </a:xfrm>
+          <a:prstGeom prst="rect">
+            <a:avLst/>
+          </a:prstGeom>
+          <a:solidFill>
+            <a:srgbClr val="ECF2F7"/>
+          </a:solidFill>
+          <a:ln w="6350">
+            <a:solidFill>
+              <a:srgbClr val="D9E2EC"/>
+            </a:solidFill>
+          </a:ln>
+          <a:effectLst/>
+        </p:spPr>
+        <p:style>
+          <a:lnRef idx="1">
+            <a:schemeClr val="accent1"/>
+          </a:lnRef>
+          <a:fillRef idx="3">
+            <a:schemeClr val="accent1"/>
+          </a:fillRef>
+          <a:effectRef idx="2">
+            <a:schemeClr val="accent1"/>
+          </a:effectRef>
+          <a:fontRef idx="minor">
+            <a:schemeClr val="lt1"/>
+          </a:fontRef>
+        </p:style>
+        <p:txBody>
+          <a:bodyPr rtlCol="0" anchor="ctr" wrap="square" lIns="101600" rIns="76200"/>
+          <a:lstStyle/>
+          <a:p>
+            <a:pPr algn="ctr"/>
+            <a:r>
+              <a:rPr sz="1250" b="0">
+                <a:solidFill>
+                  <a:srgbClr val="334E68"/>
+                </a:solidFill>
+                <a:latin typeface="Calibri"/>
+              </a:rPr>
+              <a:t>Possível</a:t>
+            </a:r>
+          </a:p>
+        </p:txBody>
+      </p:sp>
+      <p:sp>
+        <p:nvSpPr>
+          <p:cNvPr id="28" name="Rectangle 27"/>
+          <p:cNvSpPr/>
+          <p:nvPr/>
+        </p:nvSpPr>
+        <p:spPr>
+          <a:xfrm>
+            <a:off x="777240" y="4681728"/>
+            <a:ext cx="3931920" cy="457200"/>
+          </a:xfrm>
+          <a:prstGeom prst="rect">
+            <a:avLst/>
+          </a:prstGeom>
+          <a:solidFill>
+            <a:srgbClr val="FFFFFF"/>
+          </a:solidFill>
+          <a:ln w="6350">
+            <a:solidFill>
+              <a:srgbClr val="D9E2EC"/>
+            </a:solidFill>
+          </a:ln>
+          <a:effectLst/>
+        </p:spPr>
+        <p:style>
+          <a:lnRef idx="1">
+            <a:schemeClr val="accent1"/>
+          </a:lnRef>
+          <a:fillRef idx="3">
+            <a:schemeClr val="accent1"/>
+          </a:fillRef>
+          <a:effectRef idx="2">
+            <a:schemeClr val="accent1"/>
+          </a:effectRef>
+          <a:fontRef idx="minor">
+            <a:schemeClr val="lt1"/>
+          </a:fontRef>
+        </p:style>
+        <p:txBody>
+          <a:bodyPr rtlCol="0" anchor="ctr" wrap="square" lIns="101600" rIns="76200"/>
+          <a:lstStyle/>
+          <a:p>
+            <a:pPr algn="ctr"/>
+            <a:r>
+              <a:rPr sz="1250" b="1">
+                <a:solidFill>
+                  <a:srgbClr val="102A43"/>
+                </a:solidFill>
+                <a:latin typeface="Calibri"/>
+              </a:rPr>
+              <a:t>Bad actors / nuisance</a:t>
+            </a:r>
+          </a:p>
+        </p:txBody>
+      </p:sp>
+      <p:sp>
+        <p:nvSpPr>
+          <p:cNvPr id="29" name="Rectangle 28"/>
+          <p:cNvSpPr/>
+          <p:nvPr/>
+        </p:nvSpPr>
+        <p:spPr>
+          <a:xfrm>
+            <a:off x="4709160" y="4681728"/>
+            <a:ext cx="3931920" cy="457200"/>
+          </a:xfrm>
+          <a:prstGeom prst="rect">
+            <a:avLst/>
+          </a:prstGeom>
+          <a:solidFill>
+            <a:srgbClr val="FFFFFF"/>
+          </a:solidFill>
+          <a:ln w="6350">
+            <a:solidFill>
+              <a:srgbClr val="D9E2EC"/>
+            </a:solidFill>
+          </a:ln>
+          <a:effectLst/>
+        </p:spPr>
+        <p:style>
+          <a:lnRef idx="1">
+            <a:schemeClr val="accent1"/>
+          </a:lnRef>
+          <a:fillRef idx="3">
+            <a:schemeClr val="accent1"/>
+          </a:fillRef>
+          <a:effectRef idx="2">
+            <a:schemeClr val="accent1"/>
+          </a:effectRef>
+          <a:fontRef idx="minor">
+            <a:schemeClr val="lt1"/>
+          </a:fontRef>
+        </p:style>
+        <p:txBody>
+          <a:bodyPr rtlCol="0" anchor="ctr" wrap="square" lIns="101600" rIns="76200"/>
+          <a:lstStyle/>
+          <a:p>
+            <a:pPr algn="ctr"/>
+            <a:r>
+              <a:rPr sz="1250" b="0">
+                <a:solidFill>
+                  <a:srgbClr val="334E68"/>
+                </a:solidFill>
+                <a:latin typeface="Calibri"/>
+              </a:rPr>
+              <a:t>Grafana (hoje)</a:t>
+            </a:r>
+          </a:p>
+        </p:txBody>
+      </p:sp>
+      <p:sp>
+        <p:nvSpPr>
+          <p:cNvPr id="30" name="Rectangle 29"/>
+          <p:cNvSpPr/>
+          <p:nvPr/>
+        </p:nvSpPr>
+        <p:spPr>
+          <a:xfrm>
+            <a:off x="8641080" y="4681728"/>
+            <a:ext cx="2743200" cy="457200"/>
+          </a:xfrm>
+          <a:prstGeom prst="rect">
+            <a:avLst/>
+          </a:prstGeom>
+          <a:solidFill>
+            <a:srgbClr val="FFFFFF"/>
+          </a:solidFill>
+          <a:ln w="6350">
+            <a:solidFill>
+              <a:srgbClr val="D9E2EC"/>
+            </a:solidFill>
+          </a:ln>
+          <a:effectLst/>
+        </p:spPr>
+        <p:style>
+          <a:lnRef idx="1">
+            <a:schemeClr val="accent1"/>
+          </a:lnRef>
+          <a:fillRef idx="3">
+            <a:schemeClr val="accent1"/>
+          </a:fillRef>
+          <a:effectRef idx="2">
+            <a:schemeClr val="accent1"/>
+          </a:effectRef>
+          <a:fontRef idx="minor">
+            <a:schemeClr val="lt1"/>
+          </a:fontRef>
+        </p:style>
+        <p:txBody>
+          <a:bodyPr rtlCol="0" anchor="ctr" wrap="square" lIns="101600" rIns="76200"/>
+          <a:lstStyle/>
+          <a:p>
+            <a:pPr algn="ctr"/>
+            <a:r>
+              <a:rPr sz="1250" b="0">
+                <a:solidFill>
+                  <a:srgbClr val="334E68"/>
+                </a:solidFill>
+                <a:latin typeface="Calibri"/>
+              </a:rPr>
+              <a:t>Sim — PlantPAx adaptado</a:t>
+            </a:r>
+          </a:p>
+        </p:txBody>
+      </p:sp>
+      <p:sp>
+        <p:nvSpPr>
+          <p:cNvPr id="31" name="Rectangle 30"/>
+          <p:cNvSpPr/>
+          <p:nvPr/>
+        </p:nvSpPr>
+        <p:spPr>
+          <a:xfrm>
+            <a:off x="777240" y="5138928"/>
+            <a:ext cx="3931920" cy="457200"/>
+          </a:xfrm>
+          <a:prstGeom prst="rect">
+            <a:avLst/>
+          </a:prstGeom>
+          <a:solidFill>
+            <a:srgbClr val="169C52"/>
+          </a:solidFill>
+          <a:ln w="6350">
+            <a:solidFill>
+              <a:srgbClr val="D9E2EC"/>
+            </a:solidFill>
+          </a:ln>
+          <a:effectLst/>
+        </p:spPr>
+        <p:style>
+          <a:lnRef idx="1">
+            <a:schemeClr val="accent1"/>
+          </a:lnRef>
+          <a:fillRef idx="3">
+            <a:schemeClr val="accent1"/>
+          </a:fillRef>
+          <a:effectRef idx="2">
+            <a:schemeClr val="accent1"/>
+          </a:effectRef>
+          <a:fontRef idx="minor">
+            <a:schemeClr val="lt1"/>
+          </a:fontRef>
+        </p:style>
+        <p:txBody>
+          <a:bodyPr rtlCol="0" anchor="ctr" wrap="square" lIns="101600" rIns="76200"/>
+          <a:lstStyle/>
+          <a:p>
+            <a:pPr algn="ctr"/>
+            <a:r>
+              <a:rPr sz="1250" b="1">
+                <a:solidFill>
+                  <a:srgbClr val="FFFFFF"/>
+                </a:solidFill>
+                <a:latin typeface="Calibri"/>
+              </a:rPr>
+              <a:t>Benchmarking entre plantas</a:t>
+            </a:r>
+          </a:p>
+        </p:txBody>
+      </p:sp>
+      <p:sp>
+        <p:nvSpPr>
+          <p:cNvPr id="32" name="Rectangle 31"/>
+          <p:cNvSpPr/>
+          <p:nvPr/>
+        </p:nvSpPr>
+        <p:spPr>
+          <a:xfrm>
+            <a:off x="4709160" y="5138928"/>
+            <a:ext cx="3931920" cy="457200"/>
+          </a:xfrm>
+          <a:prstGeom prst="rect">
+            <a:avLst/>
+          </a:prstGeom>
+          <a:solidFill>
+            <a:srgbClr val="169C52"/>
+          </a:solidFill>
+          <a:ln w="6350">
+            <a:solidFill>
+              <a:srgbClr val="D9E2EC"/>
+            </a:solidFill>
+          </a:ln>
+          <a:effectLst/>
+        </p:spPr>
+        <p:style>
+          <a:lnRef idx="1">
+            <a:schemeClr val="accent1"/>
+          </a:lnRef>
+          <a:fillRef idx="3">
+            <a:schemeClr val="accent1"/>
+          </a:fillRef>
+          <a:effectRef idx="2">
+            <a:schemeClr val="accent1"/>
+          </a:effectRef>
+          <a:fontRef idx="minor">
+            <a:schemeClr val="lt1"/>
+          </a:fontRef>
+        </p:style>
+        <p:txBody>
+          <a:bodyPr rtlCol="0" anchor="ctr" wrap="square" lIns="101600" rIns="76200"/>
+          <a:lstStyle/>
+          <a:p>
+            <a:pPr algn="ctr"/>
+            <a:r>
+              <a:rPr sz="1250" b="1">
+                <a:solidFill>
+                  <a:srgbClr val="FFFFFF"/>
+                </a:solidFill>
+                <a:latin typeface="Calibri"/>
+              </a:rPr>
+              <a:t>DataMosaix (multi-site)</a:t>
+            </a:r>
+          </a:p>
+        </p:txBody>
+      </p:sp>
+      <p:sp>
+        <p:nvSpPr>
+          <p:cNvPr id="33" name="Rectangle 32"/>
+          <p:cNvSpPr/>
+          <p:nvPr/>
+        </p:nvSpPr>
+        <p:spPr>
+          <a:xfrm>
+            <a:off x="8641080" y="5138928"/>
+            <a:ext cx="2743200" cy="457200"/>
+          </a:xfrm>
+          <a:prstGeom prst="rect">
+            <a:avLst/>
+          </a:prstGeom>
+          <a:solidFill>
+            <a:srgbClr val="169C52"/>
+          </a:solidFill>
+          <a:ln w="6350">
+            <a:solidFill>
+              <a:srgbClr val="D9E2EC"/>
+            </a:solidFill>
+          </a:ln>
+          <a:effectLst/>
+        </p:spPr>
+        <p:style>
+          <a:lnRef idx="1">
+            <a:schemeClr val="accent1"/>
+          </a:lnRef>
+          <a:fillRef idx="3">
+            <a:schemeClr val="accent1"/>
+          </a:fillRef>
+          <a:effectRef idx="2">
+            <a:schemeClr val="accent1"/>
+          </a:effectRef>
+          <a:fontRef idx="minor">
+            <a:schemeClr val="lt1"/>
+          </a:fontRef>
+        </p:style>
+        <p:txBody>
+          <a:bodyPr rtlCol="0" anchor="ctr" wrap="square" lIns="101600" rIns="76200"/>
+          <a:lstStyle/>
+          <a:p>
+            <a:pPr algn="ctr"/>
+            <a:r>
+              <a:rPr sz="1250" b="1">
+                <a:solidFill>
+                  <a:srgbClr val="FFFFFF"/>
+                </a:solidFill>
+                <a:latin typeface="Calibri"/>
+              </a:rPr>
+              <a:t>Novidade que entra agora</a:t>
+            </a:r>
+          </a:p>
+        </p:txBody>
+      </p:sp>
+      <p:sp>
+        <p:nvSpPr>
+          <p:cNvPr id="34" name="TextBox 33"/>
           <p:cNvSpPr txBox="1"/>
           <p:nvPr/>
         </p:nvSpPr>
         <p:spPr>
           <a:xfrm>
-            <a:off x="777240" y="1298448"/>
-            <a:ext cx="10607040" cy="411480"/>
+            <a:off x="777240" y="6172200"/>
+            <a:ext cx="10607040" cy="365760"/>
           </a:xfrm>
           <a:prstGeom prst="rect">
             <a:avLst/>
@@ -8639,139 +10123,20 @@
               </a:spcAft>
             </a:pPr>
             <a:r>
-              <a:rPr sz="1400" b="0" i="0">
-                <a:solidFill>
-                  <a:srgbClr val="334E68"/>
-                </a:solidFill>
-                <a:latin typeface="Calibri"/>
-              </a:rPr>
-              <a:t>A análise histórica de alarmes que propomos já existe nas ferramentas FactoryTalk.</a:t>
-            </a:r>
-          </a:p>
-        </p:txBody>
-      </p:sp>
-      <p:sp>
-        <p:nvSpPr>
-          <p:cNvPr id="8" name="Rounded Rectangle 7"/>
-          <p:cNvSpPr/>
-          <p:nvPr/>
-        </p:nvSpPr>
-        <p:spPr>
-          <a:xfrm>
-            <a:off x="2432304" y="1709928"/>
-            <a:ext cx="7333488" cy="4169663"/>
-          </a:xfrm>
-          <a:prstGeom prst="roundRect">
-            <a:avLst/>
-          </a:prstGeom>
-          <a:solidFill>
-            <a:srgbClr val="FFFFFF"/>
-          </a:solidFill>
-          <a:ln w="12700">
-            <a:solidFill>
-              <a:srgbClr val="D9E2EC"/>
-            </a:solidFill>
-          </a:ln>
-          <a:effectLst/>
-          <a:effectLst>
-            <a:outerShdw blurRad="90000" dist="40000" dir="5400000" rotWithShape="0">
-              <a:srgbClr val="1B2A3A">
-                <a:alpha val="24000"/>
-              </a:srgbClr>
-            </a:outerShdw>
-          </a:effectLst>
-        </p:spPr>
-        <p:style>
-          <a:lnRef idx="1">
-            <a:schemeClr val="accent1"/>
-          </a:lnRef>
-          <a:fillRef idx="3">
-            <a:schemeClr val="accent1"/>
-          </a:fillRef>
-          <a:effectRef idx="2">
-            <a:schemeClr val="accent1"/>
-          </a:effectRef>
-          <a:fontRef idx="minor">
-            <a:schemeClr val="lt1"/>
-          </a:fontRef>
-        </p:style>
-        <p:txBody>
-          <a:bodyPr rtlCol="0" anchor="ctr"/>
-          <a:lstStyle/>
-          <a:p>
-            <a:pPr algn="ctr"/>
-          </a:p>
-        </p:txBody>
-      </p:sp>
-      <p:pic>
-        <p:nvPicPr>
-          <p:cNvPr id="9" name="Picture 8" descr="ftview_ai_alarms.png"/>
-          <p:cNvPicPr>
-            <a:picLocks noChangeAspect="1"/>
-          </p:cNvPicPr>
-          <p:nvPr/>
-        </p:nvPicPr>
-        <p:blipFill>
-          <a:blip r:embed="rId2"/>
-          <a:stretch>
-            <a:fillRect/>
-          </a:stretch>
-        </p:blipFill>
-        <p:spPr>
-          <a:xfrm>
-            <a:off x="2523744" y="1783080"/>
-            <a:ext cx="7150608" cy="4023360"/>
-          </a:xfrm>
-          <a:prstGeom prst="rect">
-            <a:avLst/>
-          </a:prstGeom>
-        </p:spPr>
-      </p:pic>
-      <p:sp>
-        <p:nvSpPr>
-          <p:cNvPr id="10" name="TextBox 9"/>
-          <p:cNvSpPr txBox="1"/>
-          <p:nvPr/>
-        </p:nvSpPr>
-        <p:spPr>
-          <a:xfrm>
-            <a:off x="777240" y="5989320"/>
-            <a:ext cx="10607040" cy="457200"/>
-          </a:xfrm>
-          <a:prstGeom prst="rect">
-            <a:avLst/>
-          </a:prstGeom>
-          <a:noFill/>
-        </p:spPr>
-        <p:txBody>
-          <a:bodyPr wrap="square" anchor="t" lIns="0" rIns="0" tIns="0" bIns="0">
-            <a:spAutoFit/>
-          </a:bodyPr>
-          <a:lstStyle/>
-          <a:p>
-            <a:pPr algn="ctr">
-              <a:spcBef>
-                <a:spcPts val="0"/>
-              </a:spcBef>
-              <a:spcAft>
-                <a:spcPts val="400"/>
-              </a:spcAft>
-            </a:pPr>
-            <a:r>
-              <a:rPr sz="1250" b="0" i="0">
+              <a:rPr sz="1300" b="0" i="1">
                 <a:solidFill>
                   <a:srgbClr val="627D98"/>
                 </a:solidFill>
                 <a:latin typeface="Calibri"/>
               </a:rPr>
-              <a:t>O FactoryTalk View AI responde perguntas como 'os 10 alarmes mais frequentes nos últimos 60 dias' — o tipo de insight que sustenta o ranking ISA-18.2 no COI.</a:t>
-            </a:r>
-          </a:p>
-        </p:txBody>
-      </p:sp>
-      <p:sp>
-        <p:nvSpPr>
-          <p:cNvPr id="11" name="TextBox 10"/>
+              <a:t>Quase tudo já existe no dado atual — falta a camada que agrega e compara: o DataMosaix.</a:t>
+            </a:r>
+          </a:p>
+        </p:txBody>
+      </p:sp>
+      <p:sp>
+        <p:nvSpPr>
+          <p:cNvPr id="35" name="TextBox 34"/>
           <p:cNvSpPr txBox="1"/>
           <p:nvPr/>
         </p:nvSpPr>
@@ -8813,7 +10178,7 @@
       </p:sp>
       <p:sp>
         <p:nvSpPr>
-          <p:cNvPr id="12" name="TextBox 11"/>
+          <p:cNvPr id="36" name="TextBox 35"/>
           <p:cNvSpPr txBox="1"/>
           <p:nvPr/>
         </p:nvSpPr>
@@ -8862,6 +10227,1000 @@
 </file>
 
 <file path=ppt/slides/slide16.xml><?xml version="1.0" encoding="utf-8"?>
+<p:sld xmlns:a="http://schemas.openxmlformats.org/drawingml/2006/main" xmlns:p="http://schemas.openxmlformats.org/presentationml/2006/main" xmlns:r="http://schemas.openxmlformats.org/officeDocument/2006/relationships">
+  <p:cSld>
+    <p:bg>
+      <p:bgPr>
+        <a:solidFill>
+          <a:srgbClr val="102A43"/>
+        </a:solidFill>
+        <a:effectLst/>
+      </p:bgPr>
+    </p:bg>
+    <p:spTree>
+      <p:nvGrpSpPr>
+        <p:cNvPr id="1" name=""/>
+        <p:cNvGrpSpPr/>
+        <p:nvPr/>
+      </p:nvGrpSpPr>
+      <p:grpSpPr/>
+      <p:sp>
+        <p:nvSpPr>
+          <p:cNvPr id="2" name="Rectangle 1"/>
+          <p:cNvSpPr/>
+          <p:nvPr/>
+        </p:nvSpPr>
+        <p:spPr>
+          <a:xfrm>
+            <a:off x="502920" y="292608"/>
+            <a:ext cx="128016" cy="502920"/>
+          </a:xfrm>
+          <a:prstGeom prst="rect">
+            <a:avLst/>
+          </a:prstGeom>
+          <a:solidFill>
+            <a:srgbClr val="F59E0B"/>
+          </a:solidFill>
+          <a:ln>
+            <a:noFill/>
+          </a:ln>
+          <a:effectLst/>
+        </p:spPr>
+        <p:style>
+          <a:lnRef idx="1">
+            <a:schemeClr val="accent1"/>
+          </a:lnRef>
+          <a:fillRef idx="3">
+            <a:schemeClr val="accent1"/>
+          </a:fillRef>
+          <a:effectRef idx="2">
+            <a:schemeClr val="accent1"/>
+          </a:effectRef>
+          <a:fontRef idx="minor">
+            <a:schemeClr val="lt1"/>
+          </a:fontRef>
+        </p:style>
+        <p:txBody>
+          <a:bodyPr rtlCol="0" anchor="ctr"/>
+          <a:lstStyle/>
+          <a:p>
+            <a:pPr algn="ctr"/>
+          </a:p>
+        </p:txBody>
+      </p:sp>
+      <p:sp>
+        <p:nvSpPr>
+          <p:cNvPr id="3" name="TextBox 2"/>
+          <p:cNvSpPr txBox="1"/>
+          <p:nvPr/>
+        </p:nvSpPr>
+        <p:spPr>
+          <a:xfrm>
+            <a:off x="777240" y="237744"/>
+            <a:ext cx="10607040" cy="274320"/>
+          </a:xfrm>
+          <a:prstGeom prst="rect">
+            <a:avLst/>
+          </a:prstGeom>
+          <a:noFill/>
+        </p:spPr>
+        <p:txBody>
+          <a:bodyPr wrap="square" anchor="t" lIns="0" rIns="0" tIns="0" bIns="0">
+            <a:spAutoFit/>
+          </a:bodyPr>
+          <a:lstStyle/>
+          <a:p>
+            <a:pPr algn="l">
+              <a:spcBef>
+                <a:spcPts val="0"/>
+              </a:spcBef>
+              <a:spcAft>
+                <a:spcPts val="400"/>
+              </a:spcAft>
+            </a:pPr>
+            <a:r>
+              <a:rPr sz="1150" b="1" i="0">
+                <a:solidFill>
+                  <a:srgbClr val="F59E0B"/>
+                </a:solidFill>
+                <a:latin typeface="Calibri"/>
+              </a:rPr>
+              <a:t>O DELTA</a:t>
+            </a:r>
+          </a:p>
+        </p:txBody>
+      </p:sp>
+      <p:sp>
+        <p:nvSpPr>
+          <p:cNvPr id="4" name="TextBox 3"/>
+          <p:cNvSpPr txBox="1"/>
+          <p:nvPr/>
+        </p:nvSpPr>
+        <p:spPr>
+          <a:xfrm>
+            <a:off x="777240" y="457200"/>
+            <a:ext cx="10881360" cy="548640"/>
+          </a:xfrm>
+          <a:prstGeom prst="rect">
+            <a:avLst/>
+          </a:prstGeom>
+          <a:noFill/>
+        </p:spPr>
+        <p:txBody>
+          <a:bodyPr wrap="square" anchor="t" lIns="0" rIns="0" tIns="0" bIns="0">
+            <a:spAutoFit/>
+          </a:bodyPr>
+          <a:lstStyle/>
+          <a:p>
+            <a:pPr algn="l">
+              <a:spcBef>
+                <a:spcPts val="0"/>
+              </a:spcBef>
+              <a:spcAft>
+                <a:spcPts val="400"/>
+              </a:spcAft>
+            </a:pPr>
+            <a:r>
+              <a:rPr sz="2500" b="1" i="0">
+                <a:solidFill>
+                  <a:srgbClr val="FFFFFF"/>
+                </a:solidFill>
+                <a:latin typeface="Calibri"/>
+              </a:rPr>
+              <a:t>O que o DataMosaix adiciona ao que já temos</a:t>
+            </a:r>
+          </a:p>
+        </p:txBody>
+      </p:sp>
+      <p:sp>
+        <p:nvSpPr>
+          <p:cNvPr id="5" name="TextBox 4"/>
+          <p:cNvSpPr txBox="1"/>
+          <p:nvPr/>
+        </p:nvSpPr>
+        <p:spPr>
+          <a:xfrm>
+            <a:off x="777240" y="1325880"/>
+            <a:ext cx="10607040" cy="640080"/>
+          </a:xfrm>
+          <a:prstGeom prst="rect">
+            <a:avLst/>
+          </a:prstGeom>
+          <a:noFill/>
+        </p:spPr>
+        <p:txBody>
+          <a:bodyPr wrap="square" anchor="t" lIns="0" rIns="0" tIns="0" bIns="0">
+            <a:spAutoFit/>
+          </a:bodyPr>
+          <a:lstStyle/>
+          <a:p>
+            <a:pPr algn="l">
+              <a:spcBef>
+                <a:spcPts val="0"/>
+              </a:spcBef>
+              <a:spcAft>
+                <a:spcPts val="400"/>
+              </a:spcAft>
+            </a:pPr>
+            <a:r>
+              <a:rPr sz="1550" b="0" i="0">
+                <a:solidFill>
+                  <a:srgbClr val="C8D6E4"/>
+                </a:solidFill>
+                <a:latin typeface="Calibri"/>
+              </a:rPr>
+              <a:t>Hoje o dado vive dentro de cada PlantPAx. O DataMosaix é a camada que </a:t>
+            </a:r>
+            <a:r>
+              <a:rPr sz="1550" b="1" i="0">
+                <a:solidFill>
+                  <a:srgbClr val="F59E0B"/>
+                </a:solidFill>
+                <a:latin typeface="Calibri"/>
+              </a:rPr>
+              <a:t>agrega, contextualiza e compara</a:t>
+            </a:r>
+            <a:r>
+              <a:rPr sz="1550" b="0" i="0">
+                <a:solidFill>
+                  <a:srgbClr val="C8D6E4"/>
+                </a:solidFill>
+                <a:latin typeface="Calibri"/>
+              </a:rPr>
+              <a:t> — uma visão única de toda a operação.</a:t>
+            </a:r>
+          </a:p>
+        </p:txBody>
+      </p:sp>
+      <p:sp>
+        <p:nvSpPr>
+          <p:cNvPr id="6" name="Rounded Rectangle 5"/>
+          <p:cNvSpPr/>
+          <p:nvPr/>
+        </p:nvSpPr>
+        <p:spPr>
+          <a:xfrm>
+            <a:off x="777240" y="2240280"/>
+            <a:ext cx="2606040" cy="2651760"/>
+          </a:xfrm>
+          <a:prstGeom prst="roundRect">
+            <a:avLst/>
+          </a:prstGeom>
+          <a:solidFill>
+            <a:srgbClr val="17334E"/>
+          </a:solidFill>
+          <a:ln w="15240">
+            <a:solidFill>
+              <a:srgbClr val="F59E0B"/>
+            </a:solidFill>
+          </a:ln>
+          <a:effectLst/>
+        </p:spPr>
+        <p:style>
+          <a:lnRef idx="1">
+            <a:schemeClr val="accent1"/>
+          </a:lnRef>
+          <a:fillRef idx="3">
+            <a:schemeClr val="accent1"/>
+          </a:fillRef>
+          <a:effectRef idx="2">
+            <a:schemeClr val="accent1"/>
+          </a:effectRef>
+          <a:fontRef idx="minor">
+            <a:schemeClr val="lt1"/>
+          </a:fontRef>
+        </p:style>
+        <p:txBody>
+          <a:bodyPr rtlCol="0" anchor="ctr"/>
+          <a:lstStyle/>
+          <a:p>
+            <a:pPr algn="ctr"/>
+          </a:p>
+        </p:txBody>
+      </p:sp>
+      <p:sp>
+        <p:nvSpPr>
+          <p:cNvPr id="7" name="Rounded Rectangle 6"/>
+          <p:cNvSpPr/>
+          <p:nvPr/>
+        </p:nvSpPr>
+        <p:spPr>
+          <a:xfrm>
+            <a:off x="777240" y="2240280"/>
+            <a:ext cx="2606040" cy="91440"/>
+          </a:xfrm>
+          <a:prstGeom prst="roundRect">
+            <a:avLst/>
+          </a:prstGeom>
+          <a:solidFill>
+            <a:srgbClr val="F59E0B"/>
+          </a:solidFill>
+          <a:ln>
+            <a:noFill/>
+          </a:ln>
+          <a:effectLst/>
+        </p:spPr>
+        <p:style>
+          <a:lnRef idx="1">
+            <a:schemeClr val="accent1"/>
+          </a:lnRef>
+          <a:fillRef idx="3">
+            <a:schemeClr val="accent1"/>
+          </a:fillRef>
+          <a:effectRef idx="2">
+            <a:schemeClr val="accent1"/>
+          </a:effectRef>
+          <a:fontRef idx="minor">
+            <a:schemeClr val="lt1"/>
+          </a:fontRef>
+        </p:style>
+        <p:txBody>
+          <a:bodyPr rtlCol="0" anchor="ctr"/>
+          <a:lstStyle/>
+          <a:p>
+            <a:pPr algn="ctr"/>
+          </a:p>
+        </p:txBody>
+      </p:sp>
+      <p:sp>
+        <p:nvSpPr>
+          <p:cNvPr id="8" name="TextBox 7"/>
+          <p:cNvSpPr txBox="1"/>
+          <p:nvPr/>
+        </p:nvSpPr>
+        <p:spPr>
+          <a:xfrm>
+            <a:off x="1005840" y="2587752"/>
+            <a:ext cx="2148840" cy="777240"/>
+          </a:xfrm>
+          <a:prstGeom prst="rect">
+            <a:avLst/>
+          </a:prstGeom>
+          <a:noFill/>
+        </p:spPr>
+        <p:txBody>
+          <a:bodyPr wrap="square" anchor="t" lIns="0" rIns="0" tIns="0" bIns="0">
+            <a:spAutoFit/>
+          </a:bodyPr>
+          <a:lstStyle/>
+          <a:p>
+            <a:pPr algn="l">
+              <a:spcBef>
+                <a:spcPts val="0"/>
+              </a:spcBef>
+              <a:spcAft>
+                <a:spcPts val="400"/>
+              </a:spcAft>
+            </a:pPr>
+            <a:r>
+              <a:rPr sz="1650" b="1" i="0">
+                <a:solidFill>
+                  <a:srgbClr val="FFFFFF"/>
+                </a:solidFill>
+                <a:latin typeface="Calibri"/>
+              </a:rPr>
+              <a:t>Indicadores comparáveis</a:t>
+            </a:r>
+          </a:p>
+        </p:txBody>
+      </p:sp>
+      <p:sp>
+        <p:nvSpPr>
+          <p:cNvPr id="9" name="TextBox 8"/>
+          <p:cNvSpPr txBox="1"/>
+          <p:nvPr/>
+        </p:nvSpPr>
+        <p:spPr>
+          <a:xfrm>
+            <a:off x="1005840" y="3337560"/>
+            <a:ext cx="2148840" cy="1463040"/>
+          </a:xfrm>
+          <a:prstGeom prst="rect">
+            <a:avLst/>
+          </a:prstGeom>
+          <a:noFill/>
+        </p:spPr>
+        <p:txBody>
+          <a:bodyPr wrap="square" anchor="t" lIns="0" rIns="0" tIns="0" bIns="0">
+            <a:spAutoFit/>
+          </a:bodyPr>
+          <a:lstStyle/>
+          <a:p>
+            <a:pPr algn="l">
+              <a:spcBef>
+                <a:spcPts val="0"/>
+              </a:spcBef>
+              <a:spcAft>
+                <a:spcPts val="400"/>
+              </a:spcAft>
+            </a:pPr>
+            <a:r>
+              <a:rPr sz="1250" b="0" i="0">
+                <a:solidFill>
+                  <a:srgbClr val="B9CADB"/>
+                </a:solidFill>
+                <a:latin typeface="Calibri"/>
+              </a:rPr>
+              <a:t>Alarmes/operador·hora, % de malhas em automático, blocos em programa, interlocks e variáveis simuladas — além do OEE — por planta, num só painel.</a:t>
+            </a:r>
+          </a:p>
+        </p:txBody>
+      </p:sp>
+      <p:sp>
+        <p:nvSpPr>
+          <p:cNvPr id="10" name="Rounded Rectangle 9"/>
+          <p:cNvSpPr/>
+          <p:nvPr/>
+        </p:nvSpPr>
+        <p:spPr>
+          <a:xfrm>
+            <a:off x="3566160" y="2240280"/>
+            <a:ext cx="2606040" cy="2651760"/>
+          </a:xfrm>
+          <a:prstGeom prst="roundRect">
+            <a:avLst/>
+          </a:prstGeom>
+          <a:solidFill>
+            <a:srgbClr val="17334E"/>
+          </a:solidFill>
+          <a:ln w="15240">
+            <a:solidFill>
+              <a:srgbClr val="F59E0B"/>
+            </a:solidFill>
+          </a:ln>
+          <a:effectLst/>
+        </p:spPr>
+        <p:style>
+          <a:lnRef idx="1">
+            <a:schemeClr val="accent1"/>
+          </a:lnRef>
+          <a:fillRef idx="3">
+            <a:schemeClr val="accent1"/>
+          </a:fillRef>
+          <a:effectRef idx="2">
+            <a:schemeClr val="accent1"/>
+          </a:effectRef>
+          <a:fontRef idx="minor">
+            <a:schemeClr val="lt1"/>
+          </a:fontRef>
+        </p:style>
+        <p:txBody>
+          <a:bodyPr rtlCol="0" anchor="ctr"/>
+          <a:lstStyle/>
+          <a:p>
+            <a:pPr algn="ctr"/>
+          </a:p>
+        </p:txBody>
+      </p:sp>
+      <p:sp>
+        <p:nvSpPr>
+          <p:cNvPr id="11" name="Rounded Rectangle 10"/>
+          <p:cNvSpPr/>
+          <p:nvPr/>
+        </p:nvSpPr>
+        <p:spPr>
+          <a:xfrm>
+            <a:off x="3566160" y="2240280"/>
+            <a:ext cx="2606040" cy="91440"/>
+          </a:xfrm>
+          <a:prstGeom prst="roundRect">
+            <a:avLst/>
+          </a:prstGeom>
+          <a:solidFill>
+            <a:srgbClr val="F59E0B"/>
+          </a:solidFill>
+          <a:ln>
+            <a:noFill/>
+          </a:ln>
+          <a:effectLst/>
+        </p:spPr>
+        <p:style>
+          <a:lnRef idx="1">
+            <a:schemeClr val="accent1"/>
+          </a:lnRef>
+          <a:fillRef idx="3">
+            <a:schemeClr val="accent1"/>
+          </a:fillRef>
+          <a:effectRef idx="2">
+            <a:schemeClr val="accent1"/>
+          </a:effectRef>
+          <a:fontRef idx="minor">
+            <a:schemeClr val="lt1"/>
+          </a:fontRef>
+        </p:style>
+        <p:txBody>
+          <a:bodyPr rtlCol="0" anchor="ctr"/>
+          <a:lstStyle/>
+          <a:p>
+            <a:pPr algn="ctr"/>
+          </a:p>
+        </p:txBody>
+      </p:sp>
+      <p:sp>
+        <p:nvSpPr>
+          <p:cNvPr id="12" name="TextBox 11"/>
+          <p:cNvSpPr txBox="1"/>
+          <p:nvPr/>
+        </p:nvSpPr>
+        <p:spPr>
+          <a:xfrm>
+            <a:off x="3794760" y="2587752"/>
+            <a:ext cx="2148840" cy="777240"/>
+          </a:xfrm>
+          <a:prstGeom prst="rect">
+            <a:avLst/>
+          </a:prstGeom>
+          <a:noFill/>
+        </p:spPr>
+        <p:txBody>
+          <a:bodyPr wrap="square" anchor="t" lIns="0" rIns="0" tIns="0" bIns="0">
+            <a:spAutoFit/>
+          </a:bodyPr>
+          <a:lstStyle/>
+          <a:p>
+            <a:pPr algn="l">
+              <a:spcBef>
+                <a:spcPts val="0"/>
+              </a:spcBef>
+              <a:spcAft>
+                <a:spcPts val="400"/>
+              </a:spcAft>
+            </a:pPr>
+            <a:r>
+              <a:rPr sz="1650" b="1" i="0">
+                <a:solidFill>
+                  <a:srgbClr val="FFFFFF"/>
+                </a:solidFill>
+                <a:latin typeface="Calibri"/>
+              </a:rPr>
+              <a:t>Planejamento enterprise</a:t>
+            </a:r>
+          </a:p>
+        </p:txBody>
+      </p:sp>
+      <p:sp>
+        <p:nvSpPr>
+          <p:cNvPr id="13" name="TextBox 12"/>
+          <p:cNvSpPr txBox="1"/>
+          <p:nvPr/>
+        </p:nvSpPr>
+        <p:spPr>
+          <a:xfrm>
+            <a:off x="3794760" y="3337560"/>
+            <a:ext cx="2148840" cy="1463040"/>
+          </a:xfrm>
+          <a:prstGeom prst="rect">
+            <a:avLst/>
+          </a:prstGeom>
+          <a:noFill/>
+        </p:spPr>
+        <p:txBody>
+          <a:bodyPr wrap="square" anchor="t" lIns="0" rIns="0" tIns="0" bIns="0">
+            <a:spAutoFit/>
+          </a:bodyPr>
+          <a:lstStyle/>
+          <a:p>
+            <a:pPr algn="l">
+              <a:spcBef>
+                <a:spcPts val="0"/>
+              </a:spcBef>
+              <a:spcAft>
+                <a:spcPts val="400"/>
+              </a:spcAft>
+            </a:pPr>
+            <a:r>
+              <a:rPr sz="1250" b="0" i="0">
+                <a:solidFill>
+                  <a:srgbClr val="B9CADB"/>
+                </a:solidFill>
+                <a:latin typeface="Calibri"/>
+              </a:rPr>
+              <a:t>Decisão de produção, manutenção e ações estratégicas em nível corporativo — visão consolidada da companhia, não por site isolado.</a:t>
+            </a:r>
+          </a:p>
+        </p:txBody>
+      </p:sp>
+      <p:sp>
+        <p:nvSpPr>
+          <p:cNvPr id="14" name="Rounded Rectangle 13"/>
+          <p:cNvSpPr/>
+          <p:nvPr/>
+        </p:nvSpPr>
+        <p:spPr>
+          <a:xfrm>
+            <a:off x="6355080" y="2240280"/>
+            <a:ext cx="2606040" cy="2651760"/>
+          </a:xfrm>
+          <a:prstGeom prst="roundRect">
+            <a:avLst/>
+          </a:prstGeom>
+          <a:solidFill>
+            <a:srgbClr val="17334E"/>
+          </a:solidFill>
+          <a:ln w="15240">
+            <a:solidFill>
+              <a:srgbClr val="F59E0B"/>
+            </a:solidFill>
+          </a:ln>
+          <a:effectLst/>
+        </p:spPr>
+        <p:style>
+          <a:lnRef idx="1">
+            <a:schemeClr val="accent1"/>
+          </a:lnRef>
+          <a:fillRef idx="3">
+            <a:schemeClr val="accent1"/>
+          </a:fillRef>
+          <a:effectRef idx="2">
+            <a:schemeClr val="accent1"/>
+          </a:effectRef>
+          <a:fontRef idx="minor">
+            <a:schemeClr val="lt1"/>
+          </a:fontRef>
+        </p:style>
+        <p:txBody>
+          <a:bodyPr rtlCol="0" anchor="ctr"/>
+          <a:lstStyle/>
+          <a:p>
+            <a:pPr algn="ctr"/>
+          </a:p>
+        </p:txBody>
+      </p:sp>
+      <p:sp>
+        <p:nvSpPr>
+          <p:cNvPr id="15" name="Rounded Rectangle 14"/>
+          <p:cNvSpPr/>
+          <p:nvPr/>
+        </p:nvSpPr>
+        <p:spPr>
+          <a:xfrm>
+            <a:off x="6355080" y="2240280"/>
+            <a:ext cx="2606040" cy="91440"/>
+          </a:xfrm>
+          <a:prstGeom prst="roundRect">
+            <a:avLst/>
+          </a:prstGeom>
+          <a:solidFill>
+            <a:srgbClr val="F59E0B"/>
+          </a:solidFill>
+          <a:ln>
+            <a:noFill/>
+          </a:ln>
+          <a:effectLst/>
+        </p:spPr>
+        <p:style>
+          <a:lnRef idx="1">
+            <a:schemeClr val="accent1"/>
+          </a:lnRef>
+          <a:fillRef idx="3">
+            <a:schemeClr val="accent1"/>
+          </a:fillRef>
+          <a:effectRef idx="2">
+            <a:schemeClr val="accent1"/>
+          </a:effectRef>
+          <a:fontRef idx="minor">
+            <a:schemeClr val="lt1"/>
+          </a:fontRef>
+        </p:style>
+        <p:txBody>
+          <a:bodyPr rtlCol="0" anchor="ctr"/>
+          <a:lstStyle/>
+          <a:p>
+            <a:pPr algn="ctr"/>
+          </a:p>
+        </p:txBody>
+      </p:sp>
+      <p:sp>
+        <p:nvSpPr>
+          <p:cNvPr id="16" name="TextBox 15"/>
+          <p:cNvSpPr txBox="1"/>
+          <p:nvPr/>
+        </p:nvSpPr>
+        <p:spPr>
+          <a:xfrm>
+            <a:off x="6583680" y="2587752"/>
+            <a:ext cx="2148840" cy="777240"/>
+          </a:xfrm>
+          <a:prstGeom prst="rect">
+            <a:avLst/>
+          </a:prstGeom>
+          <a:noFill/>
+        </p:spPr>
+        <p:txBody>
+          <a:bodyPr wrap="square" anchor="t" lIns="0" rIns="0" tIns="0" bIns="0">
+            <a:spAutoFit/>
+          </a:bodyPr>
+          <a:lstStyle/>
+          <a:p>
+            <a:pPr algn="l">
+              <a:spcBef>
+                <a:spcPts val="0"/>
+              </a:spcBef>
+              <a:spcAft>
+                <a:spcPts val="400"/>
+              </a:spcAft>
+            </a:pPr>
+            <a:r>
+              <a:rPr sz="1650" b="1" i="0">
+                <a:solidFill>
+                  <a:srgbClr val="FFFFFF"/>
+                </a:solidFill>
+                <a:latin typeface="Calibri"/>
+              </a:rPr>
+              <a:t>Visão multi-site</a:t>
+            </a:r>
+          </a:p>
+        </p:txBody>
+      </p:sp>
+      <p:sp>
+        <p:nvSpPr>
+          <p:cNvPr id="17" name="TextBox 16"/>
+          <p:cNvSpPr txBox="1"/>
+          <p:nvPr/>
+        </p:nvSpPr>
+        <p:spPr>
+          <a:xfrm>
+            <a:off x="6583680" y="3337560"/>
+            <a:ext cx="2148840" cy="1463040"/>
+          </a:xfrm>
+          <a:prstGeom prst="rect">
+            <a:avLst/>
+          </a:prstGeom>
+          <a:noFill/>
+        </p:spPr>
+        <p:txBody>
+          <a:bodyPr wrap="square" anchor="t" lIns="0" rIns="0" tIns="0" bIns="0">
+            <a:spAutoFit/>
+          </a:bodyPr>
+          <a:lstStyle/>
+          <a:p>
+            <a:pPr algn="l">
+              <a:spcBef>
+                <a:spcPts val="0"/>
+              </a:spcBef>
+              <a:spcAft>
+                <a:spcPts val="400"/>
+              </a:spcAft>
+            </a:pPr>
+            <a:r>
+              <a:rPr sz="1250" b="0" i="0">
+                <a:solidFill>
+                  <a:srgbClr val="B9CADB"/>
+                </a:solidFill>
+                <a:latin typeface="Calibri"/>
+              </a:rPr>
+              <a:t>Sinop, Nova Mutum, Dourados, Balsas, Sidrolândia e novas plantas, lado a lado, na mesma régua.</a:t>
+            </a:r>
+          </a:p>
+        </p:txBody>
+      </p:sp>
+      <p:sp>
+        <p:nvSpPr>
+          <p:cNvPr id="18" name="Rounded Rectangle 17"/>
+          <p:cNvSpPr/>
+          <p:nvPr/>
+        </p:nvSpPr>
+        <p:spPr>
+          <a:xfrm>
+            <a:off x="9144000" y="2240280"/>
+            <a:ext cx="2606040" cy="2651760"/>
+          </a:xfrm>
+          <a:prstGeom prst="roundRect">
+            <a:avLst/>
+          </a:prstGeom>
+          <a:solidFill>
+            <a:srgbClr val="17334E"/>
+          </a:solidFill>
+          <a:ln w="15240">
+            <a:solidFill>
+              <a:srgbClr val="F59E0B"/>
+            </a:solidFill>
+          </a:ln>
+          <a:effectLst/>
+        </p:spPr>
+        <p:style>
+          <a:lnRef idx="1">
+            <a:schemeClr val="accent1"/>
+          </a:lnRef>
+          <a:fillRef idx="3">
+            <a:schemeClr val="accent1"/>
+          </a:fillRef>
+          <a:effectRef idx="2">
+            <a:schemeClr val="accent1"/>
+          </a:effectRef>
+          <a:fontRef idx="minor">
+            <a:schemeClr val="lt1"/>
+          </a:fontRef>
+        </p:style>
+        <p:txBody>
+          <a:bodyPr rtlCol="0" anchor="ctr"/>
+          <a:lstStyle/>
+          <a:p>
+            <a:pPr algn="ctr"/>
+          </a:p>
+        </p:txBody>
+      </p:sp>
+      <p:sp>
+        <p:nvSpPr>
+          <p:cNvPr id="19" name="Rounded Rectangle 18"/>
+          <p:cNvSpPr/>
+          <p:nvPr/>
+        </p:nvSpPr>
+        <p:spPr>
+          <a:xfrm>
+            <a:off x="9144000" y="2240280"/>
+            <a:ext cx="2606040" cy="91440"/>
+          </a:xfrm>
+          <a:prstGeom prst="roundRect">
+            <a:avLst/>
+          </a:prstGeom>
+          <a:solidFill>
+            <a:srgbClr val="F59E0B"/>
+          </a:solidFill>
+          <a:ln>
+            <a:noFill/>
+          </a:ln>
+          <a:effectLst/>
+        </p:spPr>
+        <p:style>
+          <a:lnRef idx="1">
+            <a:schemeClr val="accent1"/>
+          </a:lnRef>
+          <a:fillRef idx="3">
+            <a:schemeClr val="accent1"/>
+          </a:fillRef>
+          <a:effectRef idx="2">
+            <a:schemeClr val="accent1"/>
+          </a:effectRef>
+          <a:fontRef idx="minor">
+            <a:schemeClr val="lt1"/>
+          </a:fontRef>
+        </p:style>
+        <p:txBody>
+          <a:bodyPr rtlCol="0" anchor="ctr"/>
+          <a:lstStyle/>
+          <a:p>
+            <a:pPr algn="ctr"/>
+          </a:p>
+        </p:txBody>
+      </p:sp>
+      <p:sp>
+        <p:nvSpPr>
+          <p:cNvPr id="20" name="TextBox 19"/>
+          <p:cNvSpPr txBox="1"/>
+          <p:nvPr/>
+        </p:nvSpPr>
+        <p:spPr>
+          <a:xfrm>
+            <a:off x="9372600" y="2587752"/>
+            <a:ext cx="2148840" cy="777240"/>
+          </a:xfrm>
+          <a:prstGeom prst="rect">
+            <a:avLst/>
+          </a:prstGeom>
+          <a:noFill/>
+        </p:spPr>
+        <p:txBody>
+          <a:bodyPr wrap="square" anchor="t" lIns="0" rIns="0" tIns="0" bIns="0">
+            <a:spAutoFit/>
+          </a:bodyPr>
+          <a:lstStyle/>
+          <a:p>
+            <a:pPr algn="l">
+              <a:spcBef>
+                <a:spcPts val="0"/>
+              </a:spcBef>
+              <a:spcAft>
+                <a:spcPts val="400"/>
+              </a:spcAft>
+            </a:pPr>
+            <a:r>
+              <a:rPr sz="1650" b="1" i="0">
+                <a:solidFill>
+                  <a:srgbClr val="FFFFFF"/>
+                </a:solidFill>
+                <a:latin typeface="Calibri"/>
+              </a:rPr>
+              <a:t>Contexto OT + IT + ET</a:t>
+            </a:r>
+          </a:p>
+        </p:txBody>
+      </p:sp>
+      <p:sp>
+        <p:nvSpPr>
+          <p:cNvPr id="21" name="TextBox 20"/>
+          <p:cNvSpPr txBox="1"/>
+          <p:nvPr/>
+        </p:nvSpPr>
+        <p:spPr>
+          <a:xfrm>
+            <a:off x="9372600" y="3337560"/>
+            <a:ext cx="2148840" cy="1463040"/>
+          </a:xfrm>
+          <a:prstGeom prst="rect">
+            <a:avLst/>
+          </a:prstGeom>
+          <a:noFill/>
+        </p:spPr>
+        <p:txBody>
+          <a:bodyPr wrap="square" anchor="t" lIns="0" rIns="0" tIns="0" bIns="0">
+            <a:spAutoFit/>
+          </a:bodyPr>
+          <a:lstStyle/>
+          <a:p>
+            <a:pPr algn="l">
+              <a:spcBef>
+                <a:spcPts val="0"/>
+              </a:spcBef>
+              <a:spcAft>
+                <a:spcPts val="400"/>
+              </a:spcAft>
+            </a:pPr>
+            <a:r>
+              <a:rPr sz="1250" b="0" i="0">
+                <a:solidFill>
+                  <a:srgbClr val="B9CADB"/>
+                </a:solidFill>
+                <a:latin typeface="Calibri"/>
+              </a:rPr>
+              <a:t>Une OT (processo / chão de fábrica), IT (sistemas corporativos / ERP) e ET (engenharia / ativos) num só contexto pronto para a IA.</a:t>
+            </a:r>
+          </a:p>
+        </p:txBody>
+      </p:sp>
+      <p:sp>
+        <p:nvSpPr>
+          <p:cNvPr id="22" name="TextBox 21"/>
+          <p:cNvSpPr txBox="1"/>
+          <p:nvPr/>
+        </p:nvSpPr>
+        <p:spPr>
+          <a:xfrm>
+            <a:off x="11338560" y="6446520"/>
+            <a:ext cx="731520" cy="274320"/>
+          </a:xfrm>
+          <a:prstGeom prst="rect">
+            <a:avLst/>
+          </a:prstGeom>
+          <a:noFill/>
+        </p:spPr>
+        <p:txBody>
+          <a:bodyPr wrap="square" anchor="t" lIns="0" rIns="0" tIns="0" bIns="0">
+            <a:spAutoFit/>
+          </a:bodyPr>
+          <a:lstStyle/>
+          <a:p>
+            <a:pPr algn="r">
+              <a:spcBef>
+                <a:spcPts val="0"/>
+              </a:spcBef>
+              <a:spcAft>
+                <a:spcPts val="400"/>
+              </a:spcAft>
+            </a:pPr>
+            <a:r>
+              <a:rPr sz="1000" b="0" i="0">
+                <a:solidFill>
+                  <a:srgbClr val="627D98"/>
+                </a:solidFill>
+                <a:latin typeface="Calibri"/>
+              </a:rPr>
+              <a:t>16</a:t>
+            </a:r>
+          </a:p>
+        </p:txBody>
+      </p:sp>
+      <p:sp>
+        <p:nvSpPr>
+          <p:cNvPr id="23" name="TextBox 22"/>
+          <p:cNvSpPr txBox="1"/>
+          <p:nvPr/>
+        </p:nvSpPr>
+        <p:spPr>
+          <a:xfrm>
+            <a:off x="777240" y="6446520"/>
+            <a:ext cx="5486400" cy="274320"/>
+          </a:xfrm>
+          <a:prstGeom prst="rect">
+            <a:avLst/>
+          </a:prstGeom>
+          <a:noFill/>
+        </p:spPr>
+        <p:txBody>
+          <a:bodyPr wrap="square" anchor="t" lIns="0" rIns="0" tIns="0" bIns="0">
+            <a:spAutoFit/>
+          </a:bodyPr>
+          <a:lstStyle/>
+          <a:p>
+            <a:pPr algn="l">
+              <a:spcBef>
+                <a:spcPts val="0"/>
+              </a:spcBef>
+              <a:spcAft>
+                <a:spcPts val="400"/>
+              </a:spcAft>
+            </a:pPr>
+            <a:r>
+              <a:rPr sz="900" b="0" i="0">
+                <a:solidFill>
+                  <a:srgbClr val="627D98"/>
+                </a:solidFill>
+                <a:latin typeface="Calibri"/>
+              </a:rPr>
+              <a:t>Inpasa  ·  Gestão Estratégica de Automação</a:t>
+            </a:r>
+          </a:p>
+        </p:txBody>
+      </p:sp>
+    </p:spTree>
+  </p:cSld>
+  <p:clrMapOvr>
+    <a:masterClrMapping/>
+  </p:clrMapOvr>
+</p:sld>
+</file>
+
+<file path=ppt/slides/slide17.xml><?xml version="1.0" encoding="utf-8"?>
 <p:sld xmlns:a="http://schemas.openxmlformats.org/drawingml/2006/main" xmlns:p="http://schemas.openxmlformats.org/presentationml/2006/main" xmlns:r="http://schemas.openxmlformats.org/officeDocument/2006/relationships">
   <p:cSld>
     <p:bg>
@@ -9048,7 +11407,7 @@
                 </a:solidFill>
                 <a:latin typeface="Calibri"/>
               </a:rPr>
-              <a:t>INDICADORES</a:t>
+              <a:t>APLICAÇÃO DIRETA</a:t>
             </a:r>
           </a:p>
         </p:txBody>
@@ -9090,34 +11449,41 @@
                 </a:solidFill>
                 <a:latin typeface="Calibri"/>
               </a:rPr>
-              <a:t>KPIs de benchmarking que o ecossistema já mede</a:t>
-            </a:r>
-          </a:p>
-        </p:txBody>
-      </p:sp>
-      <p:sp>
-        <p:nvSpPr>
-          <p:cNvPr id="7" name="Rectangle 6"/>
+              <a:t>Como isso aparece no COI da Inpasa</a:t>
+            </a:r>
+          </a:p>
+        </p:txBody>
+      </p:sp>
+      <p:sp>
+        <p:nvSpPr>
+          <p:cNvPr id="7" name="Rounded Rectangle 6"/>
           <p:cNvSpPr/>
           <p:nvPr/>
         </p:nvSpPr>
         <p:spPr>
           <a:xfrm>
-            <a:off x="777240" y="1481328"/>
-            <a:ext cx="3931920" cy="457200"/>
-          </a:xfrm>
-          <a:prstGeom prst="rect">
+            <a:off x="777240" y="1600200"/>
+            <a:ext cx="5257800" cy="2103120"/>
+          </a:xfrm>
+          <a:prstGeom prst="roundRect">
             <a:avLst/>
           </a:prstGeom>
           <a:solidFill>
-            <a:srgbClr val="102A43"/>
+            <a:srgbClr val="FFFFFF"/>
           </a:solidFill>
-          <a:ln w="6350">
+          <a:ln w="12700">
             <a:solidFill>
               <a:srgbClr val="D9E2EC"/>
             </a:solidFill>
           </a:ln>
           <a:effectLst/>
+          <a:effectLst>
+            <a:outerShdw blurRad="90000" dist="40000" dir="5400000" rotWithShape="0">
+              <a:srgbClr val="1B2A3A">
+                <a:alpha val="24000"/>
+              </a:srgbClr>
+            </a:outerShdw>
+          </a:effectLst>
         </p:spPr>
         <p:style>
           <a:lnRef idx="1">
@@ -9134,43 +11500,34 @@
           </a:fontRef>
         </p:style>
         <p:txBody>
-          <a:bodyPr rtlCol="0" anchor="ctr" wrap="square" lIns="101600" rIns="76200"/>
+          <a:bodyPr rtlCol="0" anchor="ctr"/>
           <a:lstStyle/>
           <a:p>
             <a:pPr algn="ctr"/>
-            <a:r>
-              <a:rPr sz="1250" b="1">
-                <a:solidFill>
-                  <a:srgbClr val="FFFFFF"/>
-                </a:solidFill>
-                <a:latin typeface="Calibri"/>
-              </a:rPr>
-              <a:t>KPI</a:t>
-            </a:r>
-          </a:p>
-        </p:txBody>
-      </p:sp>
-      <p:sp>
-        <p:nvSpPr>
-          <p:cNvPr id="8" name="Rectangle 7"/>
+          </a:p>
+        </p:txBody>
+      </p:sp>
+      <p:sp>
+        <p:nvSpPr>
+          <p:cNvPr id="8" name="Rounded Rectangle 7"/>
           <p:cNvSpPr/>
           <p:nvPr/>
         </p:nvSpPr>
         <p:spPr>
           <a:xfrm>
-            <a:off x="4709160" y="1481328"/>
-            <a:ext cx="3931920" cy="457200"/>
-          </a:xfrm>
-          <a:prstGeom prst="rect">
-            <a:avLst/>
+            <a:off x="1051560" y="1874520"/>
+            <a:ext cx="548640" cy="548640"/>
+          </a:xfrm>
+          <a:prstGeom prst="roundRect">
+            <a:avLst>
+              <a:gd name="adj" fmla="val 30000"/>
+            </a:avLst>
           </a:prstGeom>
           <a:solidFill>
-            <a:srgbClr val="102A43"/>
+            <a:srgbClr val="169C52"/>
           </a:solidFill>
-          <a:ln w="6350">
-            <a:solidFill>
-              <a:srgbClr val="D9E2EC"/>
-            </a:solidFill>
+          <a:ln>
+            <a:noFill/>
           </a:ln>
           <a:effectLst/>
         </p:spPr>
@@ -9189,1407 +11546,32 @@
           </a:fontRef>
         </p:style>
         <p:txBody>
-          <a:bodyPr rtlCol="0" anchor="ctr" wrap="square" lIns="101600" rIns="76200"/>
+          <a:bodyPr rtlCol="0" anchor="ctr"/>
           <a:lstStyle/>
           <a:p>
             <a:pPr algn="ctr"/>
             <a:r>
-              <a:rPr sz="1250" b="1">
+              <a:rPr b="1" sz="2000">
                 <a:solidFill>
                   <a:srgbClr val="FFFFFF"/>
                 </a:solidFill>
                 <a:latin typeface="Calibri"/>
               </a:rPr>
-              <a:t>Ferramenta</a:t>
-            </a:r>
-          </a:p>
-        </p:txBody>
-      </p:sp>
-      <p:sp>
-        <p:nvSpPr>
-          <p:cNvPr id="9" name="Rectangle 8"/>
-          <p:cNvSpPr/>
-          <p:nvPr/>
-        </p:nvSpPr>
-        <p:spPr>
-          <a:xfrm>
-            <a:off x="8641080" y="1481328"/>
-            <a:ext cx="2743200" cy="457200"/>
-          </a:xfrm>
-          <a:prstGeom prst="rect">
-            <a:avLst/>
-          </a:prstGeom>
-          <a:solidFill>
-            <a:srgbClr val="102A43"/>
-          </a:solidFill>
-          <a:ln w="6350">
-            <a:solidFill>
-              <a:srgbClr val="D9E2EC"/>
-            </a:solidFill>
-          </a:ln>
-          <a:effectLst/>
-        </p:spPr>
-        <p:style>
-          <a:lnRef idx="1">
-            <a:schemeClr val="accent1"/>
-          </a:lnRef>
-          <a:fillRef idx="3">
-            <a:schemeClr val="accent1"/>
-          </a:fillRef>
-          <a:effectRef idx="2">
-            <a:schemeClr val="accent1"/>
-          </a:effectRef>
-          <a:fontRef idx="minor">
-            <a:schemeClr val="lt1"/>
-          </a:fontRef>
-        </p:style>
-        <p:txBody>
-          <a:bodyPr rtlCol="0" anchor="ctr" wrap="square" lIns="101600" rIns="76200"/>
-          <a:lstStyle/>
-          <a:p>
-            <a:pPr algn="ctr"/>
-            <a:r>
-              <a:rPr sz="1250" b="1">
-                <a:solidFill>
-                  <a:srgbClr val="FFFFFF"/>
-                </a:solidFill>
-                <a:latin typeface="Calibri"/>
-              </a:rPr>
-              <a:t>Disponível hoje?</a:t>
-            </a:r>
-          </a:p>
-        </p:txBody>
-      </p:sp>
-      <p:sp>
-        <p:nvSpPr>
-          <p:cNvPr id="10" name="Rectangle 9"/>
-          <p:cNvSpPr/>
-          <p:nvPr/>
-        </p:nvSpPr>
-        <p:spPr>
-          <a:xfrm>
-            <a:off x="777240" y="1938528"/>
-            <a:ext cx="3931920" cy="457200"/>
-          </a:xfrm>
-          <a:prstGeom prst="rect">
-            <a:avLst/>
-          </a:prstGeom>
-          <a:solidFill>
-            <a:srgbClr val="FFFFFF"/>
-          </a:solidFill>
-          <a:ln w="6350">
-            <a:solidFill>
-              <a:srgbClr val="D9E2EC"/>
-            </a:solidFill>
-          </a:ln>
-          <a:effectLst/>
-        </p:spPr>
-        <p:style>
-          <a:lnRef idx="1">
-            <a:schemeClr val="accent1"/>
-          </a:lnRef>
-          <a:fillRef idx="3">
-            <a:schemeClr val="accent1"/>
-          </a:fillRef>
-          <a:effectRef idx="2">
-            <a:schemeClr val="accent1"/>
-          </a:effectRef>
-          <a:fontRef idx="minor">
-            <a:schemeClr val="lt1"/>
-          </a:fontRef>
-        </p:style>
-        <p:txBody>
-          <a:bodyPr rtlCol="0" anchor="ctr" wrap="square" lIns="101600" rIns="76200"/>
-          <a:lstStyle/>
-          <a:p>
-            <a:pPr algn="ctr"/>
-            <a:r>
-              <a:rPr sz="1250" b="1">
-                <a:solidFill>
-                  <a:srgbClr val="102A43"/>
-                </a:solidFill>
-                <a:latin typeface="Calibri"/>
-              </a:rPr>
-              <a:t>Alarmes por operador/hora</a:t>
-            </a:r>
-          </a:p>
-        </p:txBody>
-      </p:sp>
-      <p:sp>
-        <p:nvSpPr>
-          <p:cNvPr id="11" name="Rectangle 10"/>
-          <p:cNvSpPr/>
-          <p:nvPr/>
-        </p:nvSpPr>
-        <p:spPr>
-          <a:xfrm>
-            <a:off x="4709160" y="1938528"/>
-            <a:ext cx="3931920" cy="457200"/>
-          </a:xfrm>
-          <a:prstGeom prst="rect">
-            <a:avLst/>
-          </a:prstGeom>
-          <a:solidFill>
-            <a:srgbClr val="FFFFFF"/>
-          </a:solidFill>
-          <a:ln w="6350">
-            <a:solidFill>
-              <a:srgbClr val="D9E2EC"/>
-            </a:solidFill>
-          </a:ln>
-          <a:effectLst/>
-        </p:spPr>
-        <p:style>
-          <a:lnRef idx="1">
-            <a:schemeClr val="accent1"/>
-          </a:lnRef>
-          <a:fillRef idx="3">
-            <a:schemeClr val="accent1"/>
-          </a:fillRef>
-          <a:effectRef idx="2">
-            <a:schemeClr val="accent1"/>
-          </a:effectRef>
-          <a:fontRef idx="minor">
-            <a:schemeClr val="lt1"/>
-          </a:fontRef>
-        </p:style>
-        <p:txBody>
-          <a:bodyPr rtlCol="0" anchor="ctr" wrap="square" lIns="101600" rIns="76200"/>
-          <a:lstStyle/>
-          <a:p>
-            <a:pPr algn="ctr"/>
-            <a:r>
-              <a:rPr sz="1250" b="0">
-                <a:solidFill>
-                  <a:srgbClr val="334E68"/>
-                </a:solidFill>
-                <a:latin typeface="Calibri"/>
-              </a:rPr>
-              <a:t>Grafana (hoje) + DataMosaix</a:t>
-            </a:r>
-          </a:p>
-        </p:txBody>
-      </p:sp>
-      <p:sp>
-        <p:nvSpPr>
-          <p:cNvPr id="12" name="Rectangle 11"/>
-          <p:cNvSpPr/>
-          <p:nvPr/>
-        </p:nvSpPr>
-        <p:spPr>
-          <a:xfrm>
-            <a:off x="8641080" y="1938528"/>
-            <a:ext cx="2743200" cy="457200"/>
-          </a:xfrm>
-          <a:prstGeom prst="rect">
-            <a:avLst/>
-          </a:prstGeom>
-          <a:solidFill>
-            <a:srgbClr val="FFFFFF"/>
-          </a:solidFill>
-          <a:ln w="6350">
-            <a:solidFill>
-              <a:srgbClr val="D9E2EC"/>
-            </a:solidFill>
-          </a:ln>
-          <a:effectLst/>
-        </p:spPr>
-        <p:style>
-          <a:lnRef idx="1">
-            <a:schemeClr val="accent1"/>
-          </a:lnRef>
-          <a:fillRef idx="3">
-            <a:schemeClr val="accent1"/>
-          </a:fillRef>
-          <a:effectRef idx="2">
-            <a:schemeClr val="accent1"/>
-          </a:effectRef>
-          <a:fontRef idx="minor">
-            <a:schemeClr val="lt1"/>
-          </a:fontRef>
-        </p:style>
-        <p:txBody>
-          <a:bodyPr rtlCol="0" anchor="ctr" wrap="square" lIns="101600" rIns="76200"/>
-          <a:lstStyle/>
-          <a:p>
-            <a:pPr algn="ctr"/>
-            <a:r>
-              <a:rPr sz="1250" b="0">
-                <a:solidFill>
-                  <a:srgbClr val="334E68"/>
-                </a:solidFill>
-                <a:latin typeface="Calibri"/>
-              </a:rPr>
-              <a:t>Sim — sobre PlantPAx adaptado</a:t>
-            </a:r>
-          </a:p>
-        </p:txBody>
-      </p:sp>
-      <p:sp>
-        <p:nvSpPr>
-          <p:cNvPr id="13" name="Rectangle 12"/>
-          <p:cNvSpPr/>
-          <p:nvPr/>
-        </p:nvSpPr>
-        <p:spPr>
-          <a:xfrm>
-            <a:off x="777240" y="2395728"/>
-            <a:ext cx="3931920" cy="457200"/>
-          </a:xfrm>
-          <a:prstGeom prst="rect">
-            <a:avLst/>
-          </a:prstGeom>
-          <a:solidFill>
-            <a:srgbClr val="ECF2F7"/>
-          </a:solidFill>
-          <a:ln w="6350">
-            <a:solidFill>
-              <a:srgbClr val="D9E2EC"/>
-            </a:solidFill>
-          </a:ln>
-          <a:effectLst/>
-        </p:spPr>
-        <p:style>
-          <a:lnRef idx="1">
-            <a:schemeClr val="accent1"/>
-          </a:lnRef>
-          <a:fillRef idx="3">
-            <a:schemeClr val="accent1"/>
-          </a:fillRef>
-          <a:effectRef idx="2">
-            <a:schemeClr val="accent1"/>
-          </a:effectRef>
-          <a:fontRef idx="minor">
-            <a:schemeClr val="lt1"/>
-          </a:fontRef>
-        </p:style>
-        <p:txBody>
-          <a:bodyPr rtlCol="0" anchor="ctr" wrap="square" lIns="101600" rIns="76200"/>
-          <a:lstStyle/>
-          <a:p>
-            <a:pPr algn="ctr"/>
-            <a:r>
-              <a:rPr sz="1250" b="1">
-                <a:solidFill>
-                  <a:srgbClr val="102A43"/>
-                </a:solidFill>
-                <a:latin typeface="Calibri"/>
-              </a:rPr>
-              <a:t>Alarmes não reconhecidos</a:t>
-            </a:r>
-          </a:p>
-        </p:txBody>
-      </p:sp>
-      <p:sp>
-        <p:nvSpPr>
-          <p:cNvPr id="14" name="Rectangle 13"/>
-          <p:cNvSpPr/>
-          <p:nvPr/>
-        </p:nvSpPr>
-        <p:spPr>
-          <a:xfrm>
-            <a:off x="4709160" y="2395728"/>
-            <a:ext cx="3931920" cy="457200"/>
-          </a:xfrm>
-          <a:prstGeom prst="rect">
-            <a:avLst/>
-          </a:prstGeom>
-          <a:solidFill>
-            <a:srgbClr val="ECF2F7"/>
-          </a:solidFill>
-          <a:ln w="6350">
-            <a:solidFill>
-              <a:srgbClr val="D9E2EC"/>
-            </a:solidFill>
-          </a:ln>
-          <a:effectLst/>
-        </p:spPr>
-        <p:style>
-          <a:lnRef idx="1">
-            <a:schemeClr val="accent1"/>
-          </a:lnRef>
-          <a:fillRef idx="3">
-            <a:schemeClr val="accent1"/>
-          </a:fillRef>
-          <a:effectRef idx="2">
-            <a:schemeClr val="accent1"/>
-          </a:effectRef>
-          <a:fontRef idx="minor">
-            <a:schemeClr val="lt1"/>
-          </a:fontRef>
-        </p:style>
-        <p:txBody>
-          <a:bodyPr rtlCol="0" anchor="ctr" wrap="square" lIns="101600" rIns="76200"/>
-          <a:lstStyle/>
-          <a:p>
-            <a:pPr algn="ctr"/>
-            <a:r>
-              <a:rPr sz="1250" b="0">
-                <a:solidFill>
-                  <a:srgbClr val="334E68"/>
-                </a:solidFill>
-                <a:latin typeface="Calibri"/>
-              </a:rPr>
-              <a:t>FT Alarms &amp; Events</a:t>
-            </a:r>
-          </a:p>
-        </p:txBody>
-      </p:sp>
-      <p:sp>
-        <p:nvSpPr>
-          <p:cNvPr id="15" name="Rectangle 14"/>
-          <p:cNvSpPr/>
-          <p:nvPr/>
-        </p:nvSpPr>
-        <p:spPr>
-          <a:xfrm>
-            <a:off x="8641080" y="2395728"/>
-            <a:ext cx="2743200" cy="457200"/>
-          </a:xfrm>
-          <a:prstGeom prst="rect">
-            <a:avLst/>
-          </a:prstGeom>
-          <a:solidFill>
-            <a:srgbClr val="ECF2F7"/>
-          </a:solidFill>
-          <a:ln w="6350">
-            <a:solidFill>
-              <a:srgbClr val="D9E2EC"/>
-            </a:solidFill>
-          </a:ln>
-          <a:effectLst/>
-        </p:spPr>
-        <p:style>
-          <a:lnRef idx="1">
-            <a:schemeClr val="accent1"/>
-          </a:lnRef>
-          <a:fillRef idx="3">
-            <a:schemeClr val="accent1"/>
-          </a:fillRef>
-          <a:effectRef idx="2">
-            <a:schemeClr val="accent1"/>
-          </a:effectRef>
-          <a:fontRef idx="minor">
-            <a:schemeClr val="lt1"/>
-          </a:fontRef>
-        </p:style>
-        <p:txBody>
-          <a:bodyPr rtlCol="0" anchor="ctr" wrap="square" lIns="101600" rIns="76200"/>
-          <a:lstStyle/>
-          <a:p>
-            <a:pPr algn="ctr"/>
-            <a:r>
-              <a:rPr sz="1250" b="0">
-                <a:solidFill>
-                  <a:srgbClr val="334E68"/>
-                </a:solidFill>
-                <a:latin typeface="Calibri"/>
-              </a:rPr>
-              <a:t>Nativo</a:t>
-            </a:r>
-          </a:p>
-        </p:txBody>
-      </p:sp>
-      <p:sp>
-        <p:nvSpPr>
-          <p:cNvPr id="16" name="Rectangle 15"/>
-          <p:cNvSpPr/>
-          <p:nvPr/>
-        </p:nvSpPr>
-        <p:spPr>
-          <a:xfrm>
-            <a:off x="777240" y="2852928"/>
-            <a:ext cx="3931920" cy="457200"/>
-          </a:xfrm>
-          <a:prstGeom prst="rect">
-            <a:avLst/>
-          </a:prstGeom>
-          <a:solidFill>
-            <a:srgbClr val="FFFFFF"/>
-          </a:solidFill>
-          <a:ln w="6350">
-            <a:solidFill>
-              <a:srgbClr val="D9E2EC"/>
-            </a:solidFill>
-          </a:ln>
-          <a:effectLst/>
-        </p:spPr>
-        <p:style>
-          <a:lnRef idx="1">
-            <a:schemeClr val="accent1"/>
-          </a:lnRef>
-          <a:fillRef idx="3">
-            <a:schemeClr val="accent1"/>
-          </a:fillRef>
-          <a:effectRef idx="2">
-            <a:schemeClr val="accent1"/>
-          </a:effectRef>
-          <a:fontRef idx="minor">
-            <a:schemeClr val="lt1"/>
-          </a:fontRef>
-        </p:style>
-        <p:txBody>
-          <a:bodyPr rtlCol="0" anchor="ctr" wrap="square" lIns="101600" rIns="76200"/>
-          <a:lstStyle/>
-          <a:p>
-            <a:pPr algn="ctr"/>
-            <a:r>
-              <a:rPr sz="1250" b="1">
-                <a:solidFill>
-                  <a:srgbClr val="102A43"/>
-                </a:solidFill>
-                <a:latin typeface="Calibri"/>
-              </a:rPr>
-              <a:t>Controles em Auto / Manual</a:t>
-            </a:r>
-          </a:p>
-        </p:txBody>
-      </p:sp>
-      <p:sp>
-        <p:nvSpPr>
-          <p:cNvPr id="17" name="Rectangle 16"/>
-          <p:cNvSpPr/>
-          <p:nvPr/>
-        </p:nvSpPr>
-        <p:spPr>
-          <a:xfrm>
-            <a:off x="4709160" y="2852928"/>
-            <a:ext cx="3931920" cy="457200"/>
-          </a:xfrm>
-          <a:prstGeom prst="rect">
-            <a:avLst/>
-          </a:prstGeom>
-          <a:solidFill>
-            <a:srgbClr val="FFFFFF"/>
-          </a:solidFill>
-          <a:ln w="6350">
-            <a:solidFill>
-              <a:srgbClr val="D9E2EC"/>
-            </a:solidFill>
-          </a:ln>
-          <a:effectLst/>
-        </p:spPr>
-        <p:style>
-          <a:lnRef idx="1">
-            <a:schemeClr val="accent1"/>
-          </a:lnRef>
-          <a:fillRef idx="3">
-            <a:schemeClr val="accent1"/>
-          </a:fillRef>
-          <a:effectRef idx="2">
-            <a:schemeClr val="accent1"/>
-          </a:effectRef>
-          <a:fontRef idx="minor">
-            <a:schemeClr val="lt1"/>
-          </a:fontRef>
-        </p:style>
-        <p:txBody>
-          <a:bodyPr rtlCol="0" anchor="ctr" wrap="square" lIns="101600" rIns="76200"/>
-          <a:lstStyle/>
-          <a:p>
-            <a:pPr algn="ctr"/>
-            <a:r>
-              <a:rPr sz="1250" b="0">
-                <a:solidFill>
-                  <a:srgbClr val="334E68"/>
-                </a:solidFill>
-                <a:latin typeface="Calibri"/>
-              </a:rPr>
-              <a:t>PlantPAx P_PID, P_VALVE</a:t>
-            </a:r>
-          </a:p>
-        </p:txBody>
-      </p:sp>
-      <p:sp>
-        <p:nvSpPr>
-          <p:cNvPr id="18" name="Rectangle 17"/>
-          <p:cNvSpPr/>
-          <p:nvPr/>
-        </p:nvSpPr>
-        <p:spPr>
-          <a:xfrm>
-            <a:off x="8641080" y="2852928"/>
-            <a:ext cx="2743200" cy="457200"/>
-          </a:xfrm>
-          <a:prstGeom prst="rect">
-            <a:avLst/>
-          </a:prstGeom>
-          <a:solidFill>
-            <a:srgbClr val="FFFFFF"/>
-          </a:solidFill>
-          <a:ln w="6350">
-            <a:solidFill>
-              <a:srgbClr val="D9E2EC"/>
-            </a:solidFill>
-          </a:ln>
-          <a:effectLst/>
-        </p:spPr>
-        <p:style>
-          <a:lnRef idx="1">
-            <a:schemeClr val="accent1"/>
-          </a:lnRef>
-          <a:fillRef idx="3">
-            <a:schemeClr val="accent1"/>
-          </a:fillRef>
-          <a:effectRef idx="2">
-            <a:schemeClr val="accent1"/>
-          </a:effectRef>
-          <a:fontRef idx="minor">
-            <a:schemeClr val="lt1"/>
-          </a:fontRef>
-        </p:style>
-        <p:txBody>
-          <a:bodyPr rtlCol="0" anchor="ctr" wrap="square" lIns="101600" rIns="76200"/>
-          <a:lstStyle/>
-          <a:p>
-            <a:pPr algn="ctr"/>
-            <a:r>
-              <a:rPr sz="1250" b="0">
-                <a:solidFill>
-                  <a:srgbClr val="334E68"/>
-                </a:solidFill>
-                <a:latin typeface="Calibri"/>
-              </a:rPr>
-              <a:t>Dado já no controlador</a:t>
-            </a:r>
-          </a:p>
-        </p:txBody>
-      </p:sp>
-      <p:sp>
-        <p:nvSpPr>
-          <p:cNvPr id="19" name="Rectangle 18"/>
-          <p:cNvSpPr/>
-          <p:nvPr/>
-        </p:nvSpPr>
-        <p:spPr>
-          <a:xfrm>
-            <a:off x="777240" y="3310128"/>
-            <a:ext cx="3931920" cy="457200"/>
-          </a:xfrm>
-          <a:prstGeom prst="rect">
-            <a:avLst/>
-          </a:prstGeom>
-          <a:solidFill>
-            <a:srgbClr val="ECF2F7"/>
-          </a:solidFill>
-          <a:ln w="6350">
-            <a:solidFill>
-              <a:srgbClr val="D9E2EC"/>
-            </a:solidFill>
-          </a:ln>
-          <a:effectLst/>
-        </p:spPr>
-        <p:style>
-          <a:lnRef idx="1">
-            <a:schemeClr val="accent1"/>
-          </a:lnRef>
-          <a:fillRef idx="3">
-            <a:schemeClr val="accent1"/>
-          </a:fillRef>
-          <a:effectRef idx="2">
-            <a:schemeClr val="accent1"/>
-          </a:effectRef>
-          <a:fontRef idx="minor">
-            <a:schemeClr val="lt1"/>
-          </a:fontRef>
-        </p:style>
-        <p:txBody>
-          <a:bodyPr rtlCol="0" anchor="ctr" wrap="square" lIns="101600" rIns="76200"/>
-          <a:lstStyle/>
-          <a:p>
-            <a:pPr algn="ctr"/>
-            <a:r>
-              <a:rPr sz="1250" b="1">
-                <a:solidFill>
-                  <a:srgbClr val="102A43"/>
-                </a:solidFill>
-                <a:latin typeface="Calibri"/>
-              </a:rPr>
-              <a:t>Blocos Operador / Programa</a:t>
-            </a:r>
-          </a:p>
-        </p:txBody>
-      </p:sp>
-      <p:sp>
-        <p:nvSpPr>
-          <p:cNvPr id="20" name="Rectangle 19"/>
-          <p:cNvSpPr/>
-          <p:nvPr/>
-        </p:nvSpPr>
-        <p:spPr>
-          <a:xfrm>
-            <a:off x="4709160" y="3310128"/>
-            <a:ext cx="3931920" cy="457200"/>
-          </a:xfrm>
-          <a:prstGeom prst="rect">
-            <a:avLst/>
-          </a:prstGeom>
-          <a:solidFill>
-            <a:srgbClr val="ECF2F7"/>
-          </a:solidFill>
-          <a:ln w="6350">
-            <a:solidFill>
-              <a:srgbClr val="D9E2EC"/>
-            </a:solidFill>
-          </a:ln>
-          <a:effectLst/>
-        </p:spPr>
-        <p:style>
-          <a:lnRef idx="1">
-            <a:schemeClr val="accent1"/>
-          </a:lnRef>
-          <a:fillRef idx="3">
-            <a:schemeClr val="accent1"/>
-          </a:fillRef>
-          <a:effectRef idx="2">
-            <a:schemeClr val="accent1"/>
-          </a:effectRef>
-          <a:fontRef idx="minor">
-            <a:schemeClr val="lt1"/>
-          </a:fontRef>
-        </p:style>
-        <p:txBody>
-          <a:bodyPr rtlCol="0" anchor="ctr" wrap="square" lIns="101600" rIns="76200"/>
-          <a:lstStyle/>
-          <a:p>
-            <a:pPr algn="ctr"/>
-            <a:r>
-              <a:rPr sz="1250" b="0">
-                <a:solidFill>
-                  <a:srgbClr val="334E68"/>
-                </a:solidFill>
-                <a:latin typeface="Calibri"/>
-              </a:rPr>
-              <a:t>PlantPAx Command Source</a:t>
-            </a:r>
-          </a:p>
-        </p:txBody>
-      </p:sp>
-      <p:sp>
-        <p:nvSpPr>
-          <p:cNvPr id="21" name="Rectangle 20"/>
-          <p:cNvSpPr/>
-          <p:nvPr/>
-        </p:nvSpPr>
-        <p:spPr>
-          <a:xfrm>
-            <a:off x="8641080" y="3310128"/>
-            <a:ext cx="2743200" cy="457200"/>
-          </a:xfrm>
-          <a:prstGeom prst="rect">
-            <a:avLst/>
-          </a:prstGeom>
-          <a:solidFill>
-            <a:srgbClr val="ECF2F7"/>
-          </a:solidFill>
-          <a:ln w="6350">
-            <a:solidFill>
-              <a:srgbClr val="D9E2EC"/>
-            </a:solidFill>
-          </a:ln>
-          <a:effectLst/>
-        </p:spPr>
-        <p:style>
-          <a:lnRef idx="1">
-            <a:schemeClr val="accent1"/>
-          </a:lnRef>
-          <a:fillRef idx="3">
-            <a:schemeClr val="accent1"/>
-          </a:fillRef>
-          <a:effectRef idx="2">
-            <a:schemeClr val="accent1"/>
-          </a:effectRef>
-          <a:fontRef idx="minor">
-            <a:schemeClr val="lt1"/>
-          </a:fontRef>
-        </p:style>
-        <p:txBody>
-          <a:bodyPr rtlCol="0" anchor="ctr" wrap="square" lIns="101600" rIns="76200"/>
-          <a:lstStyle/>
-          <a:p>
-            <a:pPr algn="ctr"/>
-            <a:r>
-              <a:rPr sz="1250" b="0">
-                <a:solidFill>
-                  <a:srgbClr val="334E68"/>
-                </a:solidFill>
-                <a:latin typeface="Calibri"/>
-              </a:rPr>
-              <a:t>Campo nativo</a:t>
-            </a:r>
-          </a:p>
-        </p:txBody>
-      </p:sp>
-      <p:sp>
-        <p:nvSpPr>
-          <p:cNvPr id="22" name="Rectangle 21"/>
-          <p:cNvSpPr/>
-          <p:nvPr/>
-        </p:nvSpPr>
-        <p:spPr>
-          <a:xfrm>
-            <a:off x="777240" y="3767328"/>
-            <a:ext cx="3931920" cy="457200"/>
-          </a:xfrm>
-          <a:prstGeom prst="rect">
-            <a:avLst/>
-          </a:prstGeom>
-          <a:solidFill>
-            <a:srgbClr val="FFFFFF"/>
-          </a:solidFill>
-          <a:ln w="6350">
-            <a:solidFill>
-              <a:srgbClr val="D9E2EC"/>
-            </a:solidFill>
-          </a:ln>
-          <a:effectLst/>
-        </p:spPr>
-        <p:style>
-          <a:lnRef idx="1">
-            <a:schemeClr val="accent1"/>
-          </a:lnRef>
-          <a:fillRef idx="3">
-            <a:schemeClr val="accent1"/>
-          </a:fillRef>
-          <a:effectRef idx="2">
-            <a:schemeClr val="accent1"/>
-          </a:effectRef>
-          <a:fontRef idx="minor">
-            <a:schemeClr val="lt1"/>
-          </a:fontRef>
-        </p:style>
-        <p:txBody>
-          <a:bodyPr rtlCol="0" anchor="ctr" wrap="square" lIns="101600" rIns="76200"/>
-          <a:lstStyle/>
-          <a:p>
-            <a:pPr algn="ctr"/>
-            <a:r>
-              <a:rPr sz="1250" b="1">
-                <a:solidFill>
-                  <a:srgbClr val="102A43"/>
-                </a:solidFill>
-                <a:latin typeface="Calibri"/>
-              </a:rPr>
-              <a:t>Interlocks desabilitados</a:t>
-            </a:r>
-          </a:p>
-        </p:txBody>
-      </p:sp>
-      <p:sp>
-        <p:nvSpPr>
-          <p:cNvPr id="23" name="Rectangle 22"/>
-          <p:cNvSpPr/>
-          <p:nvPr/>
-        </p:nvSpPr>
-        <p:spPr>
-          <a:xfrm>
-            <a:off x="4709160" y="3767328"/>
-            <a:ext cx="3931920" cy="457200"/>
-          </a:xfrm>
-          <a:prstGeom prst="rect">
-            <a:avLst/>
-          </a:prstGeom>
-          <a:solidFill>
-            <a:srgbClr val="FFFFFF"/>
-          </a:solidFill>
-          <a:ln w="6350">
-            <a:solidFill>
-              <a:srgbClr val="D9E2EC"/>
-            </a:solidFill>
-          </a:ln>
-          <a:effectLst/>
-        </p:spPr>
-        <p:style>
-          <a:lnRef idx="1">
-            <a:schemeClr val="accent1"/>
-          </a:lnRef>
-          <a:fillRef idx="3">
-            <a:schemeClr val="accent1"/>
-          </a:fillRef>
-          <a:effectRef idx="2">
-            <a:schemeClr val="accent1"/>
-          </a:effectRef>
-          <a:fontRef idx="minor">
-            <a:schemeClr val="lt1"/>
-          </a:fontRef>
-        </p:style>
-        <p:txBody>
-          <a:bodyPr rtlCol="0" anchor="ctr" wrap="square" lIns="101600" rIns="76200"/>
-          <a:lstStyle/>
-          <a:p>
-            <a:pPr algn="ctr"/>
-            <a:r>
-              <a:rPr sz="1250" b="0">
-                <a:solidFill>
-                  <a:srgbClr val="334E68"/>
-                </a:solidFill>
-                <a:latin typeface="Calibri"/>
-              </a:rPr>
-              <a:t>PlantPAx P_Gate + P_INTLK</a:t>
-            </a:r>
-          </a:p>
-        </p:txBody>
-      </p:sp>
-      <p:sp>
-        <p:nvSpPr>
-          <p:cNvPr id="24" name="Rectangle 23"/>
-          <p:cNvSpPr/>
-          <p:nvPr/>
-        </p:nvSpPr>
-        <p:spPr>
-          <a:xfrm>
-            <a:off x="8641080" y="3767328"/>
-            <a:ext cx="2743200" cy="457200"/>
-          </a:xfrm>
-          <a:prstGeom prst="rect">
-            <a:avLst/>
-          </a:prstGeom>
-          <a:solidFill>
-            <a:srgbClr val="FFFFFF"/>
-          </a:solidFill>
-          <a:ln w="6350">
-            <a:solidFill>
-              <a:srgbClr val="D9E2EC"/>
-            </a:solidFill>
-          </a:ln>
-          <a:effectLst/>
-        </p:spPr>
-        <p:style>
-          <a:lnRef idx="1">
-            <a:schemeClr val="accent1"/>
-          </a:lnRef>
-          <a:fillRef idx="3">
-            <a:schemeClr val="accent1"/>
-          </a:fillRef>
-          <a:effectRef idx="2">
-            <a:schemeClr val="accent1"/>
-          </a:effectRef>
-          <a:fontRef idx="minor">
-            <a:schemeClr val="lt1"/>
-          </a:fontRef>
-        </p:style>
-        <p:txBody>
-          <a:bodyPr rtlCol="0" anchor="ctr" wrap="square" lIns="101600" rIns="76200"/>
-          <a:lstStyle/>
-          <a:p>
-            <a:pPr algn="ctr"/>
-            <a:r>
-              <a:rPr sz="1250" b="0">
-                <a:solidFill>
-                  <a:srgbClr val="334E68"/>
-                </a:solidFill>
-                <a:latin typeface="Calibri"/>
-              </a:rPr>
-              <a:t>Rastreável</a:t>
-            </a:r>
-          </a:p>
-        </p:txBody>
-      </p:sp>
-      <p:sp>
-        <p:nvSpPr>
-          <p:cNvPr id="25" name="Rectangle 24"/>
-          <p:cNvSpPr/>
-          <p:nvPr/>
-        </p:nvSpPr>
-        <p:spPr>
-          <a:xfrm>
-            <a:off x="777240" y="4224528"/>
-            <a:ext cx="3931920" cy="457200"/>
-          </a:xfrm>
-          <a:prstGeom prst="rect">
-            <a:avLst/>
-          </a:prstGeom>
-          <a:solidFill>
-            <a:srgbClr val="ECF2F7"/>
-          </a:solidFill>
-          <a:ln w="6350">
-            <a:solidFill>
-              <a:srgbClr val="D9E2EC"/>
-            </a:solidFill>
-          </a:ln>
-          <a:effectLst/>
-        </p:spPr>
-        <p:style>
-          <a:lnRef idx="1">
-            <a:schemeClr val="accent1"/>
-          </a:lnRef>
-          <a:fillRef idx="3">
-            <a:schemeClr val="accent1"/>
-          </a:fillRef>
-          <a:effectRef idx="2">
-            <a:schemeClr val="accent1"/>
-          </a:effectRef>
-          <a:fontRef idx="minor">
-            <a:schemeClr val="lt1"/>
-          </a:fontRef>
-        </p:style>
-        <p:txBody>
-          <a:bodyPr rtlCol="0" anchor="ctr" wrap="square" lIns="101600" rIns="76200"/>
-          <a:lstStyle/>
-          <a:p>
-            <a:pPr algn="ctr"/>
-            <a:r>
-              <a:rPr sz="1250" b="1">
-                <a:solidFill>
-                  <a:srgbClr val="102A43"/>
-                </a:solidFill>
-                <a:latin typeface="Calibri"/>
-              </a:rPr>
-              <a:t>Variáveis simuladas</a:t>
-            </a:r>
-          </a:p>
-        </p:txBody>
-      </p:sp>
-      <p:sp>
-        <p:nvSpPr>
-          <p:cNvPr id="26" name="Rectangle 25"/>
-          <p:cNvSpPr/>
-          <p:nvPr/>
-        </p:nvSpPr>
-        <p:spPr>
-          <a:xfrm>
-            <a:off x="4709160" y="4224528"/>
-            <a:ext cx="3931920" cy="457200"/>
-          </a:xfrm>
-          <a:prstGeom prst="rect">
-            <a:avLst/>
-          </a:prstGeom>
-          <a:solidFill>
-            <a:srgbClr val="ECF2F7"/>
-          </a:solidFill>
-          <a:ln w="6350">
-            <a:solidFill>
-              <a:srgbClr val="D9E2EC"/>
-            </a:solidFill>
-          </a:ln>
-          <a:effectLst/>
-        </p:spPr>
-        <p:style>
-          <a:lnRef idx="1">
-            <a:schemeClr val="accent1"/>
-          </a:lnRef>
-          <a:fillRef idx="3">
-            <a:schemeClr val="accent1"/>
-          </a:fillRef>
-          <a:effectRef idx="2">
-            <a:schemeClr val="accent1"/>
-          </a:effectRef>
-          <a:fontRef idx="minor">
-            <a:schemeClr val="lt1"/>
-          </a:fontRef>
-        </p:style>
-        <p:txBody>
-          <a:bodyPr rtlCol="0" anchor="ctr" wrap="square" lIns="101600" rIns="76200"/>
-          <a:lstStyle/>
-          <a:p>
-            <a:pPr algn="ctr"/>
-            <a:r>
-              <a:rPr sz="1250" b="0">
-                <a:solidFill>
-                  <a:srgbClr val="334E68"/>
-                </a:solidFill>
-                <a:latin typeface="Calibri"/>
-              </a:rPr>
-              <a:t>Tag audit via Studio 5000</a:t>
-            </a:r>
-          </a:p>
-        </p:txBody>
-      </p:sp>
-      <p:sp>
-        <p:nvSpPr>
-          <p:cNvPr id="27" name="Rectangle 26"/>
-          <p:cNvSpPr/>
-          <p:nvPr/>
-        </p:nvSpPr>
-        <p:spPr>
-          <a:xfrm>
-            <a:off x="8641080" y="4224528"/>
-            <a:ext cx="2743200" cy="457200"/>
-          </a:xfrm>
-          <a:prstGeom prst="rect">
-            <a:avLst/>
-          </a:prstGeom>
-          <a:solidFill>
-            <a:srgbClr val="ECF2F7"/>
-          </a:solidFill>
-          <a:ln w="6350">
-            <a:solidFill>
-              <a:srgbClr val="D9E2EC"/>
-            </a:solidFill>
-          </a:ln>
-          <a:effectLst/>
-        </p:spPr>
-        <p:style>
-          <a:lnRef idx="1">
-            <a:schemeClr val="accent1"/>
-          </a:lnRef>
-          <a:fillRef idx="3">
-            <a:schemeClr val="accent1"/>
-          </a:fillRef>
-          <a:effectRef idx="2">
-            <a:schemeClr val="accent1"/>
-          </a:effectRef>
-          <a:fontRef idx="minor">
-            <a:schemeClr val="lt1"/>
-          </a:fontRef>
-        </p:style>
-        <p:txBody>
-          <a:bodyPr rtlCol="0" anchor="ctr" wrap="square" lIns="101600" rIns="76200"/>
-          <a:lstStyle/>
-          <a:p>
-            <a:pPr algn="ctr"/>
-            <a:r>
-              <a:rPr sz="1250" b="0">
-                <a:solidFill>
-                  <a:srgbClr val="334E68"/>
-                </a:solidFill>
-                <a:latin typeface="Calibri"/>
-              </a:rPr>
-              <a:t>Possível</a:t>
-            </a:r>
-          </a:p>
-        </p:txBody>
-      </p:sp>
-      <p:sp>
-        <p:nvSpPr>
-          <p:cNvPr id="28" name="Rectangle 27"/>
-          <p:cNvSpPr/>
-          <p:nvPr/>
-        </p:nvSpPr>
-        <p:spPr>
-          <a:xfrm>
-            <a:off x="777240" y="4681728"/>
-            <a:ext cx="3931920" cy="457200"/>
-          </a:xfrm>
-          <a:prstGeom prst="rect">
-            <a:avLst/>
-          </a:prstGeom>
-          <a:solidFill>
-            <a:srgbClr val="FFFFFF"/>
-          </a:solidFill>
-          <a:ln w="6350">
-            <a:solidFill>
-              <a:srgbClr val="D9E2EC"/>
-            </a:solidFill>
-          </a:ln>
-          <a:effectLst/>
-        </p:spPr>
-        <p:style>
-          <a:lnRef idx="1">
-            <a:schemeClr val="accent1"/>
-          </a:lnRef>
-          <a:fillRef idx="3">
-            <a:schemeClr val="accent1"/>
-          </a:fillRef>
-          <a:effectRef idx="2">
-            <a:schemeClr val="accent1"/>
-          </a:effectRef>
-          <a:fontRef idx="minor">
-            <a:schemeClr val="lt1"/>
-          </a:fontRef>
-        </p:style>
-        <p:txBody>
-          <a:bodyPr rtlCol="0" anchor="ctr" wrap="square" lIns="101600" rIns="76200"/>
-          <a:lstStyle/>
-          <a:p>
-            <a:pPr algn="ctr"/>
-            <a:r>
-              <a:rPr sz="1250" b="1">
-                <a:solidFill>
-                  <a:srgbClr val="102A43"/>
-                </a:solidFill>
-                <a:latin typeface="Calibri"/>
-              </a:rPr>
-              <a:t>Bad actors / nuisance</a:t>
-            </a:r>
-          </a:p>
-        </p:txBody>
-      </p:sp>
-      <p:sp>
-        <p:nvSpPr>
-          <p:cNvPr id="29" name="Rectangle 28"/>
-          <p:cNvSpPr/>
-          <p:nvPr/>
-        </p:nvSpPr>
-        <p:spPr>
-          <a:xfrm>
-            <a:off x="4709160" y="4681728"/>
-            <a:ext cx="3931920" cy="457200"/>
-          </a:xfrm>
-          <a:prstGeom prst="rect">
-            <a:avLst/>
-          </a:prstGeom>
-          <a:solidFill>
-            <a:srgbClr val="FFFFFF"/>
-          </a:solidFill>
-          <a:ln w="6350">
-            <a:solidFill>
-              <a:srgbClr val="D9E2EC"/>
-            </a:solidFill>
-          </a:ln>
-          <a:effectLst/>
-        </p:spPr>
-        <p:style>
-          <a:lnRef idx="1">
-            <a:schemeClr val="accent1"/>
-          </a:lnRef>
-          <a:fillRef idx="3">
-            <a:schemeClr val="accent1"/>
-          </a:fillRef>
-          <a:effectRef idx="2">
-            <a:schemeClr val="accent1"/>
-          </a:effectRef>
-          <a:fontRef idx="minor">
-            <a:schemeClr val="lt1"/>
-          </a:fontRef>
-        </p:style>
-        <p:txBody>
-          <a:bodyPr rtlCol="0" anchor="ctr" wrap="square" lIns="101600" rIns="76200"/>
-          <a:lstStyle/>
-          <a:p>
-            <a:pPr algn="ctr"/>
-            <a:r>
-              <a:rPr sz="1250" b="0">
-                <a:solidFill>
-                  <a:srgbClr val="334E68"/>
-                </a:solidFill>
-                <a:latin typeface="Calibri"/>
-              </a:rPr>
-              <a:t>Grafana (hoje)</a:t>
-            </a:r>
-          </a:p>
-        </p:txBody>
-      </p:sp>
-      <p:sp>
-        <p:nvSpPr>
-          <p:cNvPr id="30" name="Rectangle 29"/>
-          <p:cNvSpPr/>
-          <p:nvPr/>
-        </p:nvSpPr>
-        <p:spPr>
-          <a:xfrm>
-            <a:off x="8641080" y="4681728"/>
-            <a:ext cx="2743200" cy="457200"/>
-          </a:xfrm>
-          <a:prstGeom prst="rect">
-            <a:avLst/>
-          </a:prstGeom>
-          <a:solidFill>
-            <a:srgbClr val="FFFFFF"/>
-          </a:solidFill>
-          <a:ln w="6350">
-            <a:solidFill>
-              <a:srgbClr val="D9E2EC"/>
-            </a:solidFill>
-          </a:ln>
-          <a:effectLst/>
-        </p:spPr>
-        <p:style>
-          <a:lnRef idx="1">
-            <a:schemeClr val="accent1"/>
-          </a:lnRef>
-          <a:fillRef idx="3">
-            <a:schemeClr val="accent1"/>
-          </a:fillRef>
-          <a:effectRef idx="2">
-            <a:schemeClr val="accent1"/>
-          </a:effectRef>
-          <a:fontRef idx="minor">
-            <a:schemeClr val="lt1"/>
-          </a:fontRef>
-        </p:style>
-        <p:txBody>
-          <a:bodyPr rtlCol="0" anchor="ctr" wrap="square" lIns="101600" rIns="76200"/>
-          <a:lstStyle/>
-          <a:p>
-            <a:pPr algn="ctr"/>
-            <a:r>
-              <a:rPr sz="1250" b="0">
-                <a:solidFill>
-                  <a:srgbClr val="334E68"/>
-                </a:solidFill>
-                <a:latin typeface="Calibri"/>
-              </a:rPr>
-              <a:t>Sim — PlantPAx adaptado</a:t>
-            </a:r>
-          </a:p>
-        </p:txBody>
-      </p:sp>
-      <p:sp>
-        <p:nvSpPr>
-          <p:cNvPr id="31" name="Rectangle 30"/>
-          <p:cNvSpPr/>
-          <p:nvPr/>
-        </p:nvSpPr>
-        <p:spPr>
-          <a:xfrm>
-            <a:off x="777240" y="5138928"/>
-            <a:ext cx="3931920" cy="457200"/>
-          </a:xfrm>
-          <a:prstGeom prst="rect">
-            <a:avLst/>
-          </a:prstGeom>
-          <a:solidFill>
-            <a:srgbClr val="169C52"/>
-          </a:solidFill>
-          <a:ln w="6350">
-            <a:solidFill>
-              <a:srgbClr val="D9E2EC"/>
-            </a:solidFill>
-          </a:ln>
-          <a:effectLst/>
-        </p:spPr>
-        <p:style>
-          <a:lnRef idx="1">
-            <a:schemeClr val="accent1"/>
-          </a:lnRef>
-          <a:fillRef idx="3">
-            <a:schemeClr val="accent1"/>
-          </a:fillRef>
-          <a:effectRef idx="2">
-            <a:schemeClr val="accent1"/>
-          </a:effectRef>
-          <a:fontRef idx="minor">
-            <a:schemeClr val="lt1"/>
-          </a:fontRef>
-        </p:style>
-        <p:txBody>
-          <a:bodyPr rtlCol="0" anchor="ctr" wrap="square" lIns="101600" rIns="76200"/>
-          <a:lstStyle/>
-          <a:p>
-            <a:pPr algn="ctr"/>
-            <a:r>
-              <a:rPr sz="1250" b="1">
-                <a:solidFill>
-                  <a:srgbClr val="FFFFFF"/>
-                </a:solidFill>
-                <a:latin typeface="Calibri"/>
-              </a:rPr>
-              <a:t>Benchmarking entre plantas</a:t>
-            </a:r>
-          </a:p>
-        </p:txBody>
-      </p:sp>
-      <p:sp>
-        <p:nvSpPr>
-          <p:cNvPr id="32" name="Rectangle 31"/>
-          <p:cNvSpPr/>
-          <p:nvPr/>
-        </p:nvSpPr>
-        <p:spPr>
-          <a:xfrm>
-            <a:off x="4709160" y="5138928"/>
-            <a:ext cx="3931920" cy="457200"/>
-          </a:xfrm>
-          <a:prstGeom prst="rect">
-            <a:avLst/>
-          </a:prstGeom>
-          <a:solidFill>
-            <a:srgbClr val="169C52"/>
-          </a:solidFill>
-          <a:ln w="6350">
-            <a:solidFill>
-              <a:srgbClr val="D9E2EC"/>
-            </a:solidFill>
-          </a:ln>
-          <a:effectLst/>
-        </p:spPr>
-        <p:style>
-          <a:lnRef idx="1">
-            <a:schemeClr val="accent1"/>
-          </a:lnRef>
-          <a:fillRef idx="3">
-            <a:schemeClr val="accent1"/>
-          </a:fillRef>
-          <a:effectRef idx="2">
-            <a:schemeClr val="accent1"/>
-          </a:effectRef>
-          <a:fontRef idx="minor">
-            <a:schemeClr val="lt1"/>
-          </a:fontRef>
-        </p:style>
-        <p:txBody>
-          <a:bodyPr rtlCol="0" anchor="ctr" wrap="square" lIns="101600" rIns="76200"/>
-          <a:lstStyle/>
-          <a:p>
-            <a:pPr algn="ctr"/>
-            <a:r>
-              <a:rPr sz="1250" b="1">
-                <a:solidFill>
-                  <a:srgbClr val="FFFFFF"/>
-                </a:solidFill>
-                <a:latin typeface="Calibri"/>
-              </a:rPr>
-              <a:t>DataMosaix (multi-site)</a:t>
-            </a:r>
-          </a:p>
-        </p:txBody>
-      </p:sp>
-      <p:sp>
-        <p:nvSpPr>
-          <p:cNvPr id="33" name="Rectangle 32"/>
-          <p:cNvSpPr/>
-          <p:nvPr/>
-        </p:nvSpPr>
-        <p:spPr>
-          <a:xfrm>
-            <a:off x="8641080" y="5138928"/>
-            <a:ext cx="2743200" cy="457200"/>
-          </a:xfrm>
-          <a:prstGeom prst="rect">
-            <a:avLst/>
-          </a:prstGeom>
-          <a:solidFill>
-            <a:srgbClr val="169C52"/>
-          </a:solidFill>
-          <a:ln w="6350">
-            <a:solidFill>
-              <a:srgbClr val="D9E2EC"/>
-            </a:solidFill>
-          </a:ln>
-          <a:effectLst/>
-        </p:spPr>
-        <p:style>
-          <a:lnRef idx="1">
-            <a:schemeClr val="accent1"/>
-          </a:lnRef>
-          <a:fillRef idx="3">
-            <a:schemeClr val="accent1"/>
-          </a:fillRef>
-          <a:effectRef idx="2">
-            <a:schemeClr val="accent1"/>
-          </a:effectRef>
-          <a:fontRef idx="minor">
-            <a:schemeClr val="lt1"/>
-          </a:fontRef>
-        </p:style>
-        <p:txBody>
-          <a:bodyPr rtlCol="0" anchor="ctr" wrap="square" lIns="101600" rIns="76200"/>
-          <a:lstStyle/>
-          <a:p>
-            <a:pPr algn="ctr"/>
-            <a:r>
-              <a:rPr sz="1250" b="1">
-                <a:solidFill>
-                  <a:srgbClr val="FFFFFF"/>
-                </a:solidFill>
-                <a:latin typeface="Calibri"/>
-              </a:rPr>
-              <a:t>Novidade que entra agora</a:t>
-            </a:r>
-          </a:p>
-        </p:txBody>
-      </p:sp>
-      <p:sp>
-        <p:nvSpPr>
-          <p:cNvPr id="34" name="TextBox 33"/>
+              <a:t>1</a:t>
+            </a:r>
+          </a:p>
+        </p:txBody>
+      </p:sp>
+      <p:sp>
+        <p:nvSpPr>
+          <p:cNvPr id="9" name="TextBox 8"/>
           <p:cNvSpPr txBox="1"/>
           <p:nvPr/>
         </p:nvSpPr>
         <p:spPr>
           <a:xfrm>
-            <a:off x="777240" y="6172200"/>
-            <a:ext cx="10607040" cy="365760"/>
+            <a:off x="1783080" y="1920240"/>
+            <a:ext cx="3931920" cy="822960"/>
           </a:xfrm>
           <a:prstGeom prst="rect">
             <a:avLst/>
@@ -10611,20 +11593,638 @@
               </a:spcAft>
             </a:pPr>
             <a:r>
-              <a:rPr sz="1300" b="0" i="1">
-                <a:solidFill>
-                  <a:srgbClr val="627D98"/>
-                </a:solidFill>
-                <a:latin typeface="Calibri"/>
-              </a:rPr>
-              <a:t>Quase tudo já existe no dado atual — falta a camada que agrega e compara: o DataMosaix.</a:t>
-            </a:r>
-          </a:p>
-        </p:txBody>
-      </p:sp>
-      <p:sp>
-        <p:nvSpPr>
-          <p:cNvPr id="35" name="TextBox 34"/>
+              <a:rPr sz="1700" b="1" i="0">
+                <a:solidFill>
+                  <a:srgbClr val="102A43"/>
+                </a:solidFill>
+                <a:latin typeface="Calibri"/>
+              </a:rPr>
+              <a:t>Tela única em tempo real</a:t>
+            </a:r>
+          </a:p>
+        </p:txBody>
+      </p:sp>
+      <p:sp>
+        <p:nvSpPr>
+          <p:cNvPr id="10" name="TextBox 9"/>
+          <p:cNvSpPr txBox="1"/>
+          <p:nvPr/>
+        </p:nvSpPr>
+        <p:spPr>
+          <a:xfrm>
+            <a:off x="1069848" y="2587752"/>
+            <a:ext cx="4672584" cy="1051560"/>
+          </a:xfrm>
+          <a:prstGeom prst="rect">
+            <a:avLst/>
+          </a:prstGeom>
+          <a:noFill/>
+        </p:spPr>
+        <p:txBody>
+          <a:bodyPr wrap="square" anchor="t" lIns="0" rIns="0" tIns="0" bIns="0">
+            <a:spAutoFit/>
+          </a:bodyPr>
+          <a:lstStyle/>
+          <a:p>
+            <a:pPr algn="l">
+              <a:spcBef>
+                <a:spcPts val="0"/>
+              </a:spcBef>
+              <a:spcAft>
+                <a:spcPts val="400"/>
+              </a:spcAft>
+            </a:pPr>
+            <a:r>
+              <a:rPr sz="1250" b="0" i="0">
+                <a:solidFill>
+                  <a:srgbClr val="334E68"/>
+                </a:solidFill>
+                <a:latin typeface="Calibri"/>
+              </a:rPr>
+              <a:t>Indicadores ao vivo por planta, lado a lado: % de malhas em automático, índice de alarmes/operador·hora, blocos em programa, interlocks e variáveis simuladas.</a:t>
+            </a:r>
+          </a:p>
+        </p:txBody>
+      </p:sp>
+      <p:sp>
+        <p:nvSpPr>
+          <p:cNvPr id="11" name="Rounded Rectangle 10"/>
+          <p:cNvSpPr/>
+          <p:nvPr/>
+        </p:nvSpPr>
+        <p:spPr>
+          <a:xfrm>
+            <a:off x="6355080" y="1600200"/>
+            <a:ext cx="5257800" cy="2103120"/>
+          </a:xfrm>
+          <a:prstGeom prst="roundRect">
+            <a:avLst/>
+          </a:prstGeom>
+          <a:solidFill>
+            <a:srgbClr val="FFFFFF"/>
+          </a:solidFill>
+          <a:ln w="12700">
+            <a:solidFill>
+              <a:srgbClr val="D9E2EC"/>
+            </a:solidFill>
+          </a:ln>
+          <a:effectLst/>
+          <a:effectLst>
+            <a:outerShdw blurRad="90000" dist="40000" dir="5400000" rotWithShape="0">
+              <a:srgbClr val="1B2A3A">
+                <a:alpha val="24000"/>
+              </a:srgbClr>
+            </a:outerShdw>
+          </a:effectLst>
+        </p:spPr>
+        <p:style>
+          <a:lnRef idx="1">
+            <a:schemeClr val="accent1"/>
+          </a:lnRef>
+          <a:fillRef idx="3">
+            <a:schemeClr val="accent1"/>
+          </a:fillRef>
+          <a:effectRef idx="2">
+            <a:schemeClr val="accent1"/>
+          </a:effectRef>
+          <a:fontRef idx="minor">
+            <a:schemeClr val="lt1"/>
+          </a:fontRef>
+        </p:style>
+        <p:txBody>
+          <a:bodyPr rtlCol="0" anchor="ctr"/>
+          <a:lstStyle/>
+          <a:p>
+            <a:pPr algn="ctr"/>
+          </a:p>
+        </p:txBody>
+      </p:sp>
+      <p:sp>
+        <p:nvSpPr>
+          <p:cNvPr id="12" name="Rounded Rectangle 11"/>
+          <p:cNvSpPr/>
+          <p:nvPr/>
+        </p:nvSpPr>
+        <p:spPr>
+          <a:xfrm>
+            <a:off x="6629400" y="1874520"/>
+            <a:ext cx="548640" cy="548640"/>
+          </a:xfrm>
+          <a:prstGeom prst="roundRect">
+            <a:avLst>
+              <a:gd name="adj" fmla="val 30000"/>
+            </a:avLst>
+          </a:prstGeom>
+          <a:solidFill>
+            <a:srgbClr val="2563EB"/>
+          </a:solidFill>
+          <a:ln>
+            <a:noFill/>
+          </a:ln>
+          <a:effectLst/>
+        </p:spPr>
+        <p:style>
+          <a:lnRef idx="1">
+            <a:schemeClr val="accent1"/>
+          </a:lnRef>
+          <a:fillRef idx="3">
+            <a:schemeClr val="accent1"/>
+          </a:fillRef>
+          <a:effectRef idx="2">
+            <a:schemeClr val="accent1"/>
+          </a:effectRef>
+          <a:fontRef idx="minor">
+            <a:schemeClr val="lt1"/>
+          </a:fontRef>
+        </p:style>
+        <p:txBody>
+          <a:bodyPr rtlCol="0" anchor="ctr"/>
+          <a:lstStyle/>
+          <a:p>
+            <a:pPr algn="ctr"/>
+            <a:r>
+              <a:rPr b="1" sz="2000">
+                <a:solidFill>
+                  <a:srgbClr val="FFFFFF"/>
+                </a:solidFill>
+                <a:latin typeface="Calibri"/>
+              </a:rPr>
+              <a:t>2</a:t>
+            </a:r>
+          </a:p>
+        </p:txBody>
+      </p:sp>
+      <p:sp>
+        <p:nvSpPr>
+          <p:cNvPr id="13" name="TextBox 12"/>
+          <p:cNvSpPr txBox="1"/>
+          <p:nvPr/>
+        </p:nvSpPr>
+        <p:spPr>
+          <a:xfrm>
+            <a:off x="7360920" y="1920240"/>
+            <a:ext cx="3931920" cy="822960"/>
+          </a:xfrm>
+          <a:prstGeom prst="rect">
+            <a:avLst/>
+          </a:prstGeom>
+          <a:noFill/>
+        </p:spPr>
+        <p:txBody>
+          <a:bodyPr wrap="square" anchor="t" lIns="0" rIns="0" tIns="0" bIns="0">
+            <a:spAutoFit/>
+          </a:bodyPr>
+          <a:lstStyle/>
+          <a:p>
+            <a:pPr algn="l">
+              <a:spcBef>
+                <a:spcPts val="0"/>
+              </a:spcBef>
+              <a:spcAft>
+                <a:spcPts val="400"/>
+              </a:spcAft>
+            </a:pPr>
+            <a:r>
+              <a:rPr sz="1700" b="1" i="0">
+                <a:solidFill>
+                  <a:srgbClr val="102A43"/>
+                </a:solidFill>
+                <a:latin typeface="Calibri"/>
+              </a:rPr>
+              <a:t>Ranking de plantas</a:t>
+            </a:r>
+          </a:p>
+        </p:txBody>
+      </p:sp>
+      <p:sp>
+        <p:nvSpPr>
+          <p:cNvPr id="14" name="TextBox 13"/>
+          <p:cNvSpPr txBox="1"/>
+          <p:nvPr/>
+        </p:nvSpPr>
+        <p:spPr>
+          <a:xfrm>
+            <a:off x="6647688" y="2587752"/>
+            <a:ext cx="4672584" cy="1051560"/>
+          </a:xfrm>
+          <a:prstGeom prst="rect">
+            <a:avLst/>
+          </a:prstGeom>
+          <a:noFill/>
+        </p:spPr>
+        <p:txBody>
+          <a:bodyPr wrap="square" anchor="t" lIns="0" rIns="0" tIns="0" bIns="0">
+            <a:spAutoFit/>
+          </a:bodyPr>
+          <a:lstStyle/>
+          <a:p>
+            <a:pPr algn="l">
+              <a:spcBef>
+                <a:spcPts val="0"/>
+              </a:spcBef>
+              <a:spcAft>
+                <a:spcPts val="400"/>
+              </a:spcAft>
+            </a:pPr>
+            <a:r>
+              <a:rPr sz="1250" b="0" i="0">
+                <a:solidFill>
+                  <a:srgbClr val="334E68"/>
+                </a:solidFill>
+                <a:latin typeface="Calibri"/>
+              </a:rPr>
+              <a:t>Ordena as unidades pelos mesmos indicadores — quem está dentro e fora da ISA-18.2 — destacando boa prática e quem precisa de atenção.</a:t>
+            </a:r>
+          </a:p>
+        </p:txBody>
+      </p:sp>
+      <p:sp>
+        <p:nvSpPr>
+          <p:cNvPr id="15" name="Rounded Rectangle 14"/>
+          <p:cNvSpPr/>
+          <p:nvPr/>
+        </p:nvSpPr>
+        <p:spPr>
+          <a:xfrm>
+            <a:off x="777240" y="4023360"/>
+            <a:ext cx="5257800" cy="2103120"/>
+          </a:xfrm>
+          <a:prstGeom prst="roundRect">
+            <a:avLst/>
+          </a:prstGeom>
+          <a:solidFill>
+            <a:srgbClr val="FFFFFF"/>
+          </a:solidFill>
+          <a:ln w="12700">
+            <a:solidFill>
+              <a:srgbClr val="D9E2EC"/>
+            </a:solidFill>
+          </a:ln>
+          <a:effectLst/>
+          <a:effectLst>
+            <a:outerShdw blurRad="90000" dist="40000" dir="5400000" rotWithShape="0">
+              <a:srgbClr val="1B2A3A">
+                <a:alpha val="24000"/>
+              </a:srgbClr>
+            </a:outerShdw>
+          </a:effectLst>
+        </p:spPr>
+        <p:style>
+          <a:lnRef idx="1">
+            <a:schemeClr val="accent1"/>
+          </a:lnRef>
+          <a:fillRef idx="3">
+            <a:schemeClr val="accent1"/>
+          </a:fillRef>
+          <a:effectRef idx="2">
+            <a:schemeClr val="accent1"/>
+          </a:effectRef>
+          <a:fontRef idx="minor">
+            <a:schemeClr val="lt1"/>
+          </a:fontRef>
+        </p:style>
+        <p:txBody>
+          <a:bodyPr rtlCol="0" anchor="ctr"/>
+          <a:lstStyle/>
+          <a:p>
+            <a:pPr algn="ctr"/>
+          </a:p>
+        </p:txBody>
+      </p:sp>
+      <p:sp>
+        <p:nvSpPr>
+          <p:cNvPr id="16" name="Rounded Rectangle 15"/>
+          <p:cNvSpPr/>
+          <p:nvPr/>
+        </p:nvSpPr>
+        <p:spPr>
+          <a:xfrm>
+            <a:off x="1051560" y="4297680"/>
+            <a:ext cx="548640" cy="548640"/>
+          </a:xfrm>
+          <a:prstGeom prst="roundRect">
+            <a:avLst>
+              <a:gd name="adj" fmla="val 30000"/>
+            </a:avLst>
+          </a:prstGeom>
+          <a:solidFill>
+            <a:srgbClr val="D93A3A"/>
+          </a:solidFill>
+          <a:ln>
+            <a:noFill/>
+          </a:ln>
+          <a:effectLst/>
+        </p:spPr>
+        <p:style>
+          <a:lnRef idx="1">
+            <a:schemeClr val="accent1"/>
+          </a:lnRef>
+          <a:fillRef idx="3">
+            <a:schemeClr val="accent1"/>
+          </a:fillRef>
+          <a:effectRef idx="2">
+            <a:schemeClr val="accent1"/>
+          </a:effectRef>
+          <a:fontRef idx="minor">
+            <a:schemeClr val="lt1"/>
+          </a:fontRef>
+        </p:style>
+        <p:txBody>
+          <a:bodyPr rtlCol="0" anchor="ctr"/>
+          <a:lstStyle/>
+          <a:p>
+            <a:pPr algn="ctr"/>
+            <a:r>
+              <a:rPr b="1" sz="2000">
+                <a:solidFill>
+                  <a:srgbClr val="FFFFFF"/>
+                </a:solidFill>
+                <a:latin typeface="Calibri"/>
+              </a:rPr>
+              <a:t>3</a:t>
+            </a:r>
+          </a:p>
+        </p:txBody>
+      </p:sp>
+      <p:sp>
+        <p:nvSpPr>
+          <p:cNvPr id="17" name="TextBox 16"/>
+          <p:cNvSpPr txBox="1"/>
+          <p:nvPr/>
+        </p:nvSpPr>
+        <p:spPr>
+          <a:xfrm>
+            <a:off x="1783080" y="4343400"/>
+            <a:ext cx="3931920" cy="822960"/>
+          </a:xfrm>
+          <a:prstGeom prst="rect">
+            <a:avLst/>
+          </a:prstGeom>
+          <a:noFill/>
+        </p:spPr>
+        <p:txBody>
+          <a:bodyPr wrap="square" anchor="t" lIns="0" rIns="0" tIns="0" bIns="0">
+            <a:spAutoFit/>
+          </a:bodyPr>
+          <a:lstStyle/>
+          <a:p>
+            <a:pPr algn="l">
+              <a:spcBef>
+                <a:spcPts val="0"/>
+              </a:spcBef>
+              <a:spcAft>
+                <a:spcPts val="400"/>
+              </a:spcAft>
+            </a:pPr>
+            <a:r>
+              <a:rPr sz="1700" b="1" i="0">
+                <a:solidFill>
+                  <a:srgbClr val="102A43"/>
+                </a:solidFill>
+                <a:latin typeface="Calibri"/>
+              </a:rPr>
+              <a:t>Alertas automáticos</a:t>
+            </a:r>
+          </a:p>
+        </p:txBody>
+      </p:sp>
+      <p:sp>
+        <p:nvSpPr>
+          <p:cNvPr id="18" name="TextBox 17"/>
+          <p:cNvSpPr txBox="1"/>
+          <p:nvPr/>
+        </p:nvSpPr>
+        <p:spPr>
+          <a:xfrm>
+            <a:off x="1069848" y="5010912"/>
+            <a:ext cx="4672584" cy="1051560"/>
+          </a:xfrm>
+          <a:prstGeom prst="rect">
+            <a:avLst/>
+          </a:prstGeom>
+          <a:noFill/>
+        </p:spPr>
+        <p:txBody>
+          <a:bodyPr wrap="square" anchor="t" lIns="0" rIns="0" tIns="0" bIns="0">
+            <a:spAutoFit/>
+          </a:bodyPr>
+          <a:lstStyle/>
+          <a:p>
+            <a:pPr algn="l">
+              <a:spcBef>
+                <a:spcPts val="0"/>
+              </a:spcBef>
+              <a:spcAft>
+                <a:spcPts val="400"/>
+              </a:spcAft>
+            </a:pPr>
+            <a:r>
+              <a:rPr sz="1250" b="0" i="0">
+                <a:solidFill>
+                  <a:srgbClr val="334E68"/>
+                </a:solidFill>
+                <a:latin typeface="Calibri"/>
+              </a:rPr>
+              <a:t>Disparo ao cruzar o limite (ex.: 6 alarmes/operador·hora) — notificação por WhatsApp, e-mail ou o canal que o gestor preferir.</a:t>
+            </a:r>
+          </a:p>
+        </p:txBody>
+      </p:sp>
+      <p:sp>
+        <p:nvSpPr>
+          <p:cNvPr id="19" name="Rounded Rectangle 18"/>
+          <p:cNvSpPr/>
+          <p:nvPr/>
+        </p:nvSpPr>
+        <p:spPr>
+          <a:xfrm>
+            <a:off x="6355080" y="4023360"/>
+            <a:ext cx="5257800" cy="2103120"/>
+          </a:xfrm>
+          <a:prstGeom prst="roundRect">
+            <a:avLst/>
+          </a:prstGeom>
+          <a:solidFill>
+            <a:srgbClr val="FFFFFF"/>
+          </a:solidFill>
+          <a:ln w="12700">
+            <a:solidFill>
+              <a:srgbClr val="D9E2EC"/>
+            </a:solidFill>
+          </a:ln>
+          <a:effectLst/>
+          <a:effectLst>
+            <a:outerShdw blurRad="90000" dist="40000" dir="5400000" rotWithShape="0">
+              <a:srgbClr val="1B2A3A">
+                <a:alpha val="24000"/>
+              </a:srgbClr>
+            </a:outerShdw>
+          </a:effectLst>
+        </p:spPr>
+        <p:style>
+          <a:lnRef idx="1">
+            <a:schemeClr val="accent1"/>
+          </a:lnRef>
+          <a:fillRef idx="3">
+            <a:schemeClr val="accent1"/>
+          </a:fillRef>
+          <a:effectRef idx="2">
+            <a:schemeClr val="accent1"/>
+          </a:effectRef>
+          <a:fontRef idx="minor">
+            <a:schemeClr val="lt1"/>
+          </a:fontRef>
+        </p:style>
+        <p:txBody>
+          <a:bodyPr rtlCol="0" anchor="ctr"/>
+          <a:lstStyle/>
+          <a:p>
+            <a:pPr algn="ctr"/>
+          </a:p>
+        </p:txBody>
+      </p:sp>
+      <p:sp>
+        <p:nvSpPr>
+          <p:cNvPr id="20" name="Rounded Rectangle 19"/>
+          <p:cNvSpPr/>
+          <p:nvPr/>
+        </p:nvSpPr>
+        <p:spPr>
+          <a:xfrm>
+            <a:off x="6629400" y="4297680"/>
+            <a:ext cx="548640" cy="548640"/>
+          </a:xfrm>
+          <a:prstGeom prst="roundRect">
+            <a:avLst>
+              <a:gd name="adj" fmla="val 30000"/>
+            </a:avLst>
+          </a:prstGeom>
+          <a:solidFill>
+            <a:srgbClr val="F59E0B"/>
+          </a:solidFill>
+          <a:ln>
+            <a:noFill/>
+          </a:ln>
+          <a:effectLst/>
+        </p:spPr>
+        <p:style>
+          <a:lnRef idx="1">
+            <a:schemeClr val="accent1"/>
+          </a:lnRef>
+          <a:fillRef idx="3">
+            <a:schemeClr val="accent1"/>
+          </a:fillRef>
+          <a:effectRef idx="2">
+            <a:schemeClr val="accent1"/>
+          </a:effectRef>
+          <a:fontRef idx="minor">
+            <a:schemeClr val="lt1"/>
+          </a:fontRef>
+        </p:style>
+        <p:txBody>
+          <a:bodyPr rtlCol="0" anchor="ctr"/>
+          <a:lstStyle/>
+          <a:p>
+            <a:pPr algn="ctr"/>
+            <a:r>
+              <a:rPr b="1" sz="2000">
+                <a:solidFill>
+                  <a:srgbClr val="FFFFFF"/>
+                </a:solidFill>
+                <a:latin typeface="Calibri"/>
+              </a:rPr>
+              <a:t>4</a:t>
+            </a:r>
+          </a:p>
+        </p:txBody>
+      </p:sp>
+      <p:sp>
+        <p:nvSpPr>
+          <p:cNvPr id="21" name="TextBox 20"/>
+          <p:cNvSpPr txBox="1"/>
+          <p:nvPr/>
+        </p:nvSpPr>
+        <p:spPr>
+          <a:xfrm>
+            <a:off x="7360920" y="4343400"/>
+            <a:ext cx="3931920" cy="822960"/>
+          </a:xfrm>
+          <a:prstGeom prst="rect">
+            <a:avLst/>
+          </a:prstGeom>
+          <a:noFill/>
+        </p:spPr>
+        <p:txBody>
+          <a:bodyPr wrap="square" anchor="t" lIns="0" rIns="0" tIns="0" bIns="0">
+            <a:spAutoFit/>
+          </a:bodyPr>
+          <a:lstStyle/>
+          <a:p>
+            <a:pPr algn="l">
+              <a:spcBef>
+                <a:spcPts val="0"/>
+              </a:spcBef>
+              <a:spcAft>
+                <a:spcPts val="400"/>
+              </a:spcAft>
+            </a:pPr>
+            <a:r>
+              <a:rPr sz="1700" b="1" i="0">
+                <a:solidFill>
+                  <a:srgbClr val="102A43"/>
+                </a:solidFill>
+                <a:latin typeface="Calibri"/>
+              </a:rPr>
+              <a:t>Comparativo histórico</a:t>
+            </a:r>
+          </a:p>
+        </p:txBody>
+      </p:sp>
+      <p:sp>
+        <p:nvSpPr>
+          <p:cNvPr id="22" name="TextBox 21"/>
+          <p:cNvSpPr txBox="1"/>
+          <p:nvPr/>
+        </p:nvSpPr>
+        <p:spPr>
+          <a:xfrm>
+            <a:off x="6647688" y="5010912"/>
+            <a:ext cx="4672584" cy="1051560"/>
+          </a:xfrm>
+          <a:prstGeom prst="rect">
+            <a:avLst/>
+          </a:prstGeom>
+          <a:noFill/>
+        </p:spPr>
+        <p:txBody>
+          <a:bodyPr wrap="square" anchor="t" lIns="0" rIns="0" tIns="0" bIns="0">
+            <a:spAutoFit/>
+          </a:bodyPr>
+          <a:lstStyle/>
+          <a:p>
+            <a:pPr algn="l">
+              <a:spcBef>
+                <a:spcPts val="0"/>
+              </a:spcBef>
+              <a:spcAft>
+                <a:spcPts val="400"/>
+              </a:spcAft>
+            </a:pPr>
+            <a:r>
+              <a:rPr sz="1250" b="0" i="0">
+                <a:solidFill>
+                  <a:srgbClr val="334E68"/>
+                </a:solidFill>
+                <a:latin typeface="Calibri"/>
+              </a:rPr>
+              <a:t>Revela divergências por turno e antes/depois de parada, além de outros padrões — insights para operação e manutenção.</a:t>
+            </a:r>
+          </a:p>
+        </p:txBody>
+      </p:sp>
+      <p:sp>
+        <p:nvSpPr>
+          <p:cNvPr id="23" name="TextBox 22"/>
           <p:cNvSpPr txBox="1"/>
           <p:nvPr/>
         </p:nvSpPr>
@@ -10659,1000 +12259,6 @@
                 </a:solidFill>
                 <a:latin typeface="Calibri"/>
               </a:rPr>
-              <a:t>16</a:t>
-            </a:r>
-          </a:p>
-        </p:txBody>
-      </p:sp>
-      <p:sp>
-        <p:nvSpPr>
-          <p:cNvPr id="36" name="TextBox 35"/>
-          <p:cNvSpPr txBox="1"/>
-          <p:nvPr/>
-        </p:nvSpPr>
-        <p:spPr>
-          <a:xfrm>
-            <a:off x="777240" y="6446520"/>
-            <a:ext cx="5486400" cy="274320"/>
-          </a:xfrm>
-          <a:prstGeom prst="rect">
-            <a:avLst/>
-          </a:prstGeom>
-          <a:noFill/>
-        </p:spPr>
-        <p:txBody>
-          <a:bodyPr wrap="square" anchor="t" lIns="0" rIns="0" tIns="0" bIns="0">
-            <a:spAutoFit/>
-          </a:bodyPr>
-          <a:lstStyle/>
-          <a:p>
-            <a:pPr algn="l">
-              <a:spcBef>
-                <a:spcPts val="0"/>
-              </a:spcBef>
-              <a:spcAft>
-                <a:spcPts val="400"/>
-              </a:spcAft>
-            </a:pPr>
-            <a:r>
-              <a:rPr sz="900" b="0" i="0">
-                <a:solidFill>
-                  <a:srgbClr val="627D98"/>
-                </a:solidFill>
-                <a:latin typeface="Calibri"/>
-              </a:rPr>
-              <a:t>Inpasa  ·  Gestão Estratégica de Automação</a:t>
-            </a:r>
-          </a:p>
-        </p:txBody>
-      </p:sp>
-    </p:spTree>
-  </p:cSld>
-  <p:clrMapOvr>
-    <a:masterClrMapping/>
-  </p:clrMapOvr>
-</p:sld>
-</file>
-
-<file path=ppt/slides/slide17.xml><?xml version="1.0" encoding="utf-8"?>
-<p:sld xmlns:a="http://schemas.openxmlformats.org/drawingml/2006/main" xmlns:p="http://schemas.openxmlformats.org/presentationml/2006/main" xmlns:r="http://schemas.openxmlformats.org/officeDocument/2006/relationships">
-  <p:cSld>
-    <p:bg>
-      <p:bgPr>
-        <a:solidFill>
-          <a:srgbClr val="102A43"/>
-        </a:solidFill>
-        <a:effectLst/>
-      </p:bgPr>
-    </p:bg>
-    <p:spTree>
-      <p:nvGrpSpPr>
-        <p:cNvPr id="1" name=""/>
-        <p:cNvGrpSpPr/>
-        <p:nvPr/>
-      </p:nvGrpSpPr>
-      <p:grpSpPr/>
-      <p:sp>
-        <p:nvSpPr>
-          <p:cNvPr id="2" name="Rectangle 1"/>
-          <p:cNvSpPr/>
-          <p:nvPr/>
-        </p:nvSpPr>
-        <p:spPr>
-          <a:xfrm>
-            <a:off x="502920" y="292608"/>
-            <a:ext cx="128016" cy="502920"/>
-          </a:xfrm>
-          <a:prstGeom prst="rect">
-            <a:avLst/>
-          </a:prstGeom>
-          <a:solidFill>
-            <a:srgbClr val="F59E0B"/>
-          </a:solidFill>
-          <a:ln>
-            <a:noFill/>
-          </a:ln>
-          <a:effectLst/>
-        </p:spPr>
-        <p:style>
-          <a:lnRef idx="1">
-            <a:schemeClr val="accent1"/>
-          </a:lnRef>
-          <a:fillRef idx="3">
-            <a:schemeClr val="accent1"/>
-          </a:fillRef>
-          <a:effectRef idx="2">
-            <a:schemeClr val="accent1"/>
-          </a:effectRef>
-          <a:fontRef idx="minor">
-            <a:schemeClr val="lt1"/>
-          </a:fontRef>
-        </p:style>
-        <p:txBody>
-          <a:bodyPr rtlCol="0" anchor="ctr"/>
-          <a:lstStyle/>
-          <a:p>
-            <a:pPr algn="ctr"/>
-          </a:p>
-        </p:txBody>
-      </p:sp>
-      <p:sp>
-        <p:nvSpPr>
-          <p:cNvPr id="3" name="TextBox 2"/>
-          <p:cNvSpPr txBox="1"/>
-          <p:nvPr/>
-        </p:nvSpPr>
-        <p:spPr>
-          <a:xfrm>
-            <a:off x="777240" y="237744"/>
-            <a:ext cx="10607040" cy="274320"/>
-          </a:xfrm>
-          <a:prstGeom prst="rect">
-            <a:avLst/>
-          </a:prstGeom>
-          <a:noFill/>
-        </p:spPr>
-        <p:txBody>
-          <a:bodyPr wrap="square" anchor="t" lIns="0" rIns="0" tIns="0" bIns="0">
-            <a:spAutoFit/>
-          </a:bodyPr>
-          <a:lstStyle/>
-          <a:p>
-            <a:pPr algn="l">
-              <a:spcBef>
-                <a:spcPts val="0"/>
-              </a:spcBef>
-              <a:spcAft>
-                <a:spcPts val="400"/>
-              </a:spcAft>
-            </a:pPr>
-            <a:r>
-              <a:rPr sz="1150" b="1" i="0">
-                <a:solidFill>
-                  <a:srgbClr val="F59E0B"/>
-                </a:solidFill>
-                <a:latin typeface="Calibri"/>
-              </a:rPr>
-              <a:t>O DELTA</a:t>
-            </a:r>
-          </a:p>
-        </p:txBody>
-      </p:sp>
-      <p:sp>
-        <p:nvSpPr>
-          <p:cNvPr id="4" name="TextBox 3"/>
-          <p:cNvSpPr txBox="1"/>
-          <p:nvPr/>
-        </p:nvSpPr>
-        <p:spPr>
-          <a:xfrm>
-            <a:off x="777240" y="457200"/>
-            <a:ext cx="10881360" cy="548640"/>
-          </a:xfrm>
-          <a:prstGeom prst="rect">
-            <a:avLst/>
-          </a:prstGeom>
-          <a:noFill/>
-        </p:spPr>
-        <p:txBody>
-          <a:bodyPr wrap="square" anchor="t" lIns="0" rIns="0" tIns="0" bIns="0">
-            <a:spAutoFit/>
-          </a:bodyPr>
-          <a:lstStyle/>
-          <a:p>
-            <a:pPr algn="l">
-              <a:spcBef>
-                <a:spcPts val="0"/>
-              </a:spcBef>
-              <a:spcAft>
-                <a:spcPts val="400"/>
-              </a:spcAft>
-            </a:pPr>
-            <a:r>
-              <a:rPr sz="2500" b="1" i="0">
-                <a:solidFill>
-                  <a:srgbClr val="FFFFFF"/>
-                </a:solidFill>
-                <a:latin typeface="Calibri"/>
-              </a:rPr>
-              <a:t>O que o DataMosaix adiciona ao que já temos</a:t>
-            </a:r>
-          </a:p>
-        </p:txBody>
-      </p:sp>
-      <p:sp>
-        <p:nvSpPr>
-          <p:cNvPr id="5" name="TextBox 4"/>
-          <p:cNvSpPr txBox="1"/>
-          <p:nvPr/>
-        </p:nvSpPr>
-        <p:spPr>
-          <a:xfrm>
-            <a:off x="777240" y="1325880"/>
-            <a:ext cx="10607040" cy="640080"/>
-          </a:xfrm>
-          <a:prstGeom prst="rect">
-            <a:avLst/>
-          </a:prstGeom>
-          <a:noFill/>
-        </p:spPr>
-        <p:txBody>
-          <a:bodyPr wrap="square" anchor="t" lIns="0" rIns="0" tIns="0" bIns="0">
-            <a:spAutoFit/>
-          </a:bodyPr>
-          <a:lstStyle/>
-          <a:p>
-            <a:pPr algn="l">
-              <a:spcBef>
-                <a:spcPts val="0"/>
-              </a:spcBef>
-              <a:spcAft>
-                <a:spcPts val="400"/>
-              </a:spcAft>
-            </a:pPr>
-            <a:r>
-              <a:rPr sz="1550" b="0" i="0">
-                <a:solidFill>
-                  <a:srgbClr val="C8D6E4"/>
-                </a:solidFill>
-                <a:latin typeface="Calibri"/>
-              </a:rPr>
-              <a:t>Hoje o dado vive dentro de cada PlantPAx. O DataMosaix é a camada que </a:t>
-            </a:r>
-            <a:r>
-              <a:rPr sz="1550" b="1" i="0">
-                <a:solidFill>
-                  <a:srgbClr val="F59E0B"/>
-                </a:solidFill>
-                <a:latin typeface="Calibri"/>
-              </a:rPr>
-              <a:t>agrega, contextualiza e compara</a:t>
-            </a:r>
-            <a:r>
-              <a:rPr sz="1550" b="0" i="0">
-                <a:solidFill>
-                  <a:srgbClr val="C8D6E4"/>
-                </a:solidFill>
-                <a:latin typeface="Calibri"/>
-              </a:rPr>
-              <a:t> — uma visão única de toda a operação.</a:t>
-            </a:r>
-          </a:p>
-        </p:txBody>
-      </p:sp>
-      <p:sp>
-        <p:nvSpPr>
-          <p:cNvPr id="6" name="Rounded Rectangle 5"/>
-          <p:cNvSpPr/>
-          <p:nvPr/>
-        </p:nvSpPr>
-        <p:spPr>
-          <a:xfrm>
-            <a:off x="777240" y="2240280"/>
-            <a:ext cx="2606040" cy="2651760"/>
-          </a:xfrm>
-          <a:prstGeom prst="roundRect">
-            <a:avLst/>
-          </a:prstGeom>
-          <a:solidFill>
-            <a:srgbClr val="17334E"/>
-          </a:solidFill>
-          <a:ln w="15240">
-            <a:solidFill>
-              <a:srgbClr val="F59E0B"/>
-            </a:solidFill>
-          </a:ln>
-          <a:effectLst/>
-        </p:spPr>
-        <p:style>
-          <a:lnRef idx="1">
-            <a:schemeClr val="accent1"/>
-          </a:lnRef>
-          <a:fillRef idx="3">
-            <a:schemeClr val="accent1"/>
-          </a:fillRef>
-          <a:effectRef idx="2">
-            <a:schemeClr val="accent1"/>
-          </a:effectRef>
-          <a:fontRef idx="minor">
-            <a:schemeClr val="lt1"/>
-          </a:fontRef>
-        </p:style>
-        <p:txBody>
-          <a:bodyPr rtlCol="0" anchor="ctr"/>
-          <a:lstStyle/>
-          <a:p>
-            <a:pPr algn="ctr"/>
-          </a:p>
-        </p:txBody>
-      </p:sp>
-      <p:sp>
-        <p:nvSpPr>
-          <p:cNvPr id="7" name="Rounded Rectangle 6"/>
-          <p:cNvSpPr/>
-          <p:nvPr/>
-        </p:nvSpPr>
-        <p:spPr>
-          <a:xfrm>
-            <a:off x="777240" y="2240280"/>
-            <a:ext cx="2606040" cy="91440"/>
-          </a:xfrm>
-          <a:prstGeom prst="roundRect">
-            <a:avLst/>
-          </a:prstGeom>
-          <a:solidFill>
-            <a:srgbClr val="F59E0B"/>
-          </a:solidFill>
-          <a:ln>
-            <a:noFill/>
-          </a:ln>
-          <a:effectLst/>
-        </p:spPr>
-        <p:style>
-          <a:lnRef idx="1">
-            <a:schemeClr val="accent1"/>
-          </a:lnRef>
-          <a:fillRef idx="3">
-            <a:schemeClr val="accent1"/>
-          </a:fillRef>
-          <a:effectRef idx="2">
-            <a:schemeClr val="accent1"/>
-          </a:effectRef>
-          <a:fontRef idx="minor">
-            <a:schemeClr val="lt1"/>
-          </a:fontRef>
-        </p:style>
-        <p:txBody>
-          <a:bodyPr rtlCol="0" anchor="ctr"/>
-          <a:lstStyle/>
-          <a:p>
-            <a:pPr algn="ctr"/>
-          </a:p>
-        </p:txBody>
-      </p:sp>
-      <p:sp>
-        <p:nvSpPr>
-          <p:cNvPr id="8" name="TextBox 7"/>
-          <p:cNvSpPr txBox="1"/>
-          <p:nvPr/>
-        </p:nvSpPr>
-        <p:spPr>
-          <a:xfrm>
-            <a:off x="1005840" y="2587752"/>
-            <a:ext cx="2148840" cy="777240"/>
-          </a:xfrm>
-          <a:prstGeom prst="rect">
-            <a:avLst/>
-          </a:prstGeom>
-          <a:noFill/>
-        </p:spPr>
-        <p:txBody>
-          <a:bodyPr wrap="square" anchor="t" lIns="0" rIns="0" tIns="0" bIns="0">
-            <a:spAutoFit/>
-          </a:bodyPr>
-          <a:lstStyle/>
-          <a:p>
-            <a:pPr algn="l">
-              <a:spcBef>
-                <a:spcPts val="0"/>
-              </a:spcBef>
-              <a:spcAft>
-                <a:spcPts val="400"/>
-              </a:spcAft>
-            </a:pPr>
-            <a:r>
-              <a:rPr sz="1650" b="1" i="0">
-                <a:solidFill>
-                  <a:srgbClr val="FFFFFF"/>
-                </a:solidFill>
-                <a:latin typeface="Calibri"/>
-              </a:rPr>
-              <a:t>Indicadores comparáveis</a:t>
-            </a:r>
-          </a:p>
-        </p:txBody>
-      </p:sp>
-      <p:sp>
-        <p:nvSpPr>
-          <p:cNvPr id="9" name="TextBox 8"/>
-          <p:cNvSpPr txBox="1"/>
-          <p:nvPr/>
-        </p:nvSpPr>
-        <p:spPr>
-          <a:xfrm>
-            <a:off x="1005840" y="3337560"/>
-            <a:ext cx="2148840" cy="1463040"/>
-          </a:xfrm>
-          <a:prstGeom prst="rect">
-            <a:avLst/>
-          </a:prstGeom>
-          <a:noFill/>
-        </p:spPr>
-        <p:txBody>
-          <a:bodyPr wrap="square" anchor="t" lIns="0" rIns="0" tIns="0" bIns="0">
-            <a:spAutoFit/>
-          </a:bodyPr>
-          <a:lstStyle/>
-          <a:p>
-            <a:pPr algn="l">
-              <a:spcBef>
-                <a:spcPts val="0"/>
-              </a:spcBef>
-              <a:spcAft>
-                <a:spcPts val="400"/>
-              </a:spcAft>
-            </a:pPr>
-            <a:r>
-              <a:rPr sz="1250" b="0" i="0">
-                <a:solidFill>
-                  <a:srgbClr val="B9CADB"/>
-                </a:solidFill>
-                <a:latin typeface="Calibri"/>
-              </a:rPr>
-              <a:t>Alarmes/operador·hora, % de malhas em automático, blocos em programa, interlocks e variáveis simuladas — além do OEE — por planta, num só painel.</a:t>
-            </a:r>
-          </a:p>
-        </p:txBody>
-      </p:sp>
-      <p:sp>
-        <p:nvSpPr>
-          <p:cNvPr id="10" name="Rounded Rectangle 9"/>
-          <p:cNvSpPr/>
-          <p:nvPr/>
-        </p:nvSpPr>
-        <p:spPr>
-          <a:xfrm>
-            <a:off x="3566160" y="2240280"/>
-            <a:ext cx="2606040" cy="2651760"/>
-          </a:xfrm>
-          <a:prstGeom prst="roundRect">
-            <a:avLst/>
-          </a:prstGeom>
-          <a:solidFill>
-            <a:srgbClr val="17334E"/>
-          </a:solidFill>
-          <a:ln w="15240">
-            <a:solidFill>
-              <a:srgbClr val="F59E0B"/>
-            </a:solidFill>
-          </a:ln>
-          <a:effectLst/>
-        </p:spPr>
-        <p:style>
-          <a:lnRef idx="1">
-            <a:schemeClr val="accent1"/>
-          </a:lnRef>
-          <a:fillRef idx="3">
-            <a:schemeClr val="accent1"/>
-          </a:fillRef>
-          <a:effectRef idx="2">
-            <a:schemeClr val="accent1"/>
-          </a:effectRef>
-          <a:fontRef idx="minor">
-            <a:schemeClr val="lt1"/>
-          </a:fontRef>
-        </p:style>
-        <p:txBody>
-          <a:bodyPr rtlCol="0" anchor="ctr"/>
-          <a:lstStyle/>
-          <a:p>
-            <a:pPr algn="ctr"/>
-          </a:p>
-        </p:txBody>
-      </p:sp>
-      <p:sp>
-        <p:nvSpPr>
-          <p:cNvPr id="11" name="Rounded Rectangle 10"/>
-          <p:cNvSpPr/>
-          <p:nvPr/>
-        </p:nvSpPr>
-        <p:spPr>
-          <a:xfrm>
-            <a:off x="3566160" y="2240280"/>
-            <a:ext cx="2606040" cy="91440"/>
-          </a:xfrm>
-          <a:prstGeom prst="roundRect">
-            <a:avLst/>
-          </a:prstGeom>
-          <a:solidFill>
-            <a:srgbClr val="F59E0B"/>
-          </a:solidFill>
-          <a:ln>
-            <a:noFill/>
-          </a:ln>
-          <a:effectLst/>
-        </p:spPr>
-        <p:style>
-          <a:lnRef idx="1">
-            <a:schemeClr val="accent1"/>
-          </a:lnRef>
-          <a:fillRef idx="3">
-            <a:schemeClr val="accent1"/>
-          </a:fillRef>
-          <a:effectRef idx="2">
-            <a:schemeClr val="accent1"/>
-          </a:effectRef>
-          <a:fontRef idx="minor">
-            <a:schemeClr val="lt1"/>
-          </a:fontRef>
-        </p:style>
-        <p:txBody>
-          <a:bodyPr rtlCol="0" anchor="ctr"/>
-          <a:lstStyle/>
-          <a:p>
-            <a:pPr algn="ctr"/>
-          </a:p>
-        </p:txBody>
-      </p:sp>
-      <p:sp>
-        <p:nvSpPr>
-          <p:cNvPr id="12" name="TextBox 11"/>
-          <p:cNvSpPr txBox="1"/>
-          <p:nvPr/>
-        </p:nvSpPr>
-        <p:spPr>
-          <a:xfrm>
-            <a:off x="3794760" y="2587752"/>
-            <a:ext cx="2148840" cy="777240"/>
-          </a:xfrm>
-          <a:prstGeom prst="rect">
-            <a:avLst/>
-          </a:prstGeom>
-          <a:noFill/>
-        </p:spPr>
-        <p:txBody>
-          <a:bodyPr wrap="square" anchor="t" lIns="0" rIns="0" tIns="0" bIns="0">
-            <a:spAutoFit/>
-          </a:bodyPr>
-          <a:lstStyle/>
-          <a:p>
-            <a:pPr algn="l">
-              <a:spcBef>
-                <a:spcPts val="0"/>
-              </a:spcBef>
-              <a:spcAft>
-                <a:spcPts val="400"/>
-              </a:spcAft>
-            </a:pPr>
-            <a:r>
-              <a:rPr sz="1650" b="1" i="0">
-                <a:solidFill>
-                  <a:srgbClr val="FFFFFF"/>
-                </a:solidFill>
-                <a:latin typeface="Calibri"/>
-              </a:rPr>
-              <a:t>Planejamento enterprise</a:t>
-            </a:r>
-          </a:p>
-        </p:txBody>
-      </p:sp>
-      <p:sp>
-        <p:nvSpPr>
-          <p:cNvPr id="13" name="TextBox 12"/>
-          <p:cNvSpPr txBox="1"/>
-          <p:nvPr/>
-        </p:nvSpPr>
-        <p:spPr>
-          <a:xfrm>
-            <a:off x="3794760" y="3337560"/>
-            <a:ext cx="2148840" cy="1463040"/>
-          </a:xfrm>
-          <a:prstGeom prst="rect">
-            <a:avLst/>
-          </a:prstGeom>
-          <a:noFill/>
-        </p:spPr>
-        <p:txBody>
-          <a:bodyPr wrap="square" anchor="t" lIns="0" rIns="0" tIns="0" bIns="0">
-            <a:spAutoFit/>
-          </a:bodyPr>
-          <a:lstStyle/>
-          <a:p>
-            <a:pPr algn="l">
-              <a:spcBef>
-                <a:spcPts val="0"/>
-              </a:spcBef>
-              <a:spcAft>
-                <a:spcPts val="400"/>
-              </a:spcAft>
-            </a:pPr>
-            <a:r>
-              <a:rPr sz="1250" b="0" i="0">
-                <a:solidFill>
-                  <a:srgbClr val="B9CADB"/>
-                </a:solidFill>
-                <a:latin typeface="Calibri"/>
-              </a:rPr>
-              <a:t>Decisão de produção, manutenção e ações estratégicas em nível corporativo — visão consolidada da companhia, não por site isolado.</a:t>
-            </a:r>
-          </a:p>
-        </p:txBody>
-      </p:sp>
-      <p:sp>
-        <p:nvSpPr>
-          <p:cNvPr id="14" name="Rounded Rectangle 13"/>
-          <p:cNvSpPr/>
-          <p:nvPr/>
-        </p:nvSpPr>
-        <p:spPr>
-          <a:xfrm>
-            <a:off x="6355080" y="2240280"/>
-            <a:ext cx="2606040" cy="2651760"/>
-          </a:xfrm>
-          <a:prstGeom prst="roundRect">
-            <a:avLst/>
-          </a:prstGeom>
-          <a:solidFill>
-            <a:srgbClr val="17334E"/>
-          </a:solidFill>
-          <a:ln w="15240">
-            <a:solidFill>
-              <a:srgbClr val="F59E0B"/>
-            </a:solidFill>
-          </a:ln>
-          <a:effectLst/>
-        </p:spPr>
-        <p:style>
-          <a:lnRef idx="1">
-            <a:schemeClr val="accent1"/>
-          </a:lnRef>
-          <a:fillRef idx="3">
-            <a:schemeClr val="accent1"/>
-          </a:fillRef>
-          <a:effectRef idx="2">
-            <a:schemeClr val="accent1"/>
-          </a:effectRef>
-          <a:fontRef idx="minor">
-            <a:schemeClr val="lt1"/>
-          </a:fontRef>
-        </p:style>
-        <p:txBody>
-          <a:bodyPr rtlCol="0" anchor="ctr"/>
-          <a:lstStyle/>
-          <a:p>
-            <a:pPr algn="ctr"/>
-          </a:p>
-        </p:txBody>
-      </p:sp>
-      <p:sp>
-        <p:nvSpPr>
-          <p:cNvPr id="15" name="Rounded Rectangle 14"/>
-          <p:cNvSpPr/>
-          <p:nvPr/>
-        </p:nvSpPr>
-        <p:spPr>
-          <a:xfrm>
-            <a:off x="6355080" y="2240280"/>
-            <a:ext cx="2606040" cy="91440"/>
-          </a:xfrm>
-          <a:prstGeom prst="roundRect">
-            <a:avLst/>
-          </a:prstGeom>
-          <a:solidFill>
-            <a:srgbClr val="F59E0B"/>
-          </a:solidFill>
-          <a:ln>
-            <a:noFill/>
-          </a:ln>
-          <a:effectLst/>
-        </p:spPr>
-        <p:style>
-          <a:lnRef idx="1">
-            <a:schemeClr val="accent1"/>
-          </a:lnRef>
-          <a:fillRef idx="3">
-            <a:schemeClr val="accent1"/>
-          </a:fillRef>
-          <a:effectRef idx="2">
-            <a:schemeClr val="accent1"/>
-          </a:effectRef>
-          <a:fontRef idx="minor">
-            <a:schemeClr val="lt1"/>
-          </a:fontRef>
-        </p:style>
-        <p:txBody>
-          <a:bodyPr rtlCol="0" anchor="ctr"/>
-          <a:lstStyle/>
-          <a:p>
-            <a:pPr algn="ctr"/>
-          </a:p>
-        </p:txBody>
-      </p:sp>
-      <p:sp>
-        <p:nvSpPr>
-          <p:cNvPr id="16" name="TextBox 15"/>
-          <p:cNvSpPr txBox="1"/>
-          <p:nvPr/>
-        </p:nvSpPr>
-        <p:spPr>
-          <a:xfrm>
-            <a:off x="6583680" y="2587752"/>
-            <a:ext cx="2148840" cy="777240"/>
-          </a:xfrm>
-          <a:prstGeom prst="rect">
-            <a:avLst/>
-          </a:prstGeom>
-          <a:noFill/>
-        </p:spPr>
-        <p:txBody>
-          <a:bodyPr wrap="square" anchor="t" lIns="0" rIns="0" tIns="0" bIns="0">
-            <a:spAutoFit/>
-          </a:bodyPr>
-          <a:lstStyle/>
-          <a:p>
-            <a:pPr algn="l">
-              <a:spcBef>
-                <a:spcPts val="0"/>
-              </a:spcBef>
-              <a:spcAft>
-                <a:spcPts val="400"/>
-              </a:spcAft>
-            </a:pPr>
-            <a:r>
-              <a:rPr sz="1650" b="1" i="0">
-                <a:solidFill>
-                  <a:srgbClr val="FFFFFF"/>
-                </a:solidFill>
-                <a:latin typeface="Calibri"/>
-              </a:rPr>
-              <a:t>Visão multi-site</a:t>
-            </a:r>
-          </a:p>
-        </p:txBody>
-      </p:sp>
-      <p:sp>
-        <p:nvSpPr>
-          <p:cNvPr id="17" name="TextBox 16"/>
-          <p:cNvSpPr txBox="1"/>
-          <p:nvPr/>
-        </p:nvSpPr>
-        <p:spPr>
-          <a:xfrm>
-            <a:off x="6583680" y="3337560"/>
-            <a:ext cx="2148840" cy="1463040"/>
-          </a:xfrm>
-          <a:prstGeom prst="rect">
-            <a:avLst/>
-          </a:prstGeom>
-          <a:noFill/>
-        </p:spPr>
-        <p:txBody>
-          <a:bodyPr wrap="square" anchor="t" lIns="0" rIns="0" tIns="0" bIns="0">
-            <a:spAutoFit/>
-          </a:bodyPr>
-          <a:lstStyle/>
-          <a:p>
-            <a:pPr algn="l">
-              <a:spcBef>
-                <a:spcPts val="0"/>
-              </a:spcBef>
-              <a:spcAft>
-                <a:spcPts val="400"/>
-              </a:spcAft>
-            </a:pPr>
-            <a:r>
-              <a:rPr sz="1250" b="0" i="0">
-                <a:solidFill>
-                  <a:srgbClr val="B9CADB"/>
-                </a:solidFill>
-                <a:latin typeface="Calibri"/>
-              </a:rPr>
-              <a:t>Sinop, Nova Mutum, Dourados, Balsas, Sidrolândia e novas plantas, lado a lado, na mesma régua.</a:t>
-            </a:r>
-          </a:p>
-        </p:txBody>
-      </p:sp>
-      <p:sp>
-        <p:nvSpPr>
-          <p:cNvPr id="18" name="Rounded Rectangle 17"/>
-          <p:cNvSpPr/>
-          <p:nvPr/>
-        </p:nvSpPr>
-        <p:spPr>
-          <a:xfrm>
-            <a:off x="9144000" y="2240280"/>
-            <a:ext cx="2606040" cy="2651760"/>
-          </a:xfrm>
-          <a:prstGeom prst="roundRect">
-            <a:avLst/>
-          </a:prstGeom>
-          <a:solidFill>
-            <a:srgbClr val="17334E"/>
-          </a:solidFill>
-          <a:ln w="15240">
-            <a:solidFill>
-              <a:srgbClr val="F59E0B"/>
-            </a:solidFill>
-          </a:ln>
-          <a:effectLst/>
-        </p:spPr>
-        <p:style>
-          <a:lnRef idx="1">
-            <a:schemeClr val="accent1"/>
-          </a:lnRef>
-          <a:fillRef idx="3">
-            <a:schemeClr val="accent1"/>
-          </a:fillRef>
-          <a:effectRef idx="2">
-            <a:schemeClr val="accent1"/>
-          </a:effectRef>
-          <a:fontRef idx="minor">
-            <a:schemeClr val="lt1"/>
-          </a:fontRef>
-        </p:style>
-        <p:txBody>
-          <a:bodyPr rtlCol="0" anchor="ctr"/>
-          <a:lstStyle/>
-          <a:p>
-            <a:pPr algn="ctr"/>
-          </a:p>
-        </p:txBody>
-      </p:sp>
-      <p:sp>
-        <p:nvSpPr>
-          <p:cNvPr id="19" name="Rounded Rectangle 18"/>
-          <p:cNvSpPr/>
-          <p:nvPr/>
-        </p:nvSpPr>
-        <p:spPr>
-          <a:xfrm>
-            <a:off x="9144000" y="2240280"/>
-            <a:ext cx="2606040" cy="91440"/>
-          </a:xfrm>
-          <a:prstGeom prst="roundRect">
-            <a:avLst/>
-          </a:prstGeom>
-          <a:solidFill>
-            <a:srgbClr val="F59E0B"/>
-          </a:solidFill>
-          <a:ln>
-            <a:noFill/>
-          </a:ln>
-          <a:effectLst/>
-        </p:spPr>
-        <p:style>
-          <a:lnRef idx="1">
-            <a:schemeClr val="accent1"/>
-          </a:lnRef>
-          <a:fillRef idx="3">
-            <a:schemeClr val="accent1"/>
-          </a:fillRef>
-          <a:effectRef idx="2">
-            <a:schemeClr val="accent1"/>
-          </a:effectRef>
-          <a:fontRef idx="minor">
-            <a:schemeClr val="lt1"/>
-          </a:fontRef>
-        </p:style>
-        <p:txBody>
-          <a:bodyPr rtlCol="0" anchor="ctr"/>
-          <a:lstStyle/>
-          <a:p>
-            <a:pPr algn="ctr"/>
-          </a:p>
-        </p:txBody>
-      </p:sp>
-      <p:sp>
-        <p:nvSpPr>
-          <p:cNvPr id="20" name="TextBox 19"/>
-          <p:cNvSpPr txBox="1"/>
-          <p:nvPr/>
-        </p:nvSpPr>
-        <p:spPr>
-          <a:xfrm>
-            <a:off x="9372600" y="2587752"/>
-            <a:ext cx="2148840" cy="777240"/>
-          </a:xfrm>
-          <a:prstGeom prst="rect">
-            <a:avLst/>
-          </a:prstGeom>
-          <a:noFill/>
-        </p:spPr>
-        <p:txBody>
-          <a:bodyPr wrap="square" anchor="t" lIns="0" rIns="0" tIns="0" bIns="0">
-            <a:spAutoFit/>
-          </a:bodyPr>
-          <a:lstStyle/>
-          <a:p>
-            <a:pPr algn="l">
-              <a:spcBef>
-                <a:spcPts val="0"/>
-              </a:spcBef>
-              <a:spcAft>
-                <a:spcPts val="400"/>
-              </a:spcAft>
-            </a:pPr>
-            <a:r>
-              <a:rPr sz="1650" b="1" i="0">
-                <a:solidFill>
-                  <a:srgbClr val="FFFFFF"/>
-                </a:solidFill>
-                <a:latin typeface="Calibri"/>
-              </a:rPr>
-              <a:t>Contexto OT + IT + ET</a:t>
-            </a:r>
-          </a:p>
-        </p:txBody>
-      </p:sp>
-      <p:sp>
-        <p:nvSpPr>
-          <p:cNvPr id="21" name="TextBox 20"/>
-          <p:cNvSpPr txBox="1"/>
-          <p:nvPr/>
-        </p:nvSpPr>
-        <p:spPr>
-          <a:xfrm>
-            <a:off x="9372600" y="3337560"/>
-            <a:ext cx="2148840" cy="1463040"/>
-          </a:xfrm>
-          <a:prstGeom prst="rect">
-            <a:avLst/>
-          </a:prstGeom>
-          <a:noFill/>
-        </p:spPr>
-        <p:txBody>
-          <a:bodyPr wrap="square" anchor="t" lIns="0" rIns="0" tIns="0" bIns="0">
-            <a:spAutoFit/>
-          </a:bodyPr>
-          <a:lstStyle/>
-          <a:p>
-            <a:pPr algn="l">
-              <a:spcBef>
-                <a:spcPts val="0"/>
-              </a:spcBef>
-              <a:spcAft>
-                <a:spcPts val="400"/>
-              </a:spcAft>
-            </a:pPr>
-            <a:r>
-              <a:rPr sz="1250" b="0" i="0">
-                <a:solidFill>
-                  <a:srgbClr val="B9CADB"/>
-                </a:solidFill>
-                <a:latin typeface="Calibri"/>
-              </a:rPr>
-              <a:t>Une OT (processo / chão de fábrica), IT (sistemas corporativos / ERP) e ET (engenharia / ativos) num só contexto pronto para a IA.</a:t>
-            </a:r>
-          </a:p>
-        </p:txBody>
-      </p:sp>
-      <p:sp>
-        <p:nvSpPr>
-          <p:cNvPr id="22" name="TextBox 21"/>
-          <p:cNvSpPr txBox="1"/>
-          <p:nvPr/>
-        </p:nvSpPr>
-        <p:spPr>
-          <a:xfrm>
-            <a:off x="11338560" y="6446520"/>
-            <a:ext cx="731520" cy="274320"/>
-          </a:xfrm>
-          <a:prstGeom prst="rect">
-            <a:avLst/>
-          </a:prstGeom>
-          <a:noFill/>
-        </p:spPr>
-        <p:txBody>
-          <a:bodyPr wrap="square" anchor="t" lIns="0" rIns="0" tIns="0" bIns="0">
-            <a:spAutoFit/>
-          </a:bodyPr>
-          <a:lstStyle/>
-          <a:p>
-            <a:pPr algn="r">
-              <a:spcBef>
-                <a:spcPts val="0"/>
-              </a:spcBef>
-              <a:spcAft>
-                <a:spcPts val="400"/>
-              </a:spcAft>
-            </a:pPr>
-            <a:r>
-              <a:rPr sz="1000" b="0" i="0">
-                <a:solidFill>
-                  <a:srgbClr val="627D98"/>
-                </a:solidFill>
-                <a:latin typeface="Calibri"/>
-              </a:rPr>
               <a:t>17</a:t>
             </a:r>
           </a:p>
@@ -11660,7 +12266,7 @@
       </p:sp>
       <p:sp>
         <p:nvSpPr>
-          <p:cNvPr id="23" name="TextBox 22"/>
+          <p:cNvPr id="24" name="TextBox 23"/>
           <p:cNvSpPr txBox="1"/>
           <p:nvPr/>
         </p:nvSpPr>
@@ -11895,7 +12501,7 @@
                 </a:solidFill>
                 <a:latin typeface="Calibri"/>
               </a:rPr>
-              <a:t>APLICAÇÃO DIRETA</a:t>
+              <a:t>MODERNIZAÇÃO · PLATAFORMA</a:t>
             </a:r>
           </a:p>
         </p:txBody>
@@ -11937,21 +12543,63 @@
                 </a:solidFill>
                 <a:latin typeface="Calibri"/>
               </a:rPr>
-              <a:t>Como isso aparece no COI da Inpasa</a:t>
-            </a:r>
-          </a:p>
-        </p:txBody>
-      </p:sp>
-      <p:sp>
-        <p:nvSpPr>
-          <p:cNvPr id="7" name="Rounded Rectangle 6"/>
+              <a:t>Evolução do PlantPAx — do adaptado ao PlantPAx 2026</a:t>
+            </a:r>
+          </a:p>
+        </p:txBody>
+      </p:sp>
+      <p:sp>
+        <p:nvSpPr>
+          <p:cNvPr id="7" name="TextBox 6"/>
+          <p:cNvSpPr txBox="1"/>
+          <p:nvPr/>
+        </p:nvSpPr>
+        <p:spPr>
+          <a:xfrm>
+            <a:off x="777240" y="1298448"/>
+            <a:ext cx="10607040" cy="411480"/>
+          </a:xfrm>
+          <a:prstGeom prst="rect">
+            <a:avLst/>
+          </a:prstGeom>
+          <a:noFill/>
+        </p:spPr>
+        <p:txBody>
+          <a:bodyPr wrap="square" anchor="t" lIns="0" rIns="0" tIns="0" bIns="0">
+            <a:spAutoFit/>
+          </a:bodyPr>
+          <a:lstStyle/>
+          <a:p>
+            <a:pPr algn="l">
+              <a:spcBef>
+                <a:spcPts val="0"/>
+              </a:spcBef>
+              <a:spcAft>
+                <a:spcPts val="400"/>
+              </a:spcAft>
+            </a:pPr>
+            <a:r>
+              <a:rPr sz="1400" b="0" i="0">
+                <a:solidFill>
+                  <a:srgbClr val="334E68"/>
+                </a:solidFill>
+                <a:latin typeface="Calibri"/>
+              </a:rPr>
+              <a:t>Hoje já há IA que converte plantas com PlantPAx desatualizado para a versão atual; e o padrão ISA-101 (telas em cinza, cor só no que exige atenção) otimiza a operação.</a:t>
+            </a:r>
+          </a:p>
+        </p:txBody>
+      </p:sp>
+      <p:sp>
+        <p:nvSpPr>
+          <p:cNvPr id="8" name="Rounded Rectangle 7"/>
           <p:cNvSpPr/>
           <p:nvPr/>
         </p:nvSpPr>
         <p:spPr>
           <a:xfrm>
-            <a:off x="777240" y="1600200"/>
-            <a:ext cx="5257800" cy="2103120"/>
+            <a:off x="2432304" y="1709928"/>
+            <a:ext cx="7333488" cy="4169663"/>
           </a:xfrm>
           <a:prstGeom prst="roundRect">
             <a:avLst/>
@@ -11995,71 +12643,40 @@
           </a:p>
         </p:txBody>
       </p:sp>
-      <p:sp>
-        <p:nvSpPr>
-          <p:cNvPr id="8" name="Rounded Rectangle 7"/>
-          <p:cNvSpPr/>
-          <p:nvPr/>
-        </p:nvSpPr>
-        <p:spPr>
-          <a:xfrm>
-            <a:off x="1051560" y="1874520"/>
-            <a:ext cx="548640" cy="548640"/>
-          </a:xfrm>
-          <a:prstGeom prst="roundRect">
-            <a:avLst>
-              <a:gd name="adj" fmla="val 30000"/>
-            </a:avLst>
-          </a:prstGeom>
-          <a:solidFill>
-            <a:srgbClr val="169C52"/>
-          </a:solidFill>
-          <a:ln>
-            <a:noFill/>
-          </a:ln>
-          <a:effectLst/>
-        </p:spPr>
-        <p:style>
-          <a:lnRef idx="1">
-            <a:schemeClr val="accent1"/>
-          </a:lnRef>
-          <a:fillRef idx="3">
-            <a:schemeClr val="accent1"/>
-          </a:fillRef>
-          <a:effectRef idx="2">
-            <a:schemeClr val="accent1"/>
-          </a:effectRef>
-          <a:fontRef idx="minor">
-            <a:schemeClr val="lt1"/>
-          </a:fontRef>
-        </p:style>
-        <p:txBody>
-          <a:bodyPr rtlCol="0" anchor="ctr"/>
-          <a:lstStyle/>
-          <a:p>
-            <a:pPr algn="ctr"/>
-            <a:r>
-              <a:rPr b="1" sz="2000">
-                <a:solidFill>
-                  <a:srgbClr val="FFFFFF"/>
-                </a:solidFill>
-                <a:latin typeface="Calibri"/>
-              </a:rPr>
-              <a:t>1</a:t>
-            </a:r>
-          </a:p>
-        </p:txBody>
-      </p:sp>
-      <p:sp>
-        <p:nvSpPr>
-          <p:cNvPr id="9" name="TextBox 8"/>
+      <p:pic>
+        <p:nvPicPr>
+          <p:cNvPr id="9" name="Picture 8" descr="plantpax_direction.png"/>
+          <p:cNvPicPr>
+            <a:picLocks noChangeAspect="1"/>
+          </p:cNvPicPr>
+          <p:nvPr/>
+        </p:nvPicPr>
+        <p:blipFill>
+          <a:blip r:embed="rId2"/>
+          <a:stretch>
+            <a:fillRect/>
+          </a:stretch>
+        </p:blipFill>
+        <p:spPr>
+          <a:xfrm>
+            <a:off x="2523744" y="1783080"/>
+            <a:ext cx="7150608" cy="4023360"/>
+          </a:xfrm>
+          <a:prstGeom prst="rect">
+            <a:avLst/>
+          </a:prstGeom>
+        </p:spPr>
+      </p:pic>
+      <p:sp>
+        <p:nvSpPr>
+          <p:cNvPr id="10" name="TextBox 9"/>
           <p:cNvSpPr txBox="1"/>
           <p:nvPr/>
         </p:nvSpPr>
         <p:spPr>
           <a:xfrm>
-            <a:off x="1783080" y="1920240"/>
-            <a:ext cx="3931920" cy="822960"/>
+            <a:off x="777240" y="5989320"/>
+            <a:ext cx="10607040" cy="457200"/>
           </a:xfrm>
           <a:prstGeom prst="rect">
             <a:avLst/>
@@ -12072,7 +12689,7 @@
           </a:bodyPr>
           <a:lstStyle/>
           <a:p>
-            <a:pPr algn="l">
+            <a:pPr algn="ctr">
               <a:spcBef>
                 <a:spcPts val="0"/>
               </a:spcBef>
@@ -12081,638 +12698,20 @@
               </a:spcAft>
             </a:pPr>
             <a:r>
-              <a:rPr sz="1700" b="1" i="0">
-                <a:solidFill>
-                  <a:srgbClr val="102A43"/>
-                </a:solidFill>
-                <a:latin typeface="Calibri"/>
-              </a:rPr>
-              <a:t>Tela única em tempo real</a:t>
-            </a:r>
-          </a:p>
-        </p:txBody>
-      </p:sp>
-      <p:sp>
-        <p:nvSpPr>
-          <p:cNvPr id="10" name="TextBox 9"/>
-          <p:cNvSpPr txBox="1"/>
-          <p:nvPr/>
-        </p:nvSpPr>
-        <p:spPr>
-          <a:xfrm>
-            <a:off x="1069848" y="2587752"/>
-            <a:ext cx="4672584" cy="1051560"/>
-          </a:xfrm>
-          <a:prstGeom prst="rect">
-            <a:avLst/>
-          </a:prstGeom>
-          <a:noFill/>
-        </p:spPr>
-        <p:txBody>
-          <a:bodyPr wrap="square" anchor="t" lIns="0" rIns="0" tIns="0" bIns="0">
-            <a:spAutoFit/>
-          </a:bodyPr>
-          <a:lstStyle/>
-          <a:p>
-            <a:pPr algn="l">
-              <a:spcBef>
-                <a:spcPts val="0"/>
-              </a:spcBef>
-              <a:spcAft>
-                <a:spcPts val="400"/>
-              </a:spcAft>
-            </a:pPr>
-            <a:r>
               <a:rPr sz="1250" b="0" i="0">
                 <a:solidFill>
-                  <a:srgbClr val="334E68"/>
-                </a:solidFill>
-                <a:latin typeface="Calibri"/>
-              </a:rPr>
-              <a:t>Indicadores ao vivo por planta, lado a lado: % de malhas em automático, índice de alarmes/operador·hora, blocos em programa, interlocks e variáveis simuladas.</a:t>
-            </a:r>
-          </a:p>
-        </p:txBody>
-      </p:sp>
-      <p:sp>
-        <p:nvSpPr>
-          <p:cNvPr id="11" name="Rounded Rectangle 10"/>
-          <p:cNvSpPr/>
-          <p:nvPr/>
-        </p:nvSpPr>
-        <p:spPr>
-          <a:xfrm>
-            <a:off x="6355080" y="1600200"/>
-            <a:ext cx="5257800" cy="2103120"/>
-          </a:xfrm>
-          <a:prstGeom prst="roundRect">
-            <a:avLst/>
-          </a:prstGeom>
-          <a:solidFill>
-            <a:srgbClr val="FFFFFF"/>
-          </a:solidFill>
-          <a:ln w="12700">
-            <a:solidFill>
-              <a:srgbClr val="D9E2EC"/>
-            </a:solidFill>
-          </a:ln>
-          <a:effectLst/>
-          <a:effectLst>
-            <a:outerShdw blurRad="90000" dist="40000" dir="5400000" rotWithShape="0">
-              <a:srgbClr val="1B2A3A">
-                <a:alpha val="24000"/>
-              </a:srgbClr>
-            </a:outerShdw>
-          </a:effectLst>
-        </p:spPr>
-        <p:style>
-          <a:lnRef idx="1">
-            <a:schemeClr val="accent1"/>
-          </a:lnRef>
-          <a:fillRef idx="3">
-            <a:schemeClr val="accent1"/>
-          </a:fillRef>
-          <a:effectRef idx="2">
-            <a:schemeClr val="accent1"/>
-          </a:effectRef>
-          <a:fontRef idx="minor">
-            <a:schemeClr val="lt1"/>
-          </a:fontRef>
-        </p:style>
-        <p:txBody>
-          <a:bodyPr rtlCol="0" anchor="ctr"/>
-          <a:lstStyle/>
-          <a:p>
-            <a:pPr algn="ctr"/>
-          </a:p>
-        </p:txBody>
-      </p:sp>
-      <p:sp>
-        <p:nvSpPr>
-          <p:cNvPr id="12" name="Rounded Rectangle 11"/>
-          <p:cNvSpPr/>
-          <p:nvPr/>
-        </p:nvSpPr>
-        <p:spPr>
-          <a:xfrm>
-            <a:off x="6629400" y="1874520"/>
-            <a:ext cx="548640" cy="548640"/>
-          </a:xfrm>
-          <a:prstGeom prst="roundRect">
-            <a:avLst>
-              <a:gd name="adj" fmla="val 30000"/>
-            </a:avLst>
-          </a:prstGeom>
-          <a:solidFill>
-            <a:srgbClr val="2563EB"/>
-          </a:solidFill>
-          <a:ln>
-            <a:noFill/>
-          </a:ln>
-          <a:effectLst/>
-        </p:spPr>
-        <p:style>
-          <a:lnRef idx="1">
-            <a:schemeClr val="accent1"/>
-          </a:lnRef>
-          <a:fillRef idx="3">
-            <a:schemeClr val="accent1"/>
-          </a:fillRef>
-          <a:effectRef idx="2">
-            <a:schemeClr val="accent1"/>
-          </a:effectRef>
-          <a:fontRef idx="minor">
-            <a:schemeClr val="lt1"/>
-          </a:fontRef>
-        </p:style>
-        <p:txBody>
-          <a:bodyPr rtlCol="0" anchor="ctr"/>
-          <a:lstStyle/>
-          <a:p>
-            <a:pPr algn="ctr"/>
-            <a:r>
-              <a:rPr b="1" sz="2000">
-                <a:solidFill>
-                  <a:srgbClr val="FFFFFF"/>
-                </a:solidFill>
-                <a:latin typeface="Calibri"/>
-              </a:rPr>
-              <a:t>2</a:t>
-            </a:r>
-          </a:p>
-        </p:txBody>
-      </p:sp>
-      <p:sp>
-        <p:nvSpPr>
-          <p:cNvPr id="13" name="TextBox 12"/>
-          <p:cNvSpPr txBox="1"/>
-          <p:nvPr/>
-        </p:nvSpPr>
-        <p:spPr>
-          <a:xfrm>
-            <a:off x="7360920" y="1920240"/>
-            <a:ext cx="3931920" cy="822960"/>
-          </a:xfrm>
-          <a:prstGeom prst="rect">
-            <a:avLst/>
-          </a:prstGeom>
-          <a:noFill/>
-        </p:spPr>
-        <p:txBody>
-          <a:bodyPr wrap="square" anchor="t" lIns="0" rIns="0" tIns="0" bIns="0">
-            <a:spAutoFit/>
-          </a:bodyPr>
-          <a:lstStyle/>
-          <a:p>
-            <a:pPr algn="l">
-              <a:spcBef>
-                <a:spcPts val="0"/>
-              </a:spcBef>
-              <a:spcAft>
-                <a:spcPts val="400"/>
-              </a:spcAft>
-            </a:pPr>
-            <a:r>
-              <a:rPr sz="1700" b="1" i="0">
-                <a:solidFill>
-                  <a:srgbClr val="102A43"/>
-                </a:solidFill>
-                <a:latin typeface="Calibri"/>
-              </a:rPr>
-              <a:t>Ranking de plantas</a:t>
-            </a:r>
-          </a:p>
-        </p:txBody>
-      </p:sp>
-      <p:sp>
-        <p:nvSpPr>
-          <p:cNvPr id="14" name="TextBox 13"/>
-          <p:cNvSpPr txBox="1"/>
-          <p:nvPr/>
-        </p:nvSpPr>
-        <p:spPr>
-          <a:xfrm>
-            <a:off x="6647688" y="2587752"/>
-            <a:ext cx="4672584" cy="1051560"/>
-          </a:xfrm>
-          <a:prstGeom prst="rect">
-            <a:avLst/>
-          </a:prstGeom>
-          <a:noFill/>
-        </p:spPr>
-        <p:txBody>
-          <a:bodyPr wrap="square" anchor="t" lIns="0" rIns="0" tIns="0" bIns="0">
-            <a:spAutoFit/>
-          </a:bodyPr>
-          <a:lstStyle/>
-          <a:p>
-            <a:pPr algn="l">
-              <a:spcBef>
-                <a:spcPts val="0"/>
-              </a:spcBef>
-              <a:spcAft>
-                <a:spcPts val="400"/>
-              </a:spcAft>
-            </a:pPr>
-            <a:r>
-              <a:rPr sz="1250" b="0" i="0">
-                <a:solidFill>
-                  <a:srgbClr val="334E68"/>
-                </a:solidFill>
-                <a:latin typeface="Calibri"/>
-              </a:rPr>
-              <a:t>Ordena as unidades pelos mesmos indicadores — quem está dentro e fora da ISA-18.2 — destacando boa prática e quem precisa de atenção.</a:t>
-            </a:r>
-          </a:p>
-        </p:txBody>
-      </p:sp>
-      <p:sp>
-        <p:nvSpPr>
-          <p:cNvPr id="15" name="Rounded Rectangle 14"/>
-          <p:cNvSpPr/>
-          <p:nvPr/>
-        </p:nvSpPr>
-        <p:spPr>
-          <a:xfrm>
-            <a:off x="777240" y="4023360"/>
-            <a:ext cx="5257800" cy="2103120"/>
-          </a:xfrm>
-          <a:prstGeom prst="roundRect">
-            <a:avLst/>
-          </a:prstGeom>
-          <a:solidFill>
-            <a:srgbClr val="FFFFFF"/>
-          </a:solidFill>
-          <a:ln w="12700">
-            <a:solidFill>
-              <a:srgbClr val="D9E2EC"/>
-            </a:solidFill>
-          </a:ln>
-          <a:effectLst/>
-          <a:effectLst>
-            <a:outerShdw blurRad="90000" dist="40000" dir="5400000" rotWithShape="0">
-              <a:srgbClr val="1B2A3A">
-                <a:alpha val="24000"/>
-              </a:srgbClr>
-            </a:outerShdw>
-          </a:effectLst>
-        </p:spPr>
-        <p:style>
-          <a:lnRef idx="1">
-            <a:schemeClr val="accent1"/>
-          </a:lnRef>
-          <a:fillRef idx="3">
-            <a:schemeClr val="accent1"/>
-          </a:fillRef>
-          <a:effectRef idx="2">
-            <a:schemeClr val="accent1"/>
-          </a:effectRef>
-          <a:fontRef idx="minor">
-            <a:schemeClr val="lt1"/>
-          </a:fontRef>
-        </p:style>
-        <p:txBody>
-          <a:bodyPr rtlCol="0" anchor="ctr"/>
-          <a:lstStyle/>
-          <a:p>
-            <a:pPr algn="ctr"/>
-          </a:p>
-        </p:txBody>
-      </p:sp>
-      <p:sp>
-        <p:nvSpPr>
-          <p:cNvPr id="16" name="Rounded Rectangle 15"/>
-          <p:cNvSpPr/>
-          <p:nvPr/>
-        </p:nvSpPr>
-        <p:spPr>
-          <a:xfrm>
-            <a:off x="1051560" y="4297680"/>
-            <a:ext cx="548640" cy="548640"/>
-          </a:xfrm>
-          <a:prstGeom prst="roundRect">
-            <a:avLst>
-              <a:gd name="adj" fmla="val 30000"/>
-            </a:avLst>
-          </a:prstGeom>
-          <a:solidFill>
-            <a:srgbClr val="D93A3A"/>
-          </a:solidFill>
-          <a:ln>
-            <a:noFill/>
-          </a:ln>
-          <a:effectLst/>
-        </p:spPr>
-        <p:style>
-          <a:lnRef idx="1">
-            <a:schemeClr val="accent1"/>
-          </a:lnRef>
-          <a:fillRef idx="3">
-            <a:schemeClr val="accent1"/>
-          </a:fillRef>
-          <a:effectRef idx="2">
-            <a:schemeClr val="accent1"/>
-          </a:effectRef>
-          <a:fontRef idx="minor">
-            <a:schemeClr val="lt1"/>
-          </a:fontRef>
-        </p:style>
-        <p:txBody>
-          <a:bodyPr rtlCol="0" anchor="ctr"/>
-          <a:lstStyle/>
-          <a:p>
-            <a:pPr algn="ctr"/>
-            <a:r>
-              <a:rPr b="1" sz="2000">
-                <a:solidFill>
-                  <a:srgbClr val="FFFFFF"/>
-                </a:solidFill>
-                <a:latin typeface="Calibri"/>
-              </a:rPr>
-              <a:t>3</a:t>
-            </a:r>
-          </a:p>
-        </p:txBody>
-      </p:sp>
-      <p:sp>
-        <p:nvSpPr>
-          <p:cNvPr id="17" name="TextBox 16"/>
-          <p:cNvSpPr txBox="1"/>
-          <p:nvPr/>
-        </p:nvSpPr>
-        <p:spPr>
-          <a:xfrm>
-            <a:off x="1783080" y="4343400"/>
-            <a:ext cx="3931920" cy="822960"/>
-          </a:xfrm>
-          <a:prstGeom prst="rect">
-            <a:avLst/>
-          </a:prstGeom>
-          <a:noFill/>
-        </p:spPr>
-        <p:txBody>
-          <a:bodyPr wrap="square" anchor="t" lIns="0" rIns="0" tIns="0" bIns="0">
-            <a:spAutoFit/>
-          </a:bodyPr>
-          <a:lstStyle/>
-          <a:p>
-            <a:pPr algn="l">
-              <a:spcBef>
-                <a:spcPts val="0"/>
-              </a:spcBef>
-              <a:spcAft>
-                <a:spcPts val="400"/>
-              </a:spcAft>
-            </a:pPr>
-            <a:r>
-              <a:rPr sz="1700" b="1" i="0">
-                <a:solidFill>
-                  <a:srgbClr val="102A43"/>
-                </a:solidFill>
-                <a:latin typeface="Calibri"/>
-              </a:rPr>
-              <a:t>Alertas automáticos</a:t>
-            </a:r>
-          </a:p>
-        </p:txBody>
-      </p:sp>
-      <p:sp>
-        <p:nvSpPr>
-          <p:cNvPr id="18" name="TextBox 17"/>
-          <p:cNvSpPr txBox="1"/>
-          <p:nvPr/>
-        </p:nvSpPr>
-        <p:spPr>
-          <a:xfrm>
-            <a:off x="1069848" y="5010912"/>
-            <a:ext cx="4672584" cy="1051560"/>
-          </a:xfrm>
-          <a:prstGeom prst="rect">
-            <a:avLst/>
-          </a:prstGeom>
-          <a:noFill/>
-        </p:spPr>
-        <p:txBody>
-          <a:bodyPr wrap="square" anchor="t" lIns="0" rIns="0" tIns="0" bIns="0">
-            <a:spAutoFit/>
-          </a:bodyPr>
-          <a:lstStyle/>
-          <a:p>
-            <a:pPr algn="l">
-              <a:spcBef>
-                <a:spcPts val="0"/>
-              </a:spcBef>
-              <a:spcAft>
-                <a:spcPts val="400"/>
-              </a:spcAft>
-            </a:pPr>
-            <a:r>
-              <a:rPr sz="1250" b="0" i="0">
-                <a:solidFill>
-                  <a:srgbClr val="334E68"/>
-                </a:solidFill>
-                <a:latin typeface="Calibri"/>
-              </a:rPr>
-              <a:t>Disparo ao cruzar o limite (ex.: 6 alarmes/operador·hora) — notificação por WhatsApp, e-mail ou o canal que o gestor preferir.</a:t>
-            </a:r>
-          </a:p>
-        </p:txBody>
-      </p:sp>
-      <p:sp>
-        <p:nvSpPr>
-          <p:cNvPr id="19" name="Rounded Rectangle 18"/>
-          <p:cNvSpPr/>
-          <p:nvPr/>
-        </p:nvSpPr>
-        <p:spPr>
-          <a:xfrm>
-            <a:off x="6355080" y="4023360"/>
-            <a:ext cx="5257800" cy="2103120"/>
-          </a:xfrm>
-          <a:prstGeom prst="roundRect">
-            <a:avLst/>
-          </a:prstGeom>
-          <a:solidFill>
-            <a:srgbClr val="FFFFFF"/>
-          </a:solidFill>
-          <a:ln w="12700">
-            <a:solidFill>
-              <a:srgbClr val="D9E2EC"/>
-            </a:solidFill>
-          </a:ln>
-          <a:effectLst/>
-          <a:effectLst>
-            <a:outerShdw blurRad="90000" dist="40000" dir="5400000" rotWithShape="0">
-              <a:srgbClr val="1B2A3A">
-                <a:alpha val="24000"/>
-              </a:srgbClr>
-            </a:outerShdw>
-          </a:effectLst>
-        </p:spPr>
-        <p:style>
-          <a:lnRef idx="1">
-            <a:schemeClr val="accent1"/>
-          </a:lnRef>
-          <a:fillRef idx="3">
-            <a:schemeClr val="accent1"/>
-          </a:fillRef>
-          <a:effectRef idx="2">
-            <a:schemeClr val="accent1"/>
-          </a:effectRef>
-          <a:fontRef idx="minor">
-            <a:schemeClr val="lt1"/>
-          </a:fontRef>
-        </p:style>
-        <p:txBody>
-          <a:bodyPr rtlCol="0" anchor="ctr"/>
-          <a:lstStyle/>
-          <a:p>
-            <a:pPr algn="ctr"/>
-          </a:p>
-        </p:txBody>
-      </p:sp>
-      <p:sp>
-        <p:nvSpPr>
-          <p:cNvPr id="20" name="Rounded Rectangle 19"/>
-          <p:cNvSpPr/>
-          <p:nvPr/>
-        </p:nvSpPr>
-        <p:spPr>
-          <a:xfrm>
-            <a:off x="6629400" y="4297680"/>
-            <a:ext cx="548640" cy="548640"/>
-          </a:xfrm>
-          <a:prstGeom prst="roundRect">
-            <a:avLst>
-              <a:gd name="adj" fmla="val 30000"/>
-            </a:avLst>
-          </a:prstGeom>
-          <a:solidFill>
-            <a:srgbClr val="F59E0B"/>
-          </a:solidFill>
-          <a:ln>
-            <a:noFill/>
-          </a:ln>
-          <a:effectLst/>
-        </p:spPr>
-        <p:style>
-          <a:lnRef idx="1">
-            <a:schemeClr val="accent1"/>
-          </a:lnRef>
-          <a:fillRef idx="3">
-            <a:schemeClr val="accent1"/>
-          </a:fillRef>
-          <a:effectRef idx="2">
-            <a:schemeClr val="accent1"/>
-          </a:effectRef>
-          <a:fontRef idx="minor">
-            <a:schemeClr val="lt1"/>
-          </a:fontRef>
-        </p:style>
-        <p:txBody>
-          <a:bodyPr rtlCol="0" anchor="ctr"/>
-          <a:lstStyle/>
-          <a:p>
-            <a:pPr algn="ctr"/>
-            <a:r>
-              <a:rPr b="1" sz="2000">
-                <a:solidFill>
-                  <a:srgbClr val="FFFFFF"/>
-                </a:solidFill>
-                <a:latin typeface="Calibri"/>
-              </a:rPr>
-              <a:t>4</a:t>
-            </a:r>
-          </a:p>
-        </p:txBody>
-      </p:sp>
-      <p:sp>
-        <p:nvSpPr>
-          <p:cNvPr id="21" name="TextBox 20"/>
-          <p:cNvSpPr txBox="1"/>
-          <p:nvPr/>
-        </p:nvSpPr>
-        <p:spPr>
-          <a:xfrm>
-            <a:off x="7360920" y="4343400"/>
-            <a:ext cx="3931920" cy="822960"/>
-          </a:xfrm>
-          <a:prstGeom prst="rect">
-            <a:avLst/>
-          </a:prstGeom>
-          <a:noFill/>
-        </p:spPr>
-        <p:txBody>
-          <a:bodyPr wrap="square" anchor="t" lIns="0" rIns="0" tIns="0" bIns="0">
-            <a:spAutoFit/>
-          </a:bodyPr>
-          <a:lstStyle/>
-          <a:p>
-            <a:pPr algn="l">
-              <a:spcBef>
-                <a:spcPts val="0"/>
-              </a:spcBef>
-              <a:spcAft>
-                <a:spcPts val="400"/>
-              </a:spcAft>
-            </a:pPr>
-            <a:r>
-              <a:rPr sz="1700" b="1" i="0">
-                <a:solidFill>
-                  <a:srgbClr val="102A43"/>
-                </a:solidFill>
-                <a:latin typeface="Calibri"/>
-              </a:rPr>
-              <a:t>Comparativo histórico</a:t>
-            </a:r>
-          </a:p>
-        </p:txBody>
-      </p:sp>
-      <p:sp>
-        <p:nvSpPr>
-          <p:cNvPr id="22" name="TextBox 21"/>
-          <p:cNvSpPr txBox="1"/>
-          <p:nvPr/>
-        </p:nvSpPr>
-        <p:spPr>
-          <a:xfrm>
-            <a:off x="6647688" y="5010912"/>
-            <a:ext cx="4672584" cy="1051560"/>
-          </a:xfrm>
-          <a:prstGeom prst="rect">
-            <a:avLst/>
-          </a:prstGeom>
-          <a:noFill/>
-        </p:spPr>
-        <p:txBody>
-          <a:bodyPr wrap="square" anchor="t" lIns="0" rIns="0" tIns="0" bIns="0">
-            <a:spAutoFit/>
-          </a:bodyPr>
-          <a:lstStyle/>
-          <a:p>
-            <a:pPr algn="l">
-              <a:spcBef>
-                <a:spcPts val="0"/>
-              </a:spcBef>
-              <a:spcAft>
-                <a:spcPts val="400"/>
-              </a:spcAft>
-            </a:pPr>
-            <a:r>
-              <a:rPr sz="1250" b="0" i="0">
-                <a:solidFill>
-                  <a:srgbClr val="334E68"/>
-                </a:solidFill>
-                <a:latin typeface="Calibri"/>
-              </a:rPr>
-              <a:t>Revela divergências por turno e antes/depois de parada, além de outros padrões — insights para operação e manutenção.</a:t>
-            </a:r>
-          </a:p>
-        </p:txBody>
-      </p:sp>
-      <p:sp>
-        <p:nvSpPr>
-          <p:cNvPr id="23" name="TextBox 22"/>
+                  <a:srgbClr val="627D98"/>
+                </a:solidFill>
+                <a:latin typeface="Calibri"/>
+              </a:rPr>
+              <a:t>Direção 2026: integração com FactoryTalk Optix, arquitetura multi-node, +20 conectores, design em nuvem e Software Defined Automation — com Provisioning que reduz o deploy a 1–2 semanas.</a:t>
+            </a:r>
+          </a:p>
+        </p:txBody>
+      </p:sp>
+      <p:sp>
+        <p:nvSpPr>
+          <p:cNvPr id="11" name="TextBox 10"/>
           <p:cNvSpPr txBox="1"/>
           <p:nvPr/>
         </p:nvSpPr>
@@ -12754,7 +12753,7 @@
       </p:sp>
       <p:sp>
         <p:nvSpPr>
-          <p:cNvPr id="24" name="TextBox 23"/>
+          <p:cNvPr id="12" name="TextBox 11"/>
           <p:cNvSpPr txBox="1"/>
           <p:nvPr/>
         </p:nvSpPr>
@@ -12879,7 +12878,7 @@
             <a:avLst/>
           </a:prstGeom>
           <a:solidFill>
-            <a:srgbClr val="169C52"/>
+            <a:srgbClr val="2563EB"/>
           </a:solidFill>
           <a:ln>
             <a:noFill/>
@@ -12923,7 +12922,7 @@
             <a:avLst/>
           </a:prstGeom>
           <a:solidFill>
-            <a:srgbClr val="169C52"/>
+            <a:srgbClr val="2563EB"/>
           </a:solidFill>
           <a:ln>
             <a:noFill/>
@@ -12985,11 +12984,11 @@
             <a:r>
               <a:rPr sz="1150" b="1" i="0">
                 <a:solidFill>
-                  <a:srgbClr val="169C52"/>
-                </a:solidFill>
-                <a:latin typeface="Calibri"/>
-              </a:rPr>
-              <a:t>MODERNIZAÇÃO · PLATAFORMA</a:t>
+                  <a:srgbClr val="2563EB"/>
+                </a:solidFill>
+                <a:latin typeface="Calibri"/>
+              </a:rPr>
+              <a:t>ROADMAP</a:t>
             </a:r>
           </a:p>
         </p:txBody>
@@ -13031,63 +13030,21 @@
                 </a:solidFill>
                 <a:latin typeface="Calibri"/>
               </a:rPr>
-              <a:t>Evolução do PlantPAx — do adaptado ao PlantPAx 2026</a:t>
-            </a:r>
-          </a:p>
-        </p:txBody>
-      </p:sp>
-      <p:sp>
-        <p:nvSpPr>
-          <p:cNvPr id="7" name="TextBox 6"/>
-          <p:cNvSpPr txBox="1"/>
-          <p:nvPr/>
-        </p:nvSpPr>
-        <p:spPr>
-          <a:xfrm>
-            <a:off x="777240" y="1298448"/>
-            <a:ext cx="10607040" cy="411480"/>
-          </a:xfrm>
-          <a:prstGeom prst="rect">
-            <a:avLst/>
-          </a:prstGeom>
-          <a:noFill/>
-        </p:spPr>
-        <p:txBody>
-          <a:bodyPr wrap="square" anchor="t" lIns="0" rIns="0" tIns="0" bIns="0">
-            <a:spAutoFit/>
-          </a:bodyPr>
-          <a:lstStyle/>
-          <a:p>
-            <a:pPr algn="l">
-              <a:spcBef>
-                <a:spcPts val="0"/>
-              </a:spcBef>
-              <a:spcAft>
-                <a:spcPts val="400"/>
-              </a:spcAft>
-            </a:pPr>
-            <a:r>
-              <a:rPr sz="1400" b="0" i="0">
-                <a:solidFill>
-                  <a:srgbClr val="334E68"/>
-                </a:solidFill>
-                <a:latin typeface="Calibri"/>
-              </a:rPr>
-              <a:t>Não trocar a base: evoluir o PlantPAx adaptado de hoje para a direção 2026 da Rockwell.</a:t>
-            </a:r>
-          </a:p>
-        </p:txBody>
-      </p:sp>
-      <p:sp>
-        <p:nvSpPr>
-          <p:cNvPr id="8" name="Rounded Rectangle 7"/>
+              <a:t>Como evolui — do que já temos ao COI prescritivo</a:t>
+            </a:r>
+          </a:p>
+        </p:txBody>
+      </p:sp>
+      <p:sp>
+        <p:nvSpPr>
+          <p:cNvPr id="7" name="Rounded Rectangle 6"/>
           <p:cNvSpPr/>
           <p:nvPr/>
         </p:nvSpPr>
         <p:spPr>
           <a:xfrm>
-            <a:off x="2432304" y="1709928"/>
-            <a:ext cx="7333488" cy="4169663"/>
+            <a:off x="777240" y="1737360"/>
+            <a:ext cx="3429000" cy="3200400"/>
           </a:xfrm>
           <a:prstGeom prst="roundRect">
             <a:avLst/>
@@ -13095,9 +13052,9 @@
           <a:solidFill>
             <a:srgbClr val="FFFFFF"/>
           </a:solidFill>
-          <a:ln w="12700">
+          <a:ln w="19050">
             <a:solidFill>
-              <a:srgbClr val="D9E2EC"/>
+              <a:srgbClr val="169C52"/>
             </a:solidFill>
           </a:ln>
           <a:effectLst/>
@@ -13131,40 +13088,60 @@
           </a:p>
         </p:txBody>
       </p:sp>
-      <p:pic>
-        <p:nvPicPr>
-          <p:cNvPr id="9" name="Picture 8" descr="plantpax_direction.png"/>
-          <p:cNvPicPr>
-            <a:picLocks noChangeAspect="1"/>
-          </p:cNvPicPr>
-          <p:nvPr/>
-        </p:nvPicPr>
-        <p:blipFill>
-          <a:blip r:embed="rId2"/>
-          <a:stretch>
-            <a:fillRect/>
-          </a:stretch>
-        </p:blipFill>
-        <p:spPr>
-          <a:xfrm>
-            <a:off x="2523744" y="1783080"/>
-            <a:ext cx="7150608" cy="4023360"/>
-          </a:xfrm>
-          <a:prstGeom prst="rect">
-            <a:avLst/>
-          </a:prstGeom>
-        </p:spPr>
-      </p:pic>
-      <p:sp>
-        <p:nvSpPr>
-          <p:cNvPr id="10" name="TextBox 9"/>
+      <p:sp>
+        <p:nvSpPr>
+          <p:cNvPr id="8" name="Rounded Rectangle 7"/>
+          <p:cNvSpPr/>
+          <p:nvPr/>
+        </p:nvSpPr>
+        <p:spPr>
+          <a:xfrm>
+            <a:off x="777240" y="1737360"/>
+            <a:ext cx="3429000" cy="868680"/>
+          </a:xfrm>
+          <a:prstGeom prst="roundRect">
+            <a:avLst/>
+          </a:prstGeom>
+          <a:solidFill>
+            <a:srgbClr val="169C52"/>
+          </a:solidFill>
+          <a:ln>
+            <a:noFill/>
+          </a:ln>
+          <a:effectLst/>
+        </p:spPr>
+        <p:style>
+          <a:lnRef idx="1">
+            <a:schemeClr val="accent1"/>
+          </a:lnRef>
+          <a:fillRef idx="3">
+            <a:schemeClr val="accent1"/>
+          </a:fillRef>
+          <a:effectRef idx="2">
+            <a:schemeClr val="accent1"/>
+          </a:effectRef>
+          <a:fontRef idx="minor">
+            <a:schemeClr val="lt1"/>
+          </a:fontRef>
+        </p:style>
+        <p:txBody>
+          <a:bodyPr rtlCol="0" anchor="ctr"/>
+          <a:lstStyle/>
+          <a:p>
+            <a:pPr algn="ctr"/>
+          </a:p>
+        </p:txBody>
+      </p:sp>
+      <p:sp>
+        <p:nvSpPr>
+          <p:cNvPr id="9" name="TextBox 8"/>
           <p:cNvSpPr txBox="1"/>
           <p:nvPr/>
         </p:nvSpPr>
         <p:spPr>
           <a:xfrm>
-            <a:off x="777240" y="5989320"/>
-            <a:ext cx="10607040" cy="457200"/>
+            <a:off x="1051560" y="1847088"/>
+            <a:ext cx="2880360" cy="731520"/>
           </a:xfrm>
           <a:prstGeom prst="rect">
             <a:avLst/>
@@ -13177,7 +13154,7 @@
           </a:bodyPr>
           <a:lstStyle/>
           <a:p>
-            <a:pPr algn="ctr">
+            <a:pPr algn="l">
               <a:spcBef>
                 <a:spcPts val="0"/>
               </a:spcBef>
@@ -13186,20 +13163,624 @@
               </a:spcAft>
             </a:pPr>
             <a:r>
+              <a:rPr sz="1400" b="0" i="0">
+                <a:solidFill>
+                  <a:srgbClr val="FFFFFF"/>
+                </a:solidFill>
+                <a:latin typeface="Calibri"/>
+              </a:rPr>
+              <a:t>Fase 1</a:t>
+            </a:r>
+          </a:p>
+          <a:p>
+            <a:pPr algn="l">
+              <a:spcBef>
+                <a:spcPts val="0"/>
+              </a:spcBef>
+              <a:spcAft>
+                <a:spcPts val="400"/>
+              </a:spcAft>
+            </a:pPr>
+            <a:r>
+              <a:rPr sz="2000" b="1" i="0">
+                <a:solidFill>
+                  <a:srgbClr val="FFFFFF"/>
+                </a:solidFill>
+                <a:latin typeface="Calibri"/>
+              </a:rPr>
+              <a:t>Já implementado</a:t>
+            </a:r>
+          </a:p>
+        </p:txBody>
+      </p:sp>
+      <p:sp>
+        <p:nvSpPr>
+          <p:cNvPr id="10" name="TextBox 9"/>
+          <p:cNvSpPr txBox="1"/>
+          <p:nvPr/>
+        </p:nvSpPr>
+        <p:spPr>
+          <a:xfrm>
+            <a:off x="1069848" y="2788920"/>
+            <a:ext cx="2862072" cy="2057400"/>
+          </a:xfrm>
+          <a:prstGeom prst="rect">
+            <a:avLst/>
+          </a:prstGeom>
+          <a:noFill/>
+        </p:spPr>
+        <p:txBody>
+          <a:bodyPr wrap="square" anchor="t" lIns="0" rIns="0" tIns="0" bIns="0">
+            <a:spAutoFit/>
+          </a:bodyPr>
+          <a:lstStyle/>
+          <a:p>
+            <a:pPr algn="l">
+              <a:spcBef>
+                <a:spcPts val="0"/>
+              </a:spcBef>
+              <a:spcAft>
+                <a:spcPts val="400"/>
+              </a:spcAft>
+            </a:pPr>
+            <a:r>
               <a:rPr sz="1250" b="0" i="0">
                 <a:solidFill>
-                  <a:srgbClr val="627D98"/>
-                </a:solidFill>
-                <a:latin typeface="Calibri"/>
-              </a:rPr>
-              <a:t>Direção 2026: integração com FactoryTalk Optix, arquitetura multi-node, +20 conectores, design em nuvem e Software Defined Automation — com Provisioning que reduz o deploy a 1–2 semanas.</a:t>
-            </a:r>
-          </a:p>
-        </p:txBody>
-      </p:sp>
-      <p:sp>
-        <p:nvSpPr>
-          <p:cNvPr id="11" name="TextBox 10"/>
+                  <a:srgbClr val="334E68"/>
+                </a:solidFill>
+                <a:latin typeface="Calibri"/>
+              </a:rPr>
+              <a:t>O Grafana já está implantado sobre o PlantPAx adaptado, com os primeiros indicadores (ex.: controles em automático) já em teste. Base pronta — o equivalente Rockwell (VantagePoint) não é necessário para começar.</a:t>
+            </a:r>
+          </a:p>
+        </p:txBody>
+      </p:sp>
+      <p:sp>
+        <p:nvSpPr>
+          <p:cNvPr id="11" name="Chevron 10"/>
+          <p:cNvSpPr/>
+          <p:nvPr/>
+        </p:nvSpPr>
+        <p:spPr>
+          <a:xfrm>
+            <a:off x="4160520" y="3154680"/>
+            <a:ext cx="365760" cy="365760"/>
+          </a:xfrm>
+          <a:prstGeom prst="chevron">
+            <a:avLst/>
+          </a:prstGeom>
+          <a:solidFill>
+            <a:srgbClr val="169C52"/>
+          </a:solidFill>
+          <a:ln>
+            <a:noFill/>
+          </a:ln>
+          <a:effectLst/>
+        </p:spPr>
+        <p:style>
+          <a:lnRef idx="1">
+            <a:schemeClr val="accent1"/>
+          </a:lnRef>
+          <a:fillRef idx="3">
+            <a:schemeClr val="accent1"/>
+          </a:fillRef>
+          <a:effectRef idx="2">
+            <a:schemeClr val="accent1"/>
+          </a:effectRef>
+          <a:fontRef idx="minor">
+            <a:schemeClr val="lt1"/>
+          </a:fontRef>
+        </p:style>
+        <p:txBody>
+          <a:bodyPr rtlCol="0" anchor="ctr"/>
+          <a:lstStyle/>
+          <a:p>
+            <a:pPr algn="ctr"/>
+          </a:p>
+        </p:txBody>
+      </p:sp>
+      <p:sp>
+        <p:nvSpPr>
+          <p:cNvPr id="12" name="Rounded Rectangle 11"/>
+          <p:cNvSpPr/>
+          <p:nvPr/>
+        </p:nvSpPr>
+        <p:spPr>
+          <a:xfrm>
+            <a:off x="4370832" y="1737360"/>
+            <a:ext cx="3429000" cy="3200400"/>
+          </a:xfrm>
+          <a:prstGeom prst="roundRect">
+            <a:avLst/>
+          </a:prstGeom>
+          <a:solidFill>
+            <a:srgbClr val="FFFFFF"/>
+          </a:solidFill>
+          <a:ln w="19050">
+            <a:solidFill>
+              <a:srgbClr val="F59E0B"/>
+            </a:solidFill>
+          </a:ln>
+          <a:effectLst/>
+          <a:effectLst>
+            <a:outerShdw blurRad="90000" dist="40000" dir="5400000" rotWithShape="0">
+              <a:srgbClr val="1B2A3A">
+                <a:alpha val="24000"/>
+              </a:srgbClr>
+            </a:outerShdw>
+          </a:effectLst>
+        </p:spPr>
+        <p:style>
+          <a:lnRef idx="1">
+            <a:schemeClr val="accent1"/>
+          </a:lnRef>
+          <a:fillRef idx="3">
+            <a:schemeClr val="accent1"/>
+          </a:fillRef>
+          <a:effectRef idx="2">
+            <a:schemeClr val="accent1"/>
+          </a:effectRef>
+          <a:fontRef idx="minor">
+            <a:schemeClr val="lt1"/>
+          </a:fontRef>
+        </p:style>
+        <p:txBody>
+          <a:bodyPr rtlCol="0" anchor="ctr"/>
+          <a:lstStyle/>
+          <a:p>
+            <a:pPr algn="ctr"/>
+          </a:p>
+        </p:txBody>
+      </p:sp>
+      <p:sp>
+        <p:nvSpPr>
+          <p:cNvPr id="13" name="Rounded Rectangle 12"/>
+          <p:cNvSpPr/>
+          <p:nvPr/>
+        </p:nvSpPr>
+        <p:spPr>
+          <a:xfrm>
+            <a:off x="4370832" y="1737360"/>
+            <a:ext cx="3429000" cy="868680"/>
+          </a:xfrm>
+          <a:prstGeom prst="roundRect">
+            <a:avLst/>
+          </a:prstGeom>
+          <a:solidFill>
+            <a:srgbClr val="F59E0B"/>
+          </a:solidFill>
+          <a:ln>
+            <a:noFill/>
+          </a:ln>
+          <a:effectLst/>
+        </p:spPr>
+        <p:style>
+          <a:lnRef idx="1">
+            <a:schemeClr val="accent1"/>
+          </a:lnRef>
+          <a:fillRef idx="3">
+            <a:schemeClr val="accent1"/>
+          </a:fillRef>
+          <a:effectRef idx="2">
+            <a:schemeClr val="accent1"/>
+          </a:effectRef>
+          <a:fontRef idx="minor">
+            <a:schemeClr val="lt1"/>
+          </a:fontRef>
+        </p:style>
+        <p:txBody>
+          <a:bodyPr rtlCol="0" anchor="ctr"/>
+          <a:lstStyle/>
+          <a:p>
+            <a:pPr algn="ctr"/>
+          </a:p>
+        </p:txBody>
+      </p:sp>
+      <p:sp>
+        <p:nvSpPr>
+          <p:cNvPr id="14" name="TextBox 13"/>
+          <p:cNvSpPr txBox="1"/>
+          <p:nvPr/>
+        </p:nvSpPr>
+        <p:spPr>
+          <a:xfrm>
+            <a:off x="4645152" y="1847088"/>
+            <a:ext cx="2880360" cy="731520"/>
+          </a:xfrm>
+          <a:prstGeom prst="rect">
+            <a:avLst/>
+          </a:prstGeom>
+          <a:noFill/>
+        </p:spPr>
+        <p:txBody>
+          <a:bodyPr wrap="square" anchor="t" lIns="0" rIns="0" tIns="0" bIns="0">
+            <a:spAutoFit/>
+          </a:bodyPr>
+          <a:lstStyle/>
+          <a:p>
+            <a:pPr algn="l">
+              <a:spcBef>
+                <a:spcPts val="0"/>
+              </a:spcBef>
+              <a:spcAft>
+                <a:spcPts val="400"/>
+              </a:spcAft>
+            </a:pPr>
+            <a:r>
+              <a:rPr sz="1400" b="0" i="0">
+                <a:solidFill>
+                  <a:srgbClr val="FFFFFF"/>
+                </a:solidFill>
+                <a:latin typeface="Calibri"/>
+              </a:rPr>
+              <a:t>Fase 2</a:t>
+            </a:r>
+          </a:p>
+          <a:p>
+            <a:pPr algn="l">
+              <a:spcBef>
+                <a:spcPts val="0"/>
+              </a:spcBef>
+              <a:spcAft>
+                <a:spcPts val="400"/>
+              </a:spcAft>
+            </a:pPr>
+            <a:r>
+              <a:rPr sz="2000" b="1" i="0">
+                <a:solidFill>
+                  <a:srgbClr val="FFFFFF"/>
+                </a:solidFill>
+                <a:latin typeface="Calibri"/>
+              </a:rPr>
+              <a:t>Preditivo</a:t>
+            </a:r>
+          </a:p>
+        </p:txBody>
+      </p:sp>
+      <p:sp>
+        <p:nvSpPr>
+          <p:cNvPr id="15" name="TextBox 14"/>
+          <p:cNvSpPr txBox="1"/>
+          <p:nvPr/>
+        </p:nvSpPr>
+        <p:spPr>
+          <a:xfrm>
+            <a:off x="4663440" y="2788920"/>
+            <a:ext cx="2862072" cy="2057400"/>
+          </a:xfrm>
+          <a:prstGeom prst="rect">
+            <a:avLst/>
+          </a:prstGeom>
+          <a:noFill/>
+        </p:spPr>
+        <p:txBody>
+          <a:bodyPr wrap="square" anchor="t" lIns="0" rIns="0" tIns="0" bIns="0">
+            <a:spAutoFit/>
+          </a:bodyPr>
+          <a:lstStyle/>
+          <a:p>
+            <a:pPr algn="l">
+              <a:spcBef>
+                <a:spcPts val="0"/>
+              </a:spcBef>
+              <a:spcAft>
+                <a:spcPts val="400"/>
+              </a:spcAft>
+            </a:pPr>
+            <a:r>
+              <a:rPr sz="1250" b="0" i="0">
+                <a:solidFill>
+                  <a:srgbClr val="334E68"/>
+                </a:solidFill>
+                <a:latin typeface="Calibri"/>
+              </a:rPr>
+              <a:t>O DataMosaix estende o monitoramento preditivo aos equipamentos não rotativos — os rotativos já são cobertos pela Tractian — e agrega as plantas em dashboards comparativos.</a:t>
+            </a:r>
+          </a:p>
+        </p:txBody>
+      </p:sp>
+      <p:sp>
+        <p:nvSpPr>
+          <p:cNvPr id="16" name="Chevron 15"/>
+          <p:cNvSpPr/>
+          <p:nvPr/>
+        </p:nvSpPr>
+        <p:spPr>
+          <a:xfrm>
+            <a:off x="7754112" y="3154680"/>
+            <a:ext cx="365760" cy="365760"/>
+          </a:xfrm>
+          <a:prstGeom prst="chevron">
+            <a:avLst/>
+          </a:prstGeom>
+          <a:solidFill>
+            <a:srgbClr val="F59E0B"/>
+          </a:solidFill>
+          <a:ln>
+            <a:noFill/>
+          </a:ln>
+          <a:effectLst/>
+        </p:spPr>
+        <p:style>
+          <a:lnRef idx="1">
+            <a:schemeClr val="accent1"/>
+          </a:lnRef>
+          <a:fillRef idx="3">
+            <a:schemeClr val="accent1"/>
+          </a:fillRef>
+          <a:effectRef idx="2">
+            <a:schemeClr val="accent1"/>
+          </a:effectRef>
+          <a:fontRef idx="minor">
+            <a:schemeClr val="lt1"/>
+          </a:fontRef>
+        </p:style>
+        <p:txBody>
+          <a:bodyPr rtlCol="0" anchor="ctr"/>
+          <a:lstStyle/>
+          <a:p>
+            <a:pPr algn="ctr"/>
+          </a:p>
+        </p:txBody>
+      </p:sp>
+      <p:sp>
+        <p:nvSpPr>
+          <p:cNvPr id="17" name="Rounded Rectangle 16"/>
+          <p:cNvSpPr/>
+          <p:nvPr/>
+        </p:nvSpPr>
+        <p:spPr>
+          <a:xfrm>
+            <a:off x="7964424" y="1737360"/>
+            <a:ext cx="3429000" cy="3200400"/>
+          </a:xfrm>
+          <a:prstGeom prst="roundRect">
+            <a:avLst/>
+          </a:prstGeom>
+          <a:solidFill>
+            <a:srgbClr val="FFFFFF"/>
+          </a:solidFill>
+          <a:ln w="19050">
+            <a:solidFill>
+              <a:srgbClr val="2563EB"/>
+            </a:solidFill>
+          </a:ln>
+          <a:effectLst/>
+          <a:effectLst>
+            <a:outerShdw blurRad="90000" dist="40000" dir="5400000" rotWithShape="0">
+              <a:srgbClr val="1B2A3A">
+                <a:alpha val="24000"/>
+              </a:srgbClr>
+            </a:outerShdw>
+          </a:effectLst>
+        </p:spPr>
+        <p:style>
+          <a:lnRef idx="1">
+            <a:schemeClr val="accent1"/>
+          </a:lnRef>
+          <a:fillRef idx="3">
+            <a:schemeClr val="accent1"/>
+          </a:fillRef>
+          <a:effectRef idx="2">
+            <a:schemeClr val="accent1"/>
+          </a:effectRef>
+          <a:fontRef idx="minor">
+            <a:schemeClr val="lt1"/>
+          </a:fontRef>
+        </p:style>
+        <p:txBody>
+          <a:bodyPr rtlCol="0" anchor="ctr"/>
+          <a:lstStyle/>
+          <a:p>
+            <a:pPr algn="ctr"/>
+          </a:p>
+        </p:txBody>
+      </p:sp>
+      <p:sp>
+        <p:nvSpPr>
+          <p:cNvPr id="18" name="Rounded Rectangle 17"/>
+          <p:cNvSpPr/>
+          <p:nvPr/>
+        </p:nvSpPr>
+        <p:spPr>
+          <a:xfrm>
+            <a:off x="7964424" y="1737360"/>
+            <a:ext cx="3429000" cy="868680"/>
+          </a:xfrm>
+          <a:prstGeom prst="roundRect">
+            <a:avLst/>
+          </a:prstGeom>
+          <a:solidFill>
+            <a:srgbClr val="2563EB"/>
+          </a:solidFill>
+          <a:ln>
+            <a:noFill/>
+          </a:ln>
+          <a:effectLst/>
+        </p:spPr>
+        <p:style>
+          <a:lnRef idx="1">
+            <a:schemeClr val="accent1"/>
+          </a:lnRef>
+          <a:fillRef idx="3">
+            <a:schemeClr val="accent1"/>
+          </a:fillRef>
+          <a:effectRef idx="2">
+            <a:schemeClr val="accent1"/>
+          </a:effectRef>
+          <a:fontRef idx="minor">
+            <a:schemeClr val="lt1"/>
+          </a:fontRef>
+        </p:style>
+        <p:txBody>
+          <a:bodyPr rtlCol="0" anchor="ctr"/>
+          <a:lstStyle/>
+          <a:p>
+            <a:pPr algn="ctr"/>
+          </a:p>
+        </p:txBody>
+      </p:sp>
+      <p:sp>
+        <p:nvSpPr>
+          <p:cNvPr id="19" name="TextBox 18"/>
+          <p:cNvSpPr txBox="1"/>
+          <p:nvPr/>
+        </p:nvSpPr>
+        <p:spPr>
+          <a:xfrm>
+            <a:off x="8238744" y="1847088"/>
+            <a:ext cx="2880360" cy="731520"/>
+          </a:xfrm>
+          <a:prstGeom prst="rect">
+            <a:avLst/>
+          </a:prstGeom>
+          <a:noFill/>
+        </p:spPr>
+        <p:txBody>
+          <a:bodyPr wrap="square" anchor="t" lIns="0" rIns="0" tIns="0" bIns="0">
+            <a:spAutoFit/>
+          </a:bodyPr>
+          <a:lstStyle/>
+          <a:p>
+            <a:pPr algn="l">
+              <a:spcBef>
+                <a:spcPts val="0"/>
+              </a:spcBef>
+              <a:spcAft>
+                <a:spcPts val="400"/>
+              </a:spcAft>
+            </a:pPr>
+            <a:r>
+              <a:rPr sz="1400" b="0" i="0">
+                <a:solidFill>
+                  <a:srgbClr val="FFFFFF"/>
+                </a:solidFill>
+                <a:latin typeface="Calibri"/>
+              </a:rPr>
+              <a:t>Fase 3</a:t>
+            </a:r>
+          </a:p>
+          <a:p>
+            <a:pPr algn="l">
+              <a:spcBef>
+                <a:spcPts val="0"/>
+              </a:spcBef>
+              <a:spcAft>
+                <a:spcPts val="400"/>
+              </a:spcAft>
+            </a:pPr>
+            <a:r>
+              <a:rPr sz="2000" b="1" i="0">
+                <a:solidFill>
+                  <a:srgbClr val="FFFFFF"/>
+                </a:solidFill>
+                <a:latin typeface="Calibri"/>
+              </a:rPr>
+              <a:t>Prescritivo + COI</a:t>
+            </a:r>
+          </a:p>
+        </p:txBody>
+      </p:sp>
+      <p:sp>
+        <p:nvSpPr>
+          <p:cNvPr id="20" name="TextBox 19"/>
+          <p:cNvSpPr txBox="1"/>
+          <p:nvPr/>
+        </p:nvSpPr>
+        <p:spPr>
+          <a:xfrm>
+            <a:off x="8257032" y="2788920"/>
+            <a:ext cx="2862072" cy="2057400"/>
+          </a:xfrm>
+          <a:prstGeom prst="rect">
+            <a:avLst/>
+          </a:prstGeom>
+          <a:noFill/>
+        </p:spPr>
+        <p:txBody>
+          <a:bodyPr wrap="square" anchor="t" lIns="0" rIns="0" tIns="0" bIns="0">
+            <a:spAutoFit/>
+          </a:bodyPr>
+          <a:lstStyle/>
+          <a:p>
+            <a:pPr algn="l">
+              <a:spcBef>
+                <a:spcPts val="0"/>
+              </a:spcBef>
+              <a:spcAft>
+                <a:spcPts val="400"/>
+              </a:spcAft>
+            </a:pPr>
+            <a:r>
+              <a:rPr sz="1250" b="0" i="0">
+                <a:solidFill>
+                  <a:srgbClr val="334E68"/>
+                </a:solidFill>
+                <a:latin typeface="Calibri"/>
+              </a:rPr>
+              <a:t>Em simulações de paradas em vários sites, com o COI centralizado a retomada das plantas ficou mais estável, rápida e otimizada — operação e manutenção. Com o time central treinando os sites, é possível até evitar desarmes.</a:t>
+            </a:r>
+          </a:p>
+        </p:txBody>
+      </p:sp>
+      <p:sp>
+        <p:nvSpPr>
+          <p:cNvPr id="21" name="Rounded Rectangle 20"/>
+          <p:cNvSpPr/>
+          <p:nvPr/>
+        </p:nvSpPr>
+        <p:spPr>
+          <a:xfrm>
+            <a:off x="777240" y="5212080"/>
+            <a:ext cx="8229600" cy="457200"/>
+          </a:xfrm>
+          <a:prstGeom prst="roundRect">
+            <a:avLst>
+              <a:gd name="adj" fmla="val 50000"/>
+            </a:avLst>
+          </a:prstGeom>
+          <a:solidFill>
+            <a:srgbClr val="102A43"/>
+          </a:solidFill>
+          <a:ln>
+            <a:noFill/>
+          </a:ln>
+          <a:effectLst/>
+        </p:spPr>
+        <p:style>
+          <a:lnRef idx="1">
+            <a:schemeClr val="accent1"/>
+          </a:lnRef>
+          <a:fillRef idx="3">
+            <a:schemeClr val="accent1"/>
+          </a:fillRef>
+          <a:effectRef idx="2">
+            <a:schemeClr val="accent1"/>
+          </a:effectRef>
+          <a:fontRef idx="minor">
+            <a:schemeClr val="lt1"/>
+          </a:fontRef>
+        </p:style>
+        <p:txBody>
+          <a:bodyPr rtlCol="0" anchor="ctr" wrap="square" tIns="12700" bIns="12700"/>
+          <a:lstStyle/>
+          <a:p>
+            <a:pPr algn="ctr"/>
+            <a:r>
+              <a:rPr sz="1300" b="1">
+                <a:solidFill>
+                  <a:srgbClr val="FFFFFF"/>
+                </a:solidFill>
+                <a:latin typeface="Calibri"/>
+              </a:rPr>
+              <a:t>ResilientEdge: disponível global desde 18/06/2026  ·  SCADA multi-site em rollout 2026</a:t>
+            </a:r>
+          </a:p>
+        </p:txBody>
+      </p:sp>
+      <p:sp>
+        <p:nvSpPr>
+          <p:cNvPr id="22" name="TextBox 21"/>
           <p:cNvSpPr txBox="1"/>
           <p:nvPr/>
         </p:nvSpPr>
@@ -13241,7 +13822,7 @@
       </p:sp>
       <p:sp>
         <p:nvSpPr>
-          <p:cNvPr id="12" name="TextBox 11"/>
+          <p:cNvPr id="23" name="TextBox 22"/>
           <p:cNvSpPr txBox="1"/>
           <p:nvPr/>
         </p:nvSpPr>
@@ -14465,1075 +15046,6 @@
     <p:bg>
       <p:bgPr>
         <a:solidFill>
-          <a:srgbClr val="F4F7FA"/>
-        </a:solidFill>
-        <a:effectLst/>
-      </p:bgPr>
-    </p:bg>
-    <p:spTree>
-      <p:nvGrpSpPr>
-        <p:cNvPr id="1" name=""/>
-        <p:cNvGrpSpPr/>
-        <p:nvPr/>
-      </p:nvGrpSpPr>
-      <p:grpSpPr/>
-      <p:sp>
-        <p:nvSpPr>
-          <p:cNvPr id="2" name="Rectangle 1"/>
-          <p:cNvSpPr/>
-          <p:nvPr/>
-        </p:nvSpPr>
-        <p:spPr>
-          <a:xfrm>
-            <a:off x="0" y="0"/>
-            <a:ext cx="12191695" cy="1143000"/>
-          </a:xfrm>
-          <a:prstGeom prst="rect">
-            <a:avLst/>
-          </a:prstGeom>
-          <a:solidFill>
-            <a:srgbClr val="FFFFFF"/>
-          </a:solidFill>
-          <a:ln>
-            <a:noFill/>
-          </a:ln>
-          <a:effectLst/>
-        </p:spPr>
-        <p:style>
-          <a:lnRef idx="1">
-            <a:schemeClr val="accent1"/>
-          </a:lnRef>
-          <a:fillRef idx="3">
-            <a:schemeClr val="accent1"/>
-          </a:fillRef>
-          <a:effectRef idx="2">
-            <a:schemeClr val="accent1"/>
-          </a:effectRef>
-          <a:fontRef idx="minor">
-            <a:schemeClr val="lt1"/>
-          </a:fontRef>
-        </p:style>
-        <p:txBody>
-          <a:bodyPr rtlCol="0" anchor="ctr"/>
-          <a:lstStyle/>
-          <a:p>
-            <a:pPr algn="ctr"/>
-          </a:p>
-        </p:txBody>
-      </p:sp>
-      <p:sp>
-        <p:nvSpPr>
-          <p:cNvPr id="3" name="Rectangle 2"/>
-          <p:cNvSpPr/>
-          <p:nvPr/>
-        </p:nvSpPr>
-        <p:spPr>
-          <a:xfrm>
-            <a:off x="0" y="1143000"/>
-            <a:ext cx="12191695" cy="27940"/>
-          </a:xfrm>
-          <a:prstGeom prst="rect">
-            <a:avLst/>
-          </a:prstGeom>
-          <a:solidFill>
-            <a:srgbClr val="2563EB"/>
-          </a:solidFill>
-          <a:ln>
-            <a:noFill/>
-          </a:ln>
-          <a:effectLst/>
-        </p:spPr>
-        <p:style>
-          <a:lnRef idx="1">
-            <a:schemeClr val="accent1"/>
-          </a:lnRef>
-          <a:fillRef idx="3">
-            <a:schemeClr val="accent1"/>
-          </a:fillRef>
-          <a:effectRef idx="2">
-            <a:schemeClr val="accent1"/>
-          </a:effectRef>
-          <a:fontRef idx="minor">
-            <a:schemeClr val="lt1"/>
-          </a:fontRef>
-        </p:style>
-        <p:txBody>
-          <a:bodyPr rtlCol="0" anchor="ctr"/>
-          <a:lstStyle/>
-          <a:p>
-            <a:pPr algn="ctr"/>
-          </a:p>
-        </p:txBody>
-      </p:sp>
-      <p:sp>
-        <p:nvSpPr>
-          <p:cNvPr id="4" name="Rectangle 3"/>
-          <p:cNvSpPr/>
-          <p:nvPr/>
-        </p:nvSpPr>
-        <p:spPr>
-          <a:xfrm>
-            <a:off x="502920" y="310896"/>
-            <a:ext cx="128016" cy="566928"/>
-          </a:xfrm>
-          <a:prstGeom prst="rect">
-            <a:avLst/>
-          </a:prstGeom>
-          <a:solidFill>
-            <a:srgbClr val="2563EB"/>
-          </a:solidFill>
-          <a:ln>
-            <a:noFill/>
-          </a:ln>
-          <a:effectLst/>
-        </p:spPr>
-        <p:style>
-          <a:lnRef idx="1">
-            <a:schemeClr val="accent1"/>
-          </a:lnRef>
-          <a:fillRef idx="3">
-            <a:schemeClr val="accent1"/>
-          </a:fillRef>
-          <a:effectRef idx="2">
-            <a:schemeClr val="accent1"/>
-          </a:effectRef>
-          <a:fontRef idx="minor">
-            <a:schemeClr val="lt1"/>
-          </a:fontRef>
-        </p:style>
-        <p:txBody>
-          <a:bodyPr rtlCol="0" anchor="ctr"/>
-          <a:lstStyle/>
-          <a:p>
-            <a:pPr algn="ctr"/>
-          </a:p>
-        </p:txBody>
-      </p:sp>
-      <p:sp>
-        <p:nvSpPr>
-          <p:cNvPr id="5" name="TextBox 4"/>
-          <p:cNvSpPr txBox="1"/>
-          <p:nvPr/>
-        </p:nvSpPr>
-        <p:spPr>
-          <a:xfrm>
-            <a:off x="777240" y="274320"/>
-            <a:ext cx="10607040" cy="274320"/>
-          </a:xfrm>
-          <a:prstGeom prst="rect">
-            <a:avLst/>
-          </a:prstGeom>
-          <a:noFill/>
-        </p:spPr>
-        <p:txBody>
-          <a:bodyPr wrap="square" anchor="t" lIns="0" rIns="0" tIns="0" bIns="0">
-            <a:spAutoFit/>
-          </a:bodyPr>
-          <a:lstStyle/>
-          <a:p>
-            <a:pPr algn="l">
-              <a:spcBef>
-                <a:spcPts val="0"/>
-              </a:spcBef>
-              <a:spcAft>
-                <a:spcPts val="400"/>
-              </a:spcAft>
-            </a:pPr>
-            <a:r>
-              <a:rPr sz="1150" b="1" i="0">
-                <a:solidFill>
-                  <a:srgbClr val="2563EB"/>
-                </a:solidFill>
-                <a:latin typeface="Calibri"/>
-              </a:rPr>
-              <a:t>ROADMAP</a:t>
-            </a:r>
-          </a:p>
-        </p:txBody>
-      </p:sp>
-      <p:sp>
-        <p:nvSpPr>
-          <p:cNvPr id="6" name="TextBox 5"/>
-          <p:cNvSpPr txBox="1"/>
-          <p:nvPr/>
-        </p:nvSpPr>
-        <p:spPr>
-          <a:xfrm>
-            <a:off x="777240" y="502920"/>
-            <a:ext cx="10881360" cy="548640"/>
-          </a:xfrm>
-          <a:prstGeom prst="rect">
-            <a:avLst/>
-          </a:prstGeom>
-          <a:noFill/>
-        </p:spPr>
-        <p:txBody>
-          <a:bodyPr wrap="square" anchor="t" lIns="0" rIns="0" tIns="0" bIns="0">
-            <a:spAutoFit/>
-          </a:bodyPr>
-          <a:lstStyle/>
-          <a:p>
-            <a:pPr algn="l">
-              <a:spcBef>
-                <a:spcPts val="0"/>
-              </a:spcBef>
-              <a:spcAft>
-                <a:spcPts val="400"/>
-              </a:spcAft>
-            </a:pPr>
-            <a:r>
-              <a:rPr sz="2500" b="1" i="0">
-                <a:solidFill>
-                  <a:srgbClr val="102A43"/>
-                </a:solidFill>
-                <a:latin typeface="Calibri"/>
-              </a:rPr>
-              <a:t>Como evolui — do que já temos ao COI prescritivo</a:t>
-            </a:r>
-          </a:p>
-        </p:txBody>
-      </p:sp>
-      <p:sp>
-        <p:nvSpPr>
-          <p:cNvPr id="7" name="Rounded Rectangle 6"/>
-          <p:cNvSpPr/>
-          <p:nvPr/>
-        </p:nvSpPr>
-        <p:spPr>
-          <a:xfrm>
-            <a:off x="777240" y="1737360"/>
-            <a:ext cx="3429000" cy="3200400"/>
-          </a:xfrm>
-          <a:prstGeom prst="roundRect">
-            <a:avLst/>
-          </a:prstGeom>
-          <a:solidFill>
-            <a:srgbClr val="FFFFFF"/>
-          </a:solidFill>
-          <a:ln w="19050">
-            <a:solidFill>
-              <a:srgbClr val="169C52"/>
-            </a:solidFill>
-          </a:ln>
-          <a:effectLst/>
-          <a:effectLst>
-            <a:outerShdw blurRad="90000" dist="40000" dir="5400000" rotWithShape="0">
-              <a:srgbClr val="1B2A3A">
-                <a:alpha val="24000"/>
-              </a:srgbClr>
-            </a:outerShdw>
-          </a:effectLst>
-        </p:spPr>
-        <p:style>
-          <a:lnRef idx="1">
-            <a:schemeClr val="accent1"/>
-          </a:lnRef>
-          <a:fillRef idx="3">
-            <a:schemeClr val="accent1"/>
-          </a:fillRef>
-          <a:effectRef idx="2">
-            <a:schemeClr val="accent1"/>
-          </a:effectRef>
-          <a:fontRef idx="minor">
-            <a:schemeClr val="lt1"/>
-          </a:fontRef>
-        </p:style>
-        <p:txBody>
-          <a:bodyPr rtlCol="0" anchor="ctr"/>
-          <a:lstStyle/>
-          <a:p>
-            <a:pPr algn="ctr"/>
-          </a:p>
-        </p:txBody>
-      </p:sp>
-      <p:sp>
-        <p:nvSpPr>
-          <p:cNvPr id="8" name="Rounded Rectangle 7"/>
-          <p:cNvSpPr/>
-          <p:nvPr/>
-        </p:nvSpPr>
-        <p:spPr>
-          <a:xfrm>
-            <a:off x="777240" y="1737360"/>
-            <a:ext cx="3429000" cy="868680"/>
-          </a:xfrm>
-          <a:prstGeom prst="roundRect">
-            <a:avLst/>
-          </a:prstGeom>
-          <a:solidFill>
-            <a:srgbClr val="169C52"/>
-          </a:solidFill>
-          <a:ln>
-            <a:noFill/>
-          </a:ln>
-          <a:effectLst/>
-        </p:spPr>
-        <p:style>
-          <a:lnRef idx="1">
-            <a:schemeClr val="accent1"/>
-          </a:lnRef>
-          <a:fillRef idx="3">
-            <a:schemeClr val="accent1"/>
-          </a:fillRef>
-          <a:effectRef idx="2">
-            <a:schemeClr val="accent1"/>
-          </a:effectRef>
-          <a:fontRef idx="minor">
-            <a:schemeClr val="lt1"/>
-          </a:fontRef>
-        </p:style>
-        <p:txBody>
-          <a:bodyPr rtlCol="0" anchor="ctr"/>
-          <a:lstStyle/>
-          <a:p>
-            <a:pPr algn="ctr"/>
-          </a:p>
-        </p:txBody>
-      </p:sp>
-      <p:sp>
-        <p:nvSpPr>
-          <p:cNvPr id="9" name="TextBox 8"/>
-          <p:cNvSpPr txBox="1"/>
-          <p:nvPr/>
-        </p:nvSpPr>
-        <p:spPr>
-          <a:xfrm>
-            <a:off x="1051560" y="1847088"/>
-            <a:ext cx="2880360" cy="731520"/>
-          </a:xfrm>
-          <a:prstGeom prst="rect">
-            <a:avLst/>
-          </a:prstGeom>
-          <a:noFill/>
-        </p:spPr>
-        <p:txBody>
-          <a:bodyPr wrap="square" anchor="t" lIns="0" rIns="0" tIns="0" bIns="0">
-            <a:spAutoFit/>
-          </a:bodyPr>
-          <a:lstStyle/>
-          <a:p>
-            <a:pPr algn="l">
-              <a:spcBef>
-                <a:spcPts val="0"/>
-              </a:spcBef>
-              <a:spcAft>
-                <a:spcPts val="400"/>
-              </a:spcAft>
-            </a:pPr>
-            <a:r>
-              <a:rPr sz="1400" b="0" i="0">
-                <a:solidFill>
-                  <a:srgbClr val="FFFFFF"/>
-                </a:solidFill>
-                <a:latin typeface="Calibri"/>
-              </a:rPr>
-              <a:t>Fase 1</a:t>
-            </a:r>
-          </a:p>
-          <a:p>
-            <a:pPr algn="l">
-              <a:spcBef>
-                <a:spcPts val="0"/>
-              </a:spcBef>
-              <a:spcAft>
-                <a:spcPts val="400"/>
-              </a:spcAft>
-            </a:pPr>
-            <a:r>
-              <a:rPr sz="2000" b="1" i="0">
-                <a:solidFill>
-                  <a:srgbClr val="FFFFFF"/>
-                </a:solidFill>
-                <a:latin typeface="Calibri"/>
-              </a:rPr>
-              <a:t>Já implementado</a:t>
-            </a:r>
-          </a:p>
-        </p:txBody>
-      </p:sp>
-      <p:sp>
-        <p:nvSpPr>
-          <p:cNvPr id="10" name="TextBox 9"/>
-          <p:cNvSpPr txBox="1"/>
-          <p:nvPr/>
-        </p:nvSpPr>
-        <p:spPr>
-          <a:xfrm>
-            <a:off x="1069848" y="2788920"/>
-            <a:ext cx="2862072" cy="2057400"/>
-          </a:xfrm>
-          <a:prstGeom prst="rect">
-            <a:avLst/>
-          </a:prstGeom>
-          <a:noFill/>
-        </p:spPr>
-        <p:txBody>
-          <a:bodyPr wrap="square" anchor="t" lIns="0" rIns="0" tIns="0" bIns="0">
-            <a:spAutoFit/>
-          </a:bodyPr>
-          <a:lstStyle/>
-          <a:p>
-            <a:pPr algn="l">
-              <a:spcBef>
-                <a:spcPts val="0"/>
-              </a:spcBef>
-              <a:spcAft>
-                <a:spcPts val="400"/>
-              </a:spcAft>
-            </a:pPr>
-            <a:r>
-              <a:rPr sz="1250" b="0" i="0">
-                <a:solidFill>
-                  <a:srgbClr val="334E68"/>
-                </a:solidFill>
-                <a:latin typeface="Calibri"/>
-              </a:rPr>
-              <a:t>Benchmarking de alarmes e KPIs já rodam hoje no Grafana — que já temos e está implantado — sobre o PlantPAx adaptado. Base pronta; o equivalente Rockwell (VantagePoint) não é necessário para começar.</a:t>
-            </a:r>
-          </a:p>
-        </p:txBody>
-      </p:sp>
-      <p:sp>
-        <p:nvSpPr>
-          <p:cNvPr id="11" name="Chevron 10"/>
-          <p:cNvSpPr/>
-          <p:nvPr/>
-        </p:nvSpPr>
-        <p:spPr>
-          <a:xfrm>
-            <a:off x="4160520" y="3154680"/>
-            <a:ext cx="365760" cy="365760"/>
-          </a:xfrm>
-          <a:prstGeom prst="chevron">
-            <a:avLst/>
-          </a:prstGeom>
-          <a:solidFill>
-            <a:srgbClr val="169C52"/>
-          </a:solidFill>
-          <a:ln>
-            <a:noFill/>
-          </a:ln>
-          <a:effectLst/>
-        </p:spPr>
-        <p:style>
-          <a:lnRef idx="1">
-            <a:schemeClr val="accent1"/>
-          </a:lnRef>
-          <a:fillRef idx="3">
-            <a:schemeClr val="accent1"/>
-          </a:fillRef>
-          <a:effectRef idx="2">
-            <a:schemeClr val="accent1"/>
-          </a:effectRef>
-          <a:fontRef idx="minor">
-            <a:schemeClr val="lt1"/>
-          </a:fontRef>
-        </p:style>
-        <p:txBody>
-          <a:bodyPr rtlCol="0" anchor="ctr"/>
-          <a:lstStyle/>
-          <a:p>
-            <a:pPr algn="ctr"/>
-          </a:p>
-        </p:txBody>
-      </p:sp>
-      <p:sp>
-        <p:nvSpPr>
-          <p:cNvPr id="12" name="Rounded Rectangle 11"/>
-          <p:cNvSpPr/>
-          <p:nvPr/>
-        </p:nvSpPr>
-        <p:spPr>
-          <a:xfrm>
-            <a:off x="4370832" y="1737360"/>
-            <a:ext cx="3429000" cy="3200400"/>
-          </a:xfrm>
-          <a:prstGeom prst="roundRect">
-            <a:avLst/>
-          </a:prstGeom>
-          <a:solidFill>
-            <a:srgbClr val="FFFFFF"/>
-          </a:solidFill>
-          <a:ln w="19050">
-            <a:solidFill>
-              <a:srgbClr val="F59E0B"/>
-            </a:solidFill>
-          </a:ln>
-          <a:effectLst/>
-          <a:effectLst>
-            <a:outerShdw blurRad="90000" dist="40000" dir="5400000" rotWithShape="0">
-              <a:srgbClr val="1B2A3A">
-                <a:alpha val="24000"/>
-              </a:srgbClr>
-            </a:outerShdw>
-          </a:effectLst>
-        </p:spPr>
-        <p:style>
-          <a:lnRef idx="1">
-            <a:schemeClr val="accent1"/>
-          </a:lnRef>
-          <a:fillRef idx="3">
-            <a:schemeClr val="accent1"/>
-          </a:fillRef>
-          <a:effectRef idx="2">
-            <a:schemeClr val="accent1"/>
-          </a:effectRef>
-          <a:fontRef idx="minor">
-            <a:schemeClr val="lt1"/>
-          </a:fontRef>
-        </p:style>
-        <p:txBody>
-          <a:bodyPr rtlCol="0" anchor="ctr"/>
-          <a:lstStyle/>
-          <a:p>
-            <a:pPr algn="ctr"/>
-          </a:p>
-        </p:txBody>
-      </p:sp>
-      <p:sp>
-        <p:nvSpPr>
-          <p:cNvPr id="13" name="Rounded Rectangle 12"/>
-          <p:cNvSpPr/>
-          <p:nvPr/>
-        </p:nvSpPr>
-        <p:spPr>
-          <a:xfrm>
-            <a:off x="4370832" y="1737360"/>
-            <a:ext cx="3429000" cy="868680"/>
-          </a:xfrm>
-          <a:prstGeom prst="roundRect">
-            <a:avLst/>
-          </a:prstGeom>
-          <a:solidFill>
-            <a:srgbClr val="F59E0B"/>
-          </a:solidFill>
-          <a:ln>
-            <a:noFill/>
-          </a:ln>
-          <a:effectLst/>
-        </p:spPr>
-        <p:style>
-          <a:lnRef idx="1">
-            <a:schemeClr val="accent1"/>
-          </a:lnRef>
-          <a:fillRef idx="3">
-            <a:schemeClr val="accent1"/>
-          </a:fillRef>
-          <a:effectRef idx="2">
-            <a:schemeClr val="accent1"/>
-          </a:effectRef>
-          <a:fontRef idx="minor">
-            <a:schemeClr val="lt1"/>
-          </a:fontRef>
-        </p:style>
-        <p:txBody>
-          <a:bodyPr rtlCol="0" anchor="ctr"/>
-          <a:lstStyle/>
-          <a:p>
-            <a:pPr algn="ctr"/>
-          </a:p>
-        </p:txBody>
-      </p:sp>
-      <p:sp>
-        <p:nvSpPr>
-          <p:cNvPr id="14" name="TextBox 13"/>
-          <p:cNvSpPr txBox="1"/>
-          <p:nvPr/>
-        </p:nvSpPr>
-        <p:spPr>
-          <a:xfrm>
-            <a:off x="4645152" y="1847088"/>
-            <a:ext cx="2880360" cy="731520"/>
-          </a:xfrm>
-          <a:prstGeom prst="rect">
-            <a:avLst/>
-          </a:prstGeom>
-          <a:noFill/>
-        </p:spPr>
-        <p:txBody>
-          <a:bodyPr wrap="square" anchor="t" lIns="0" rIns="0" tIns="0" bIns="0">
-            <a:spAutoFit/>
-          </a:bodyPr>
-          <a:lstStyle/>
-          <a:p>
-            <a:pPr algn="l">
-              <a:spcBef>
-                <a:spcPts val="0"/>
-              </a:spcBef>
-              <a:spcAft>
-                <a:spcPts val="400"/>
-              </a:spcAft>
-            </a:pPr>
-            <a:r>
-              <a:rPr sz="1400" b="0" i="0">
-                <a:solidFill>
-                  <a:srgbClr val="FFFFFF"/>
-                </a:solidFill>
-                <a:latin typeface="Calibri"/>
-              </a:rPr>
-              <a:t>Fase 2</a:t>
-            </a:r>
-          </a:p>
-          <a:p>
-            <a:pPr algn="l">
-              <a:spcBef>
-                <a:spcPts val="0"/>
-              </a:spcBef>
-              <a:spcAft>
-                <a:spcPts val="400"/>
-              </a:spcAft>
-            </a:pPr>
-            <a:r>
-              <a:rPr sz="2000" b="1" i="0">
-                <a:solidFill>
-                  <a:srgbClr val="FFFFFF"/>
-                </a:solidFill>
-                <a:latin typeface="Calibri"/>
-              </a:rPr>
-              <a:t>Preditivo</a:t>
-            </a:r>
-          </a:p>
-        </p:txBody>
-      </p:sp>
-      <p:sp>
-        <p:nvSpPr>
-          <p:cNvPr id="15" name="TextBox 14"/>
-          <p:cNvSpPr txBox="1"/>
-          <p:nvPr/>
-        </p:nvSpPr>
-        <p:spPr>
-          <a:xfrm>
-            <a:off x="4663440" y="2788920"/>
-            <a:ext cx="2862072" cy="2057400"/>
-          </a:xfrm>
-          <a:prstGeom prst="rect">
-            <a:avLst/>
-          </a:prstGeom>
-          <a:noFill/>
-        </p:spPr>
-        <p:txBody>
-          <a:bodyPr wrap="square" anchor="t" lIns="0" rIns="0" tIns="0" bIns="0">
-            <a:spAutoFit/>
-          </a:bodyPr>
-          <a:lstStyle/>
-          <a:p>
-            <a:pPr algn="l">
-              <a:spcBef>
-                <a:spcPts val="0"/>
-              </a:spcBef>
-              <a:spcAft>
-                <a:spcPts val="400"/>
-              </a:spcAft>
-            </a:pPr>
-            <a:r>
-              <a:rPr sz="1250" b="0" i="0">
-                <a:solidFill>
-                  <a:srgbClr val="334E68"/>
-                </a:solidFill>
-                <a:latin typeface="Calibri"/>
-              </a:rPr>
-              <a:t>O DataMosaix estende o monitoramento preditivo aos equipamentos não rotativos — os rotativos já são cobertos pela Tractian — e agrega as plantas em dashboards comparativos.</a:t>
-            </a:r>
-          </a:p>
-        </p:txBody>
-      </p:sp>
-      <p:sp>
-        <p:nvSpPr>
-          <p:cNvPr id="16" name="Chevron 15"/>
-          <p:cNvSpPr/>
-          <p:nvPr/>
-        </p:nvSpPr>
-        <p:spPr>
-          <a:xfrm>
-            <a:off x="7754112" y="3154680"/>
-            <a:ext cx="365760" cy="365760"/>
-          </a:xfrm>
-          <a:prstGeom prst="chevron">
-            <a:avLst/>
-          </a:prstGeom>
-          <a:solidFill>
-            <a:srgbClr val="F59E0B"/>
-          </a:solidFill>
-          <a:ln>
-            <a:noFill/>
-          </a:ln>
-          <a:effectLst/>
-        </p:spPr>
-        <p:style>
-          <a:lnRef idx="1">
-            <a:schemeClr val="accent1"/>
-          </a:lnRef>
-          <a:fillRef idx="3">
-            <a:schemeClr val="accent1"/>
-          </a:fillRef>
-          <a:effectRef idx="2">
-            <a:schemeClr val="accent1"/>
-          </a:effectRef>
-          <a:fontRef idx="minor">
-            <a:schemeClr val="lt1"/>
-          </a:fontRef>
-        </p:style>
-        <p:txBody>
-          <a:bodyPr rtlCol="0" anchor="ctr"/>
-          <a:lstStyle/>
-          <a:p>
-            <a:pPr algn="ctr"/>
-          </a:p>
-        </p:txBody>
-      </p:sp>
-      <p:sp>
-        <p:nvSpPr>
-          <p:cNvPr id="17" name="Rounded Rectangle 16"/>
-          <p:cNvSpPr/>
-          <p:nvPr/>
-        </p:nvSpPr>
-        <p:spPr>
-          <a:xfrm>
-            <a:off x="7964424" y="1737360"/>
-            <a:ext cx="3429000" cy="3200400"/>
-          </a:xfrm>
-          <a:prstGeom prst="roundRect">
-            <a:avLst/>
-          </a:prstGeom>
-          <a:solidFill>
-            <a:srgbClr val="FFFFFF"/>
-          </a:solidFill>
-          <a:ln w="19050">
-            <a:solidFill>
-              <a:srgbClr val="2563EB"/>
-            </a:solidFill>
-          </a:ln>
-          <a:effectLst/>
-          <a:effectLst>
-            <a:outerShdw blurRad="90000" dist="40000" dir="5400000" rotWithShape="0">
-              <a:srgbClr val="1B2A3A">
-                <a:alpha val="24000"/>
-              </a:srgbClr>
-            </a:outerShdw>
-          </a:effectLst>
-        </p:spPr>
-        <p:style>
-          <a:lnRef idx="1">
-            <a:schemeClr val="accent1"/>
-          </a:lnRef>
-          <a:fillRef idx="3">
-            <a:schemeClr val="accent1"/>
-          </a:fillRef>
-          <a:effectRef idx="2">
-            <a:schemeClr val="accent1"/>
-          </a:effectRef>
-          <a:fontRef idx="minor">
-            <a:schemeClr val="lt1"/>
-          </a:fontRef>
-        </p:style>
-        <p:txBody>
-          <a:bodyPr rtlCol="0" anchor="ctr"/>
-          <a:lstStyle/>
-          <a:p>
-            <a:pPr algn="ctr"/>
-          </a:p>
-        </p:txBody>
-      </p:sp>
-      <p:sp>
-        <p:nvSpPr>
-          <p:cNvPr id="18" name="Rounded Rectangle 17"/>
-          <p:cNvSpPr/>
-          <p:nvPr/>
-        </p:nvSpPr>
-        <p:spPr>
-          <a:xfrm>
-            <a:off x="7964424" y="1737360"/>
-            <a:ext cx="3429000" cy="868680"/>
-          </a:xfrm>
-          <a:prstGeom prst="roundRect">
-            <a:avLst/>
-          </a:prstGeom>
-          <a:solidFill>
-            <a:srgbClr val="2563EB"/>
-          </a:solidFill>
-          <a:ln>
-            <a:noFill/>
-          </a:ln>
-          <a:effectLst/>
-        </p:spPr>
-        <p:style>
-          <a:lnRef idx="1">
-            <a:schemeClr val="accent1"/>
-          </a:lnRef>
-          <a:fillRef idx="3">
-            <a:schemeClr val="accent1"/>
-          </a:fillRef>
-          <a:effectRef idx="2">
-            <a:schemeClr val="accent1"/>
-          </a:effectRef>
-          <a:fontRef idx="minor">
-            <a:schemeClr val="lt1"/>
-          </a:fontRef>
-        </p:style>
-        <p:txBody>
-          <a:bodyPr rtlCol="0" anchor="ctr"/>
-          <a:lstStyle/>
-          <a:p>
-            <a:pPr algn="ctr"/>
-          </a:p>
-        </p:txBody>
-      </p:sp>
-      <p:sp>
-        <p:nvSpPr>
-          <p:cNvPr id="19" name="TextBox 18"/>
-          <p:cNvSpPr txBox="1"/>
-          <p:nvPr/>
-        </p:nvSpPr>
-        <p:spPr>
-          <a:xfrm>
-            <a:off x="8238744" y="1847088"/>
-            <a:ext cx="2880360" cy="731520"/>
-          </a:xfrm>
-          <a:prstGeom prst="rect">
-            <a:avLst/>
-          </a:prstGeom>
-          <a:noFill/>
-        </p:spPr>
-        <p:txBody>
-          <a:bodyPr wrap="square" anchor="t" lIns="0" rIns="0" tIns="0" bIns="0">
-            <a:spAutoFit/>
-          </a:bodyPr>
-          <a:lstStyle/>
-          <a:p>
-            <a:pPr algn="l">
-              <a:spcBef>
-                <a:spcPts val="0"/>
-              </a:spcBef>
-              <a:spcAft>
-                <a:spcPts val="400"/>
-              </a:spcAft>
-            </a:pPr>
-            <a:r>
-              <a:rPr sz="1400" b="0" i="0">
-                <a:solidFill>
-                  <a:srgbClr val="FFFFFF"/>
-                </a:solidFill>
-                <a:latin typeface="Calibri"/>
-              </a:rPr>
-              <a:t>Fase 3</a:t>
-            </a:r>
-          </a:p>
-          <a:p>
-            <a:pPr algn="l">
-              <a:spcBef>
-                <a:spcPts val="0"/>
-              </a:spcBef>
-              <a:spcAft>
-                <a:spcPts val="400"/>
-              </a:spcAft>
-            </a:pPr>
-            <a:r>
-              <a:rPr sz="2000" b="1" i="0">
-                <a:solidFill>
-                  <a:srgbClr val="FFFFFF"/>
-                </a:solidFill>
-                <a:latin typeface="Calibri"/>
-              </a:rPr>
-              <a:t>Prescritivo + COI</a:t>
-            </a:r>
-          </a:p>
-        </p:txBody>
-      </p:sp>
-      <p:sp>
-        <p:nvSpPr>
-          <p:cNvPr id="20" name="TextBox 19"/>
-          <p:cNvSpPr txBox="1"/>
-          <p:nvPr/>
-        </p:nvSpPr>
-        <p:spPr>
-          <a:xfrm>
-            <a:off x="8257032" y="2788920"/>
-            <a:ext cx="2862072" cy="2057400"/>
-          </a:xfrm>
-          <a:prstGeom prst="rect">
-            <a:avLst/>
-          </a:prstGeom>
-          <a:noFill/>
-        </p:spPr>
-        <p:txBody>
-          <a:bodyPr wrap="square" anchor="t" lIns="0" rIns="0" tIns="0" bIns="0">
-            <a:spAutoFit/>
-          </a:bodyPr>
-          <a:lstStyle/>
-          <a:p>
-            <a:pPr algn="l">
-              <a:spcBef>
-                <a:spcPts val="0"/>
-              </a:spcBef>
-              <a:spcAft>
-                <a:spcPts val="400"/>
-              </a:spcAft>
-            </a:pPr>
-            <a:r>
-              <a:rPr sz="1250" b="0" i="0">
-                <a:solidFill>
-                  <a:srgbClr val="334E68"/>
-                </a:solidFill>
-                <a:latin typeface="Calibri"/>
-              </a:rPr>
-              <a:t>Em simulações de paradas em vários sites, com o COI centralizado a retomada das plantas ficou mais estável, rápida e otimizada — operação e manutenção. Com o time central treinando os sites, é possível até evitar desarmes.</a:t>
-            </a:r>
-          </a:p>
-        </p:txBody>
-      </p:sp>
-      <p:sp>
-        <p:nvSpPr>
-          <p:cNvPr id="21" name="Rounded Rectangle 20"/>
-          <p:cNvSpPr/>
-          <p:nvPr/>
-        </p:nvSpPr>
-        <p:spPr>
-          <a:xfrm>
-            <a:off x="777240" y="5212080"/>
-            <a:ext cx="8229600" cy="457200"/>
-          </a:xfrm>
-          <a:prstGeom prst="roundRect">
-            <a:avLst>
-              <a:gd name="adj" fmla="val 50000"/>
-            </a:avLst>
-          </a:prstGeom>
-          <a:solidFill>
-            <a:srgbClr val="102A43"/>
-          </a:solidFill>
-          <a:ln>
-            <a:noFill/>
-          </a:ln>
-          <a:effectLst/>
-        </p:spPr>
-        <p:style>
-          <a:lnRef idx="1">
-            <a:schemeClr val="accent1"/>
-          </a:lnRef>
-          <a:fillRef idx="3">
-            <a:schemeClr val="accent1"/>
-          </a:fillRef>
-          <a:effectRef idx="2">
-            <a:schemeClr val="accent1"/>
-          </a:effectRef>
-          <a:fontRef idx="minor">
-            <a:schemeClr val="lt1"/>
-          </a:fontRef>
-        </p:style>
-        <p:txBody>
-          <a:bodyPr rtlCol="0" anchor="ctr" wrap="square" tIns="12700" bIns="12700"/>
-          <a:lstStyle/>
-          <a:p>
-            <a:pPr algn="ctr"/>
-            <a:r>
-              <a:rPr sz="1300" b="1">
-                <a:solidFill>
-                  <a:srgbClr val="FFFFFF"/>
-                </a:solidFill>
-                <a:latin typeface="Calibri"/>
-              </a:rPr>
-              <a:t>ResilientEdge: disponível global desde 18/06/2026  ·  SCADA multi-site em rollout 2026</a:t>
-            </a:r>
-          </a:p>
-        </p:txBody>
-      </p:sp>
-      <p:sp>
-        <p:nvSpPr>
-          <p:cNvPr id="22" name="TextBox 21"/>
-          <p:cNvSpPr txBox="1"/>
-          <p:nvPr/>
-        </p:nvSpPr>
-        <p:spPr>
-          <a:xfrm>
-            <a:off x="11338560" y="6446520"/>
-            <a:ext cx="731520" cy="274320"/>
-          </a:xfrm>
-          <a:prstGeom prst="rect">
-            <a:avLst/>
-          </a:prstGeom>
-          <a:noFill/>
-        </p:spPr>
-        <p:txBody>
-          <a:bodyPr wrap="square" anchor="t" lIns="0" rIns="0" tIns="0" bIns="0">
-            <a:spAutoFit/>
-          </a:bodyPr>
-          <a:lstStyle/>
-          <a:p>
-            <a:pPr algn="r">
-              <a:spcBef>
-                <a:spcPts val="0"/>
-              </a:spcBef>
-              <a:spcAft>
-                <a:spcPts val="400"/>
-              </a:spcAft>
-            </a:pPr>
-            <a:r>
-              <a:rPr sz="1000" b="0" i="0">
-                <a:solidFill>
-                  <a:srgbClr val="627D98"/>
-                </a:solidFill>
-                <a:latin typeface="Calibri"/>
-              </a:rPr>
-              <a:t>20</a:t>
-            </a:r>
-          </a:p>
-        </p:txBody>
-      </p:sp>
-      <p:sp>
-        <p:nvSpPr>
-          <p:cNvPr id="23" name="TextBox 22"/>
-          <p:cNvSpPr txBox="1"/>
-          <p:nvPr/>
-        </p:nvSpPr>
-        <p:spPr>
-          <a:xfrm>
-            <a:off x="777240" y="6446520"/>
-            <a:ext cx="5486400" cy="274320"/>
-          </a:xfrm>
-          <a:prstGeom prst="rect">
-            <a:avLst/>
-          </a:prstGeom>
-          <a:noFill/>
-        </p:spPr>
-        <p:txBody>
-          <a:bodyPr wrap="square" anchor="t" lIns="0" rIns="0" tIns="0" bIns="0">
-            <a:spAutoFit/>
-          </a:bodyPr>
-          <a:lstStyle/>
-          <a:p>
-            <a:pPr algn="l">
-              <a:spcBef>
-                <a:spcPts val="0"/>
-              </a:spcBef>
-              <a:spcAft>
-                <a:spcPts val="400"/>
-              </a:spcAft>
-            </a:pPr>
-            <a:r>
-              <a:rPr sz="900" b="0" i="0">
-                <a:solidFill>
-                  <a:srgbClr val="627D98"/>
-                </a:solidFill>
-                <a:latin typeface="Calibri"/>
-              </a:rPr>
-              <a:t>Inpasa  ·  Gestão Estratégica de Automação</a:t>
-            </a:r>
-          </a:p>
-        </p:txBody>
-      </p:sp>
-    </p:spTree>
-  </p:cSld>
-  <p:clrMapOvr>
-    <a:masterClrMapping/>
-  </p:clrMapOvr>
-</p:sld>
-</file>
-
-<file path=ppt/slides/slide21.xml><?xml version="1.0" encoding="utf-8"?>
-<p:sld xmlns:a="http://schemas.openxmlformats.org/drawingml/2006/main" xmlns:p="http://schemas.openxmlformats.org/presentationml/2006/main" xmlns:r="http://schemas.openxmlformats.org/officeDocument/2006/relationships">
-  <p:cSld>
-    <p:bg>
-      <p:bgPr>
-        <a:solidFill>
           <a:srgbClr val="102A43"/>
         </a:solidFill>
         <a:effectLst/>
@@ -15671,7 +15183,7 @@
                 </a:solidFill>
                 <a:latin typeface="Calibri"/>
               </a:rPr>
-              <a:t>A AMBIÇÃO DA INPASA</a:t>
+              <a:t>O OBJETIVO PROPOSTO PELA ALTA GESTÃO</a:t>
             </a:r>
           </a:p>
         </p:txBody>
@@ -15796,8 +15308,8 @@
         </p:nvSpPr>
         <p:spPr>
           <a:xfrm>
-            <a:off x="822960" y="3703320"/>
-            <a:ext cx="2606040" cy="2240280"/>
+            <a:off x="822960" y="3611880"/>
+            <a:ext cx="2606040" cy="2057400"/>
           </a:xfrm>
           <a:prstGeom prst="roundRect">
             <a:avLst/>
@@ -15842,7 +15354,7 @@
         </p:nvSpPr>
         <p:spPr>
           <a:xfrm>
-            <a:off x="822960" y="3703320"/>
+            <a:off x="822960" y="3611880"/>
             <a:ext cx="2606040" cy="91440"/>
           </a:xfrm>
           <a:prstGeom prst="roundRect">
@@ -15886,7 +15398,7 @@
         </p:nvSpPr>
         <p:spPr>
           <a:xfrm>
-            <a:off x="1051560" y="4023360"/>
+            <a:off x="1051560" y="3931920"/>
             <a:ext cx="2148840" cy="822960"/>
           </a:xfrm>
           <a:prstGeom prst="rect">
@@ -15928,7 +15440,7 @@
         </p:nvSpPr>
         <p:spPr>
           <a:xfrm>
-            <a:off x="1051560" y="4846320"/>
+            <a:off x="1051560" y="4754880"/>
             <a:ext cx="2148840" cy="914400"/>
           </a:xfrm>
           <a:prstGeom prst="rect">
@@ -15970,8 +15482,8 @@
         </p:nvSpPr>
         <p:spPr>
           <a:xfrm>
-            <a:off x="3593592" y="3703320"/>
-            <a:ext cx="2606040" cy="2240280"/>
+            <a:off x="3593592" y="3611880"/>
+            <a:ext cx="2606040" cy="2057400"/>
           </a:xfrm>
           <a:prstGeom prst="roundRect">
             <a:avLst/>
@@ -16016,7 +15528,7 @@
         </p:nvSpPr>
         <p:spPr>
           <a:xfrm>
-            <a:off x="3593592" y="3703320"/>
+            <a:off x="3593592" y="3611880"/>
             <a:ext cx="2606040" cy="91440"/>
           </a:xfrm>
           <a:prstGeom prst="roundRect">
@@ -16060,7 +15572,7 @@
         </p:nvSpPr>
         <p:spPr>
           <a:xfrm>
-            <a:off x="3822192" y="4023360"/>
+            <a:off x="3822192" y="3931920"/>
             <a:ext cx="2148840" cy="822960"/>
           </a:xfrm>
           <a:prstGeom prst="rect">
@@ -16102,7 +15614,7 @@
         </p:nvSpPr>
         <p:spPr>
           <a:xfrm>
-            <a:off x="3822192" y="4846320"/>
+            <a:off x="3822192" y="4754880"/>
             <a:ext cx="2148840" cy="914400"/>
           </a:xfrm>
           <a:prstGeom prst="rect">
@@ -16144,8 +15656,8 @@
         </p:nvSpPr>
         <p:spPr>
           <a:xfrm>
-            <a:off x="6364224" y="3703320"/>
-            <a:ext cx="2606040" cy="2240280"/>
+            <a:off x="6364224" y="3611880"/>
+            <a:ext cx="2606040" cy="2057400"/>
           </a:xfrm>
           <a:prstGeom prst="roundRect">
             <a:avLst/>
@@ -16190,7 +15702,7 @@
         </p:nvSpPr>
         <p:spPr>
           <a:xfrm>
-            <a:off x="6364224" y="3703320"/>
+            <a:off x="6364224" y="3611880"/>
             <a:ext cx="2606040" cy="91440"/>
           </a:xfrm>
           <a:prstGeom prst="roundRect">
@@ -16234,7 +15746,7 @@
         </p:nvSpPr>
         <p:spPr>
           <a:xfrm>
-            <a:off x="6592824" y="4023360"/>
+            <a:off x="6592824" y="3931920"/>
             <a:ext cx="2148840" cy="822960"/>
           </a:xfrm>
           <a:prstGeom prst="rect">
@@ -16276,7 +15788,7 @@
         </p:nvSpPr>
         <p:spPr>
           <a:xfrm>
-            <a:off x="6592824" y="4846320"/>
+            <a:off x="6592824" y="4754880"/>
             <a:ext cx="2148840" cy="914400"/>
           </a:xfrm>
           <a:prstGeom prst="rect">
@@ -16318,8 +15830,8 @@
         </p:nvSpPr>
         <p:spPr>
           <a:xfrm>
-            <a:off x="9134856" y="3703320"/>
-            <a:ext cx="2606040" cy="2240280"/>
+            <a:off x="9134856" y="3611880"/>
+            <a:ext cx="2606040" cy="2057400"/>
           </a:xfrm>
           <a:prstGeom prst="roundRect">
             <a:avLst/>
@@ -16364,7 +15876,7 @@
         </p:nvSpPr>
         <p:spPr>
           <a:xfrm>
-            <a:off x="9134856" y="3703320"/>
+            <a:off x="9134856" y="3611880"/>
             <a:ext cx="2606040" cy="91440"/>
           </a:xfrm>
           <a:prstGeom prst="roundRect">
@@ -16408,7 +15920,7 @@
         </p:nvSpPr>
         <p:spPr>
           <a:xfrm>
-            <a:off x="9363456" y="4023360"/>
+            <a:off x="9363456" y="3931920"/>
             <a:ext cx="2148840" cy="822960"/>
           </a:xfrm>
           <a:prstGeom prst="rect">
@@ -16450,7 +15962,7 @@
         </p:nvSpPr>
         <p:spPr>
           <a:xfrm>
-            <a:off x="9363456" y="4846320"/>
+            <a:off x="9363456" y="4754880"/>
             <a:ext cx="2148840" cy="914400"/>
           </a:xfrm>
           <a:prstGeom prst="rect">
@@ -16484,6 +15996,57 @@
           </a:p>
         </p:txBody>
       </p:sp>
+      <p:sp>
+        <p:nvSpPr>
+          <p:cNvPr id="23" name="TextBox 22"/>
+          <p:cNvSpPr txBox="1"/>
+          <p:nvPr/>
+        </p:nvSpPr>
+        <p:spPr>
+          <a:xfrm>
+            <a:off x="822960" y="5943600"/>
+            <a:ext cx="10515600" cy="731520"/>
+          </a:xfrm>
+          <a:prstGeom prst="rect">
+            <a:avLst/>
+          </a:prstGeom>
+          <a:noFill/>
+        </p:spPr>
+        <p:txBody>
+          <a:bodyPr wrap="square" anchor="t" lIns="0" rIns="0" tIns="0" bIns="0">
+            <a:spAutoFit/>
+          </a:bodyPr>
+          <a:lstStyle/>
+          <a:p>
+            <a:pPr algn="l">
+              <a:spcBef>
+                <a:spcPts val="0"/>
+              </a:spcBef>
+              <a:spcAft>
+                <a:spcPts val="400"/>
+              </a:spcAft>
+            </a:pPr>
+            <a:r>
+              <a:rPr sz="1300" b="1" i="0">
+                <a:solidFill>
+                  <a:srgbClr val="169C52"/>
+                </a:solidFill>
+                <a:latin typeface="Calibri"/>
+              </a:rPr>
+              <a:t>Onde se encaixa: </a:t>
+            </a:r>
+            <a:r>
+              <a:rPr sz="1300" b="0" i="0">
+                <a:solidFill>
+                  <a:srgbClr val="CDDAE8"/>
+                </a:solidFill>
+                <a:latin typeface="Calibri"/>
+              </a:rPr>
+              <a:t>otimizar processos de pequenos ganhos — energia, vapor e outros — que muitas vezes não avaliamos por serem pequenos, mas que a IA consegue otimizar.</a:t>
+            </a:r>
+          </a:p>
+        </p:txBody>
+      </p:sp>
     </p:spTree>
   </p:cSld>
   <p:clrMapOvr>
@@ -16492,7 +16055,7 @@
 </p:sld>
 </file>
 
-<file path=ppt/slides/slide22.xml><?xml version="1.0" encoding="utf-8"?>
+<file path=ppt/slides/slide21.xml><?xml version="1.0" encoding="utf-8"?>
 <p:sld xmlns:a="http://schemas.openxmlformats.org/drawingml/2006/main" xmlns:p="http://schemas.openxmlformats.org/presentationml/2006/main" xmlns:r="http://schemas.openxmlformats.org/officeDocument/2006/relationships">
   <p:cSld>
     <p:bg>
@@ -17481,7 +17044,7 @@
                 </a:solidFill>
                 <a:latin typeface="Calibri"/>
               </a:rPr>
-              <a:t>Gestores e equipe do Hub de Automação conduzindo os fluxos no-code do DataMosaix.</a:t>
+              <a:t>Gestores e equipe do Hub de Automação nos fluxos no-code do DataMosaix, com apoio e patrocínio dos gestores de processo e de automação.</a:t>
             </a:r>
           </a:p>
         </p:txBody>
@@ -17523,7 +17086,7 @@
                 </a:solidFill>
                 <a:latin typeface="Calibri"/>
               </a:rPr>
-              <a:t>22</a:t>
+              <a:t>21</a:t>
             </a:r>
           </a:p>
         </p:txBody>
@@ -17578,7 +17141,7 @@
 </p:sld>
 </file>
 
-<file path=ppt/slides/slide23.xml><?xml version="1.0" encoding="utf-8"?>
+<file path=ppt/slides/slide22.xml><?xml version="1.0" encoding="utf-8"?>
 <p:sld xmlns:a="http://schemas.openxmlformats.org/drawingml/2006/main" xmlns:p="http://schemas.openxmlformats.org/presentationml/2006/main" xmlns:r="http://schemas.openxmlformats.org/officeDocument/2006/relationships">
   <p:cSld>
     <p:bg>
@@ -21026,7 +20589,7 @@
                 </a:solidFill>
                 <a:latin typeface="Calibri"/>
               </a:rPr>
-              <a:t>O dado fica preso em cada PlantPAx. Não existe uma visão única nem ranking entre unidades.</a:t>
+              <a:t>O dado fica preso no PlantPAx parcial de cada unidade. Não existe visão única nem ranking entre as plantas.</a:t>
             </a:r>
           </a:p>
         </p:txBody>
@@ -21406,7 +20969,7 @@
                 </a:solidFill>
                 <a:latin typeface="Calibri"/>
               </a:rPr>
-              <a:t>TracOS já evita 5–6 falhas/planta em rotativos. Falta cobrir equipamentos não rotativos e dar insight prescritivo para eles.</a:t>
+              <a:t>TracOS já evita 5–6 falhas/planta em rotativos. Falta cobrir equipamentos não rotativos e dar insight de manutenção prescritiva para eles.</a:t>
             </a:r>
           </a:p>
         </p:txBody>
@@ -23353,7 +22916,7 @@
                 </a:solidFill>
                 <a:latin typeface="Calibri"/>
               </a:rPr>
-              <a:t>SCADA multi-site (2026)</a:t>
+              <a:t>SCADA multi-site (Optix)</a:t>
             </a:r>
           </a:p>
         </p:txBody>
@@ -23395,7 +22958,7 @@
                 </a:solidFill>
                 <a:latin typeface="Calibri"/>
               </a:rPr>
-              <a:t>Centraliza o supervisório de todas as plantas em uma plataforma, com redundância de servidor e workstation clients.</a:t>
+              <a:t>O próprio FactoryTalk Optix ganha módulo SCADA: centraliza o supervisório de todas as plantas, com redundância de servidor e workstation clients.</a:t>
             </a:r>
           </a:p>
         </p:txBody>
@@ -23757,7 +23320,7 @@
                 </a:solidFill>
                 <a:latin typeface="Calibri"/>
               </a:rPr>
-              <a:t>FactoryTalk Remote Access via VPN: investigar e resolver antes de viajar à planta remota.</a:t>
+              <a:t>FactoryTalk Remote Access via VPN. Hoje a Inpasa usa Citrix, que pode ser mantido.</a:t>
             </a:r>
           </a:p>
         </p:txBody>
@@ -23938,7 +23501,7 @@
                 </a:solidFill>
                 <a:latin typeface="Calibri"/>
               </a:rPr>
-              <a:t>Comunica nativamente com controladores Rockwell e de terceiros; roda em qualquer hardware.</a:t>
+              <a:t>Comunica com controladores Rockwell e de terceiros e roda em qualquer hardware — integra os equipamentos multimarca da Inpasa, sem lock-in.</a:t>
             </a:r>
           </a:p>
         </p:txBody>

--- a/2026.06.28 - MULTI - DataOps na Prática IA a Serviço da Alta Gestão vFINAL.pptx
+++ b/2026.06.28 - MULTI - DataOps na Prática IA a Serviço da Alta Gestão vFINAL.pptx
@@ -20589,7 +20589,7 @@
                 </a:solidFill>
                 <a:latin typeface="Calibri"/>
               </a:rPr>
-              <a:t>O dado fica preso no PlantPAx parcial de cada unidade. Não existe visão única nem ranking entre as plantas.</a:t>
+              <a:t>O dado fica preso no PlantPAx parcial de cada unidade. Em automação, não existe visão única nem ranking comparativo entre as plantas.</a:t>
             </a:r>
           </a:p>
         </p:txBody>

--- a/2026.06.28 - MULTI - DataOps na Prática IA a Serviço da Alta Gestão vFINAL.pptx
+++ b/2026.06.28 - MULTI - DataOps na Prática IA a Serviço da Alta Gestão vFINAL.pptx
@@ -14711,7 +14711,7 @@
                 </a:solidFill>
                 <a:latin typeface="Calibri"/>
               </a:rPr>
-              <a:t>Manutenção parcialmente reativa (TracOS cobre rotativos) e alarmes acima da norma — falta prescritivo e não rotativos.</a:t>
+              <a:t>Manutenção parcialmente reativa: o TracOS cobre os rotativos com insight prescritivo. Faltam os alarmes acima da norma e o prescritivo dos equipamentos não rotativos.</a:t>
             </a:r>
           </a:p>
         </p:txBody>
@@ -17650,7 +17650,7 @@
                 </a:solidFill>
                 <a:latin typeface="Calibri"/>
               </a:rPr>
-              <a:t>PARCERIA ESTRATÉGICA</a:t>
+              <a:t>STRATEGIC PARTNERSHIP</a:t>
             </a:r>
           </a:p>
         </p:txBody>
@@ -17692,7 +17692,7 @@
                 </a:solidFill>
                 <a:latin typeface="Calibri"/>
               </a:rPr>
-              <a:t>Inpasa × Rockwell — leitura da sessão de 26/06/2026</a:t>
+              <a:t>Inpasa × Rockwell — June 26, 2026 session readout</a:t>
             </a:r>
           </a:p>
         </p:txBody>
@@ -17734,7 +17734,7 @@
                 </a:solidFill>
                 <a:latin typeface="Calibri"/>
               </a:rPr>
-              <a:t>Encontro executivo no campus da Rockwell (Mayfield Heights, OH). A Inpasa apresentou seus objetivos de automação; a Rockwell trouxe a visão de COI, DataOps e IA industrial.</a:t>
+              <a:t>Executive session at Rockwell's campus (Cleveland, OH). Inpasa presented its automation goals; Rockwell shared its vision for the COI, DataOps and industrial AI.</a:t>
             </a:r>
           </a:p>
         </p:txBody>
@@ -17873,7 +17873,7 @@
                 </a:solidFill>
                 <a:latin typeface="Calibri"/>
               </a:rPr>
-              <a:t>Agenda da sessão</a:t>
+              <a:t>Session agenda</a:t>
             </a:r>
           </a:p>
         </p:txBody>
@@ -18275,7 +18275,7 @@
                 </a:solidFill>
                 <a:latin typeface="Calibri"/>
               </a:rPr>
-              <a:t>Quem participou</a:t>
+              <a:t>Attendees</a:t>
             </a:r>
           </a:p>
         </p:txBody>
@@ -18338,7 +18338,7 @@
                 </a:solidFill>
                 <a:latin typeface="Calibri"/>
               </a:rPr>
-              <a:t>— VP Automação &amp; Elétrica (Inpasa)</a:t>
+              <a:t>— VP, Automation &amp; Electrical (Inpasa)</a:t>
             </a:r>
           </a:p>
           <a:p>
@@ -18418,7 +18418,7 @@
                 </a:solidFill>
                 <a:latin typeface="Calibri"/>
               </a:rPr>
-              <a:t>— Diretor Software &amp; Control, LATAM</a:t>
+              <a:t>— Director, Software &amp; Control, LATAM</a:t>
             </a:r>
           </a:p>
           <a:p>
@@ -18458,7 +18458,7 @@
                 </a:solidFill>
                 <a:latin typeface="Calibri"/>
               </a:rPr>
-              <a:t>— Diretor Visualization &amp; Production Data</a:t>
+              <a:t>— Director, Visualization &amp; Production Data</a:t>
             </a:r>
           </a:p>
           <a:p>
@@ -18498,7 +18498,7 @@
                 </a:solidFill>
                 <a:latin typeface="Calibri"/>
               </a:rPr>
-              <a:t>— PM Controllers · Chris Stearns — PlantPAx PM</a:t>
+              <a:t>— PM, Controllers · Chris Stearns — PlantPAx PM</a:t>
             </a:r>
           </a:p>
           <a:p>
@@ -18538,7 +18538,7 @@
                 </a:solidFill>
                 <a:latin typeface="Calibri"/>
               </a:rPr>
-              <a:t>— Solution Architect (time Brasil)</a:t>
+              <a:t>— Solution Architect (Brazil team)</a:t>
             </a:r>
           </a:p>
         </p:txBody>

--- a/2026.06.28 - MULTI - DataOps na Prática IA a Serviço da Alta Gestão vFINAL.pptx
+++ b/2026.06.28 - MULTI - DataOps na Prática IA a Serviço da Alta Gestão vFINAL.pptx
@@ -4012,7 +4012,7 @@
                 </a:solidFill>
                 <a:latin typeface="Calibri"/>
               </a:rPr>
-              <a:t>Em vez de integrações ponto a ponto, um hub central contextualiza e reaproveita o dado.</a:t>
+              <a:t>OT = operação (chão de fábrica) · IT = sistemas corporativos · ET = engenharia (ativos).</a:t>
             </a:r>
           </a:p>
         </p:txBody>
@@ -4131,7 +4131,7 @@
                 </a:solidFill>
                 <a:latin typeface="Calibri"/>
               </a:rPr>
-              <a:t>O hub industrial consolida dados de OT, IT e ET com contextualização, modelos, qualidade e catálogo — reutilizáveis por várias aplicações e pela IA.</a:t>
+              <a:t>Em vez de integrações ponto a ponto, o hub consolida OT, IT e ET com contextualização, modelos, qualidade e catálogo — reutilizáveis por várias aplicações e pela IA.</a:t>
             </a:r>
           </a:p>
         </p:txBody>

--- a/2026.06.28 - MULTI - DataOps na Prática IA a Serviço da Alta Gestão vFINAL.pptx
+++ b/2026.06.28 - MULTI - DataOps na Prática IA a Serviço da Alta Gestão vFINAL.pptx
@@ -4012,7 +4012,7 @@
                 </a:solidFill>
                 <a:latin typeface="Calibri"/>
               </a:rPr>
-              <a:t>OT = operação (chão de fábrica) · IT = sistemas corporativos · ET = engenharia (ativos).</a:t>
+              <a:t>OT = operação (chão de fábrica) · IT = informação (sistemas corporativos) · ET = engenharia (projeto/ativos).</a:t>
             </a:r>
           </a:p>
         </p:txBody>

--- a/2026.06.28 - MULTI - DataOps na Prática IA a Serviço da Alta Gestão vFINAL.pptx
+++ b/2026.06.28 - MULTI - DataOps na Prática IA a Serviço da Alta Gestão vFINAL.pptx
@@ -10409,7 +10409,7 @@
                 </a:solidFill>
                 <a:latin typeface="Calibri"/>
               </a:rPr>
-              <a:t>Hoje o dado vive dentro de cada PlantPAx. O DataMosaix é a camada que </a:t>
+              <a:t>Hoje o dado vive dentro de cada sistema de supervisão. O DataMosaix é a camada que </a:t>
             </a:r>
             <a:r>
               <a:rPr sz="1550" b="1" i="0">
@@ -22777,7 +22777,7 @@
                 </a:solidFill>
                 <a:latin typeface="Calibri"/>
               </a:rPr>
-              <a:t> da Rockwell: HMI/SCADA cloud-enabled, projetada e implantada pelo navegador.</a:t>
+              <a:t> da Rockwell: HMI e dados na borda, cloud-enabled, projetada e implantada pelo navegador.</a:t>
             </a:r>
           </a:p>
         </p:txBody>
@@ -22916,7 +22916,7 @@
                 </a:solidFill>
                 <a:latin typeface="Calibri"/>
               </a:rPr>
-              <a:t>SCADA multi-site (Optix)</a:t>
+              <a:t>FactoryTalk Optix</a:t>
             </a:r>
           </a:p>
         </p:txBody>
@@ -22958,7 +22958,7 @@
                 </a:solidFill>
                 <a:latin typeface="Calibri"/>
               </a:rPr>
-              <a:t>O próprio FactoryTalk Optix ganha módulo SCADA: centraliza o supervisório de todas as plantas, com redundância de servidor e workstation clients.</a:t>
+              <a:t>Plataforma aberta de HMI e dados na borda (Connect, Contextualize, Visualize, Share). Roda em painel, IPC ou cliente web (Windows/Linux) — não um SCADA multi-site com redundância.</a:t>
             </a:r>
           </a:p>
         </p:txBody>

--- a/2026.06.28 - MULTI - DataOps na Prática IA a Serviço da Alta Gestão vFINAL.pptx
+++ b/2026.06.28 - MULTI - DataOps na Prática IA a Serviço da Alta Gestão vFINAL.pptx
@@ -15295,7 +15295,7 @@
                 </a:solidFill>
                 <a:latin typeface="Calibri"/>
               </a:rPr>
-              <a:t>Não por status — mas pela vontade de gerar resultado para a companhia com tecnologia de ponta: mais produção, menos perdas e decisão baseada em dado.</a:t>
+              <a:t>Nosso objetivo é gerar resultado para a companhia com tecnologia de ponta: mais produção, menos perdas e decisão baseada em dado.</a:t>
             </a:r>
           </a:p>
         </p:txBody>
